--- a/arch/comite-arquitetura-techfin-template.pptx
+++ b/arch/comite-arquitetura-techfin-template.pptx
@@ -281,7 +281,7 @@
   </p:defaultTextStyle>
   <p:extLst>
     <p:ext uri="GoogleSlidesCustomDataVersion2">
-      <go:slidesCustomData xmlns:go="http://customooxmlschemas.google.com/" r:id="rId33" roundtripDataSignature="AMtx7mim1/sNVYYt9q95D9laYQ0l2856JA=="/>
+      <go:slidesCustomData xmlns:go="http://customooxmlschemas.google.com/" r:id="rId33" roundtripDataSignature="AMtx7mg+oal0xlVKSdTa/VAT4e+g9JIUyg=="/>
     </p:ext>
   </p:extLst>
 </p:presentation>
@@ -1748,6 +1748,10 @@
           <a:prstGeom prst="rect">
             <a:avLst/>
           </a:prstGeom>
+          <a:noFill/>
+          <a:ln>
+            <a:noFill/>
+          </a:ln>
         </p:spPr>
         <p:txBody>
           <a:bodyPr anchorCtr="0" anchor="t" bIns="45700" lIns="91425" spcFirstLastPara="1" rIns="91425" wrap="square" tIns="45700">
@@ -1756,12 +1760,16 @@
           <a:lstStyle/>
           <a:p>
             <a:pPr indent="0" lvl="0" marL="0" rtl="0" algn="l">
-              <a:spcBef>
-                <a:spcPts val="0"/>
-              </a:spcBef>
-              <a:spcAft>
-                <a:spcPts val="0"/>
-              </a:spcAft>
+              <a:lnSpc>
+                <a:spcPct val="100000"/>
+              </a:lnSpc>
+              <a:spcBef>
+                <a:spcPts val="0"/>
+              </a:spcBef>
+              <a:spcAft>
+                <a:spcPts val="0"/>
+              </a:spcAft>
+              <a:buSzPts val="1400"/>
               <a:buNone/>
             </a:pPr>
             <a:r>
@@ -1804,6 +1812,16 @@
               </a:path>
             </a:pathLst>
           </a:custGeom>
+          <a:noFill/>
+          <a:ln cap="flat" cmpd="sng" w="12700">
+            <a:solidFill>
+              <a:srgbClr val="000000"/>
+            </a:solidFill>
+            <a:prstDash val="solid"/>
+            <a:round/>
+            <a:headEnd len="sm" w="sm" type="none"/>
+            <a:tailEnd len="sm" w="sm" type="none"/>
+          </a:ln>
         </p:spPr>
       </p:sp>
     </p:spTree>
@@ -1847,6 +1865,10 @@
           <a:prstGeom prst="rect">
             <a:avLst/>
           </a:prstGeom>
+          <a:noFill/>
+          <a:ln>
+            <a:noFill/>
+          </a:ln>
         </p:spPr>
         <p:txBody>
           <a:bodyPr anchorCtr="0" anchor="t" bIns="45700" lIns="91425" spcFirstLastPara="1" rIns="91425" wrap="square" tIns="45700">
@@ -1855,12 +1877,16 @@
           <a:lstStyle/>
           <a:p>
             <a:pPr indent="0" lvl="0" marL="0" rtl="0" algn="l">
-              <a:spcBef>
-                <a:spcPts val="0"/>
-              </a:spcBef>
-              <a:spcAft>
-                <a:spcPts val="0"/>
-              </a:spcAft>
+              <a:lnSpc>
+                <a:spcPct val="100000"/>
+              </a:lnSpc>
+              <a:spcBef>
+                <a:spcPts val="0"/>
+              </a:spcBef>
+              <a:spcAft>
+                <a:spcPts val="0"/>
+              </a:spcAft>
+              <a:buSzPts val="1400"/>
               <a:buNone/>
             </a:pPr>
             <a:r>
@@ -1903,6 +1929,16 @@
               </a:path>
             </a:pathLst>
           </a:custGeom>
+          <a:noFill/>
+          <a:ln cap="flat" cmpd="sng" w="12700">
+            <a:solidFill>
+              <a:srgbClr val="000000"/>
+            </a:solidFill>
+            <a:prstDash val="solid"/>
+            <a:round/>
+            <a:headEnd len="sm" w="sm" type="none"/>
+            <a:tailEnd len="sm" w="sm" type="none"/>
+          </a:ln>
         </p:spPr>
       </p:sp>
     </p:spTree>
@@ -1946,6 +1982,10 @@
           <a:prstGeom prst="rect">
             <a:avLst/>
           </a:prstGeom>
+          <a:noFill/>
+          <a:ln>
+            <a:noFill/>
+          </a:ln>
         </p:spPr>
         <p:txBody>
           <a:bodyPr anchorCtr="0" anchor="t" bIns="45700" lIns="91425" spcFirstLastPara="1" rIns="91425" wrap="square" tIns="45700">
@@ -1954,12 +1994,16 @@
           <a:lstStyle/>
           <a:p>
             <a:pPr indent="0" lvl="0" marL="0" rtl="0" algn="l">
-              <a:spcBef>
-                <a:spcPts val="0"/>
-              </a:spcBef>
-              <a:spcAft>
-                <a:spcPts val="0"/>
-              </a:spcAft>
+              <a:lnSpc>
+                <a:spcPct val="100000"/>
+              </a:lnSpc>
+              <a:spcBef>
+                <a:spcPts val="0"/>
+              </a:spcBef>
+              <a:spcAft>
+                <a:spcPts val="0"/>
+              </a:spcAft>
+              <a:buSzPts val="1400"/>
               <a:buNone/>
             </a:pPr>
             <a:r>
@@ -2002,6 +2046,16 @@
               </a:path>
             </a:pathLst>
           </a:custGeom>
+          <a:noFill/>
+          <a:ln cap="flat" cmpd="sng" w="12700">
+            <a:solidFill>
+              <a:srgbClr val="000000"/>
+            </a:solidFill>
+            <a:prstDash val="solid"/>
+            <a:round/>
+            <a:headEnd len="sm" w="sm" type="none"/>
+            <a:tailEnd len="sm" w="sm" type="none"/>
+          </a:ln>
         </p:spPr>
       </p:sp>
     </p:spTree>
@@ -2045,6 +2099,10 @@
           <a:prstGeom prst="rect">
             <a:avLst/>
           </a:prstGeom>
+          <a:noFill/>
+          <a:ln>
+            <a:noFill/>
+          </a:ln>
         </p:spPr>
         <p:txBody>
           <a:bodyPr anchorCtr="0" anchor="t" bIns="45700" lIns="91425" spcFirstLastPara="1" rIns="91425" wrap="square" tIns="45700">
@@ -2053,12 +2111,16 @@
           <a:lstStyle/>
           <a:p>
             <a:pPr indent="0" lvl="0" marL="0" rtl="0" algn="l">
-              <a:spcBef>
-                <a:spcPts val="0"/>
-              </a:spcBef>
-              <a:spcAft>
-                <a:spcPts val="0"/>
-              </a:spcAft>
+              <a:lnSpc>
+                <a:spcPct val="100000"/>
+              </a:lnSpc>
+              <a:spcBef>
+                <a:spcPts val="0"/>
+              </a:spcBef>
+              <a:spcAft>
+                <a:spcPts val="0"/>
+              </a:spcAft>
+              <a:buSzPts val="1400"/>
               <a:buNone/>
             </a:pPr>
             <a:r>
@@ -2101,6 +2163,16 @@
               </a:path>
             </a:pathLst>
           </a:custGeom>
+          <a:noFill/>
+          <a:ln cap="flat" cmpd="sng" w="12700">
+            <a:solidFill>
+              <a:srgbClr val="000000"/>
+            </a:solidFill>
+            <a:prstDash val="solid"/>
+            <a:round/>
+            <a:headEnd len="sm" w="sm" type="none"/>
+            <a:tailEnd len="sm" w="sm" type="none"/>
+          </a:ln>
         </p:spPr>
       </p:sp>
     </p:spTree>
@@ -2144,6 +2216,10 @@
           <a:prstGeom prst="rect">
             <a:avLst/>
           </a:prstGeom>
+          <a:noFill/>
+          <a:ln>
+            <a:noFill/>
+          </a:ln>
         </p:spPr>
         <p:txBody>
           <a:bodyPr anchorCtr="0" anchor="t" bIns="45700" lIns="91425" spcFirstLastPara="1" rIns="91425" wrap="square" tIns="45700">
@@ -2152,12 +2228,16 @@
           <a:lstStyle/>
           <a:p>
             <a:pPr indent="0" lvl="0" marL="0" rtl="0" algn="l">
-              <a:spcBef>
-                <a:spcPts val="0"/>
-              </a:spcBef>
-              <a:spcAft>
-                <a:spcPts val="0"/>
-              </a:spcAft>
+              <a:lnSpc>
+                <a:spcPct val="100000"/>
+              </a:lnSpc>
+              <a:spcBef>
+                <a:spcPts val="0"/>
+              </a:spcBef>
+              <a:spcAft>
+                <a:spcPts val="0"/>
+              </a:spcAft>
+              <a:buSzPts val="1400"/>
               <a:buNone/>
             </a:pPr>
             <a:r>
@@ -2200,6 +2280,16 @@
               </a:path>
             </a:pathLst>
           </a:custGeom>
+          <a:noFill/>
+          <a:ln cap="flat" cmpd="sng" w="12700">
+            <a:solidFill>
+              <a:srgbClr val="000000"/>
+            </a:solidFill>
+            <a:prstDash val="solid"/>
+            <a:round/>
+            <a:headEnd len="sm" w="sm" type="none"/>
+            <a:tailEnd len="sm" w="sm" type="none"/>
+          </a:ln>
         </p:spPr>
       </p:sp>
     </p:spTree>
@@ -2243,6 +2333,10 @@
           <a:prstGeom prst="rect">
             <a:avLst/>
           </a:prstGeom>
+          <a:noFill/>
+          <a:ln>
+            <a:noFill/>
+          </a:ln>
         </p:spPr>
         <p:txBody>
           <a:bodyPr anchorCtr="0" anchor="t" bIns="45700" lIns="91425" spcFirstLastPara="1" rIns="91425" wrap="square" tIns="45700">
@@ -2251,12 +2345,16 @@
           <a:lstStyle/>
           <a:p>
             <a:pPr indent="0" lvl="0" marL="0" rtl="0" algn="l">
-              <a:spcBef>
-                <a:spcPts val="0"/>
-              </a:spcBef>
-              <a:spcAft>
-                <a:spcPts val="0"/>
-              </a:spcAft>
+              <a:lnSpc>
+                <a:spcPct val="100000"/>
+              </a:lnSpc>
+              <a:spcBef>
+                <a:spcPts val="0"/>
+              </a:spcBef>
+              <a:spcAft>
+                <a:spcPts val="0"/>
+              </a:spcAft>
+              <a:buSzPts val="1400"/>
               <a:buNone/>
             </a:pPr>
             <a:r>
@@ -2299,6 +2397,16 @@
               </a:path>
             </a:pathLst>
           </a:custGeom>
+          <a:noFill/>
+          <a:ln cap="flat" cmpd="sng" w="12700">
+            <a:solidFill>
+              <a:srgbClr val="000000"/>
+            </a:solidFill>
+            <a:prstDash val="solid"/>
+            <a:round/>
+            <a:headEnd len="sm" w="sm" type="none"/>
+            <a:tailEnd len="sm" w="sm" type="none"/>
+          </a:ln>
         </p:spPr>
       </p:sp>
     </p:spTree>
@@ -2342,6 +2450,10 @@
           <a:prstGeom prst="rect">
             <a:avLst/>
           </a:prstGeom>
+          <a:noFill/>
+          <a:ln>
+            <a:noFill/>
+          </a:ln>
         </p:spPr>
         <p:txBody>
           <a:bodyPr anchorCtr="0" anchor="t" bIns="45700" lIns="91425" spcFirstLastPara="1" rIns="91425" wrap="square" tIns="45700">
@@ -2350,12 +2462,16 @@
           <a:lstStyle/>
           <a:p>
             <a:pPr indent="0" lvl="0" marL="0" rtl="0" algn="l">
-              <a:spcBef>
-                <a:spcPts val="0"/>
-              </a:spcBef>
-              <a:spcAft>
-                <a:spcPts val="0"/>
-              </a:spcAft>
+              <a:lnSpc>
+                <a:spcPct val="100000"/>
+              </a:lnSpc>
+              <a:spcBef>
+                <a:spcPts val="0"/>
+              </a:spcBef>
+              <a:spcAft>
+                <a:spcPts val="0"/>
+              </a:spcAft>
+              <a:buSzPts val="1400"/>
               <a:buNone/>
             </a:pPr>
             <a:r>
@@ -2398,6 +2514,16 @@
               </a:path>
             </a:pathLst>
           </a:custGeom>
+          <a:noFill/>
+          <a:ln cap="flat" cmpd="sng" w="12700">
+            <a:solidFill>
+              <a:srgbClr val="000000"/>
+            </a:solidFill>
+            <a:prstDash val="solid"/>
+            <a:round/>
+            <a:headEnd len="sm" w="sm" type="none"/>
+            <a:tailEnd len="sm" w="sm" type="none"/>
+          </a:ln>
         </p:spPr>
       </p:sp>
     </p:spTree>
@@ -2441,6 +2567,10 @@
           <a:prstGeom prst="rect">
             <a:avLst/>
           </a:prstGeom>
+          <a:noFill/>
+          <a:ln>
+            <a:noFill/>
+          </a:ln>
         </p:spPr>
         <p:txBody>
           <a:bodyPr anchorCtr="0" anchor="t" bIns="45700" lIns="91425" spcFirstLastPara="1" rIns="91425" wrap="square" tIns="45700">
@@ -2449,12 +2579,16 @@
           <a:lstStyle/>
           <a:p>
             <a:pPr indent="0" lvl="0" marL="0" rtl="0" algn="l">
-              <a:spcBef>
-                <a:spcPts val="0"/>
-              </a:spcBef>
-              <a:spcAft>
-                <a:spcPts val="0"/>
-              </a:spcAft>
+              <a:lnSpc>
+                <a:spcPct val="100000"/>
+              </a:lnSpc>
+              <a:spcBef>
+                <a:spcPts val="0"/>
+              </a:spcBef>
+              <a:spcAft>
+                <a:spcPts val="0"/>
+              </a:spcAft>
+              <a:buSzPts val="1400"/>
               <a:buNone/>
             </a:pPr>
             <a:r>
@@ -2497,6 +2631,16 @@
               </a:path>
             </a:pathLst>
           </a:custGeom>
+          <a:noFill/>
+          <a:ln cap="flat" cmpd="sng" w="12700">
+            <a:solidFill>
+              <a:srgbClr val="000000"/>
+            </a:solidFill>
+            <a:prstDash val="solid"/>
+            <a:round/>
+            <a:headEnd len="sm" w="sm" type="none"/>
+            <a:tailEnd len="sm" w="sm" type="none"/>
+          </a:ln>
         </p:spPr>
       </p:sp>
     </p:spTree>
@@ -2540,6 +2684,10 @@
           <a:prstGeom prst="rect">
             <a:avLst/>
           </a:prstGeom>
+          <a:noFill/>
+          <a:ln>
+            <a:noFill/>
+          </a:ln>
         </p:spPr>
         <p:txBody>
           <a:bodyPr anchorCtr="0" anchor="t" bIns="45700" lIns="91425" spcFirstLastPara="1" rIns="91425" wrap="square" tIns="45700">
@@ -2548,12 +2696,16 @@
           <a:lstStyle/>
           <a:p>
             <a:pPr indent="0" lvl="0" marL="0" rtl="0" algn="l">
-              <a:spcBef>
-                <a:spcPts val="0"/>
-              </a:spcBef>
-              <a:spcAft>
-                <a:spcPts val="0"/>
-              </a:spcAft>
+              <a:lnSpc>
+                <a:spcPct val="100000"/>
+              </a:lnSpc>
+              <a:spcBef>
+                <a:spcPts val="0"/>
+              </a:spcBef>
+              <a:spcAft>
+                <a:spcPts val="0"/>
+              </a:spcAft>
+              <a:buSzPts val="1400"/>
               <a:buNone/>
             </a:pPr>
             <a:r>
@@ -2596,6 +2748,16 @@
               </a:path>
             </a:pathLst>
           </a:custGeom>
+          <a:noFill/>
+          <a:ln cap="flat" cmpd="sng" w="12700">
+            <a:solidFill>
+              <a:srgbClr val="000000"/>
+            </a:solidFill>
+            <a:prstDash val="solid"/>
+            <a:round/>
+            <a:headEnd len="sm" w="sm" type="none"/>
+            <a:tailEnd len="sm" w="sm" type="none"/>
+          </a:ln>
         </p:spPr>
       </p:sp>
     </p:spTree>
@@ -2639,6 +2801,10 @@
           <a:prstGeom prst="rect">
             <a:avLst/>
           </a:prstGeom>
+          <a:noFill/>
+          <a:ln>
+            <a:noFill/>
+          </a:ln>
         </p:spPr>
         <p:txBody>
           <a:bodyPr anchorCtr="0" anchor="t" bIns="45700" lIns="91425" spcFirstLastPara="1" rIns="91425" wrap="square" tIns="45700">
@@ -2647,12 +2813,16 @@
           <a:lstStyle/>
           <a:p>
             <a:pPr indent="0" lvl="0" marL="0" rtl="0" algn="l">
-              <a:spcBef>
-                <a:spcPts val="0"/>
-              </a:spcBef>
-              <a:spcAft>
-                <a:spcPts val="0"/>
-              </a:spcAft>
+              <a:lnSpc>
+                <a:spcPct val="100000"/>
+              </a:lnSpc>
+              <a:spcBef>
+                <a:spcPts val="0"/>
+              </a:spcBef>
+              <a:spcAft>
+                <a:spcPts val="0"/>
+              </a:spcAft>
+              <a:buSzPts val="1400"/>
               <a:buNone/>
             </a:pPr>
             <a:r>
@@ -2695,6 +2865,16 @@
               </a:path>
             </a:pathLst>
           </a:custGeom>
+          <a:noFill/>
+          <a:ln cap="flat" cmpd="sng" w="12700">
+            <a:solidFill>
+              <a:srgbClr val="000000"/>
+            </a:solidFill>
+            <a:prstDash val="solid"/>
+            <a:round/>
+            <a:headEnd len="sm" w="sm" type="none"/>
+            <a:tailEnd len="sm" w="sm" type="none"/>
+          </a:ln>
         </p:spPr>
       </p:sp>
     </p:spTree>
@@ -2859,6 +3039,10 @@
           <a:prstGeom prst="rect">
             <a:avLst/>
           </a:prstGeom>
+          <a:noFill/>
+          <a:ln>
+            <a:noFill/>
+          </a:ln>
         </p:spPr>
         <p:txBody>
           <a:bodyPr anchorCtr="0" anchor="t" bIns="45700" lIns="91425" spcFirstLastPara="1" rIns="91425" wrap="square" tIns="45700">
@@ -2867,12 +3051,16 @@
           <a:lstStyle/>
           <a:p>
             <a:pPr indent="0" lvl="0" marL="0" rtl="0" algn="l">
-              <a:spcBef>
-                <a:spcPts val="0"/>
-              </a:spcBef>
-              <a:spcAft>
-                <a:spcPts val="0"/>
-              </a:spcAft>
+              <a:lnSpc>
+                <a:spcPct val="100000"/>
+              </a:lnSpc>
+              <a:spcBef>
+                <a:spcPts val="0"/>
+              </a:spcBef>
+              <a:spcAft>
+                <a:spcPts val="0"/>
+              </a:spcAft>
+              <a:buSzPts val="1400"/>
               <a:buNone/>
             </a:pPr>
             <a:r>
@@ -2915,6 +3103,16 @@
               </a:path>
             </a:pathLst>
           </a:custGeom>
+          <a:noFill/>
+          <a:ln cap="flat" cmpd="sng" w="12700">
+            <a:solidFill>
+              <a:srgbClr val="000000"/>
+            </a:solidFill>
+            <a:prstDash val="solid"/>
+            <a:round/>
+            <a:headEnd len="sm" w="sm" type="none"/>
+            <a:tailEnd len="sm" w="sm" type="none"/>
+          </a:ln>
         </p:spPr>
       </p:sp>
     </p:spTree>
@@ -2958,6 +3156,10 @@
           <a:prstGeom prst="rect">
             <a:avLst/>
           </a:prstGeom>
+          <a:noFill/>
+          <a:ln>
+            <a:noFill/>
+          </a:ln>
         </p:spPr>
         <p:txBody>
           <a:bodyPr anchorCtr="0" anchor="t" bIns="45700" lIns="91425" spcFirstLastPara="1" rIns="91425" wrap="square" tIns="45700">
@@ -2966,12 +3168,16 @@
           <a:lstStyle/>
           <a:p>
             <a:pPr indent="0" lvl="0" marL="0" rtl="0" algn="l">
-              <a:spcBef>
-                <a:spcPts val="0"/>
-              </a:spcBef>
-              <a:spcAft>
-                <a:spcPts val="0"/>
-              </a:spcAft>
+              <a:lnSpc>
+                <a:spcPct val="100000"/>
+              </a:lnSpc>
+              <a:spcBef>
+                <a:spcPts val="0"/>
+              </a:spcBef>
+              <a:spcAft>
+                <a:spcPts val="0"/>
+              </a:spcAft>
+              <a:buSzPts val="1400"/>
               <a:buNone/>
             </a:pPr>
             <a:r>
@@ -3014,6 +3220,16 @@
               </a:path>
             </a:pathLst>
           </a:custGeom>
+          <a:noFill/>
+          <a:ln cap="flat" cmpd="sng" w="12700">
+            <a:solidFill>
+              <a:srgbClr val="000000"/>
+            </a:solidFill>
+            <a:prstDash val="solid"/>
+            <a:round/>
+            <a:headEnd len="sm" w="sm" type="none"/>
+            <a:tailEnd len="sm" w="sm" type="none"/>
+          </a:ln>
         </p:spPr>
       </p:sp>
     </p:spTree>
@@ -3057,6 +3273,10 @@
           <a:prstGeom prst="rect">
             <a:avLst/>
           </a:prstGeom>
+          <a:noFill/>
+          <a:ln>
+            <a:noFill/>
+          </a:ln>
         </p:spPr>
         <p:txBody>
           <a:bodyPr anchorCtr="0" anchor="t" bIns="45700" lIns="91425" spcFirstLastPara="1" rIns="91425" wrap="square" tIns="45700">
@@ -3065,12 +3285,16 @@
           <a:lstStyle/>
           <a:p>
             <a:pPr indent="0" lvl="0" marL="0" rtl="0" algn="l">
-              <a:spcBef>
-                <a:spcPts val="0"/>
-              </a:spcBef>
-              <a:spcAft>
-                <a:spcPts val="0"/>
-              </a:spcAft>
+              <a:lnSpc>
+                <a:spcPct val="100000"/>
+              </a:lnSpc>
+              <a:spcBef>
+                <a:spcPts val="0"/>
+              </a:spcBef>
+              <a:spcAft>
+                <a:spcPts val="0"/>
+              </a:spcAft>
+              <a:buSzPts val="1400"/>
               <a:buNone/>
             </a:pPr>
             <a:r>
@@ -3113,6 +3337,16 @@
               </a:path>
             </a:pathLst>
           </a:custGeom>
+          <a:noFill/>
+          <a:ln cap="flat" cmpd="sng" w="12700">
+            <a:solidFill>
+              <a:srgbClr val="000000"/>
+            </a:solidFill>
+            <a:prstDash val="solid"/>
+            <a:round/>
+            <a:headEnd len="sm" w="sm" type="none"/>
+            <a:tailEnd len="sm" w="sm" type="none"/>
+          </a:ln>
         </p:spPr>
       </p:sp>
     </p:spTree>
@@ -3156,6 +3390,10 @@
           <a:prstGeom prst="rect">
             <a:avLst/>
           </a:prstGeom>
+          <a:noFill/>
+          <a:ln>
+            <a:noFill/>
+          </a:ln>
         </p:spPr>
         <p:txBody>
           <a:bodyPr anchorCtr="0" anchor="t" bIns="45700" lIns="91425" spcFirstLastPara="1" rIns="91425" wrap="square" tIns="45700">
@@ -3164,12 +3402,16 @@
           <a:lstStyle/>
           <a:p>
             <a:pPr indent="0" lvl="0" marL="0" rtl="0" algn="l">
-              <a:spcBef>
-                <a:spcPts val="0"/>
-              </a:spcBef>
-              <a:spcAft>
-                <a:spcPts val="0"/>
-              </a:spcAft>
+              <a:lnSpc>
+                <a:spcPct val="100000"/>
+              </a:lnSpc>
+              <a:spcBef>
+                <a:spcPts val="0"/>
+              </a:spcBef>
+              <a:spcAft>
+                <a:spcPts val="0"/>
+              </a:spcAft>
+              <a:buSzPts val="1400"/>
               <a:buNone/>
             </a:pPr>
             <a:r>
@@ -3212,6 +3454,16 @@
               </a:path>
             </a:pathLst>
           </a:custGeom>
+          <a:noFill/>
+          <a:ln cap="flat" cmpd="sng" w="12700">
+            <a:solidFill>
+              <a:srgbClr val="000000"/>
+            </a:solidFill>
+            <a:prstDash val="solid"/>
+            <a:round/>
+            <a:headEnd len="sm" w="sm" type="none"/>
+            <a:tailEnd len="sm" w="sm" type="none"/>
+          </a:ln>
         </p:spPr>
       </p:sp>
     </p:spTree>
@@ -3255,6 +3507,10 @@
           <a:prstGeom prst="rect">
             <a:avLst/>
           </a:prstGeom>
+          <a:noFill/>
+          <a:ln>
+            <a:noFill/>
+          </a:ln>
         </p:spPr>
         <p:txBody>
           <a:bodyPr anchorCtr="0" anchor="t" bIns="45700" lIns="91425" spcFirstLastPara="1" rIns="91425" wrap="square" tIns="45700">
@@ -3263,12 +3519,16 @@
           <a:lstStyle/>
           <a:p>
             <a:pPr indent="0" lvl="0" marL="0" rtl="0" algn="l">
-              <a:spcBef>
-                <a:spcPts val="0"/>
-              </a:spcBef>
-              <a:spcAft>
-                <a:spcPts val="0"/>
-              </a:spcAft>
+              <a:lnSpc>
+                <a:spcPct val="100000"/>
+              </a:lnSpc>
+              <a:spcBef>
+                <a:spcPts val="0"/>
+              </a:spcBef>
+              <a:spcAft>
+                <a:spcPts val="0"/>
+              </a:spcAft>
+              <a:buSzPts val="1400"/>
               <a:buNone/>
             </a:pPr>
             <a:r>
@@ -3311,6 +3571,16 @@
               </a:path>
             </a:pathLst>
           </a:custGeom>
+          <a:noFill/>
+          <a:ln cap="flat" cmpd="sng" w="12700">
+            <a:solidFill>
+              <a:srgbClr val="000000"/>
+            </a:solidFill>
+            <a:prstDash val="solid"/>
+            <a:round/>
+            <a:headEnd len="sm" w="sm" type="none"/>
+            <a:tailEnd len="sm" w="sm" type="none"/>
+          </a:ln>
         </p:spPr>
       </p:sp>
     </p:spTree>
@@ -3354,6 +3624,10 @@
           <a:prstGeom prst="rect">
             <a:avLst/>
           </a:prstGeom>
+          <a:noFill/>
+          <a:ln>
+            <a:noFill/>
+          </a:ln>
         </p:spPr>
         <p:txBody>
           <a:bodyPr anchorCtr="0" anchor="t" bIns="45700" lIns="91425" spcFirstLastPara="1" rIns="91425" wrap="square" tIns="45700">
@@ -3362,12 +3636,16 @@
           <a:lstStyle/>
           <a:p>
             <a:pPr indent="0" lvl="0" marL="0" rtl="0" algn="l">
-              <a:spcBef>
-                <a:spcPts val="0"/>
-              </a:spcBef>
-              <a:spcAft>
-                <a:spcPts val="0"/>
-              </a:spcAft>
+              <a:lnSpc>
+                <a:spcPct val="100000"/>
+              </a:lnSpc>
+              <a:spcBef>
+                <a:spcPts val="0"/>
+              </a:spcBef>
+              <a:spcAft>
+                <a:spcPts val="0"/>
+              </a:spcAft>
+              <a:buSzPts val="1400"/>
               <a:buNone/>
             </a:pPr>
             <a:r>
@@ -3410,6 +3688,16 @@
               </a:path>
             </a:pathLst>
           </a:custGeom>
+          <a:noFill/>
+          <a:ln cap="flat" cmpd="sng" w="12700">
+            <a:solidFill>
+              <a:srgbClr val="000000"/>
+            </a:solidFill>
+            <a:prstDash val="solid"/>
+            <a:round/>
+            <a:headEnd len="sm" w="sm" type="none"/>
+            <a:tailEnd len="sm" w="sm" type="none"/>
+          </a:ln>
         </p:spPr>
       </p:sp>
     </p:spTree>
@@ -3453,6 +3741,10 @@
           <a:prstGeom prst="rect">
             <a:avLst/>
           </a:prstGeom>
+          <a:noFill/>
+          <a:ln>
+            <a:noFill/>
+          </a:ln>
         </p:spPr>
         <p:txBody>
           <a:bodyPr anchorCtr="0" anchor="t" bIns="45700" lIns="91425" spcFirstLastPara="1" rIns="91425" wrap="square" tIns="45700">
@@ -3461,12 +3753,16 @@
           <a:lstStyle/>
           <a:p>
             <a:pPr indent="0" lvl="0" marL="0" rtl="0" algn="l">
-              <a:spcBef>
-                <a:spcPts val="0"/>
-              </a:spcBef>
-              <a:spcAft>
-                <a:spcPts val="0"/>
-              </a:spcAft>
+              <a:lnSpc>
+                <a:spcPct val="100000"/>
+              </a:lnSpc>
+              <a:spcBef>
+                <a:spcPts val="0"/>
+              </a:spcBef>
+              <a:spcAft>
+                <a:spcPts val="0"/>
+              </a:spcAft>
+              <a:buSzPts val="1400"/>
               <a:buNone/>
             </a:pPr>
             <a:r>
@@ -3509,6 +3805,16 @@
               </a:path>
             </a:pathLst>
           </a:custGeom>
+          <a:noFill/>
+          <a:ln cap="flat" cmpd="sng" w="12700">
+            <a:solidFill>
+              <a:srgbClr val="000000"/>
+            </a:solidFill>
+            <a:prstDash val="solid"/>
+            <a:round/>
+            <a:headEnd len="sm" w="sm" type="none"/>
+            <a:tailEnd len="sm" w="sm" type="none"/>
+          </a:ln>
         </p:spPr>
       </p:sp>
     </p:spTree>
@@ -3552,6 +3858,10 @@
           <a:prstGeom prst="rect">
             <a:avLst/>
           </a:prstGeom>
+          <a:noFill/>
+          <a:ln>
+            <a:noFill/>
+          </a:ln>
         </p:spPr>
         <p:txBody>
           <a:bodyPr anchorCtr="0" anchor="t" bIns="45700" lIns="91425" spcFirstLastPara="1" rIns="91425" wrap="square" tIns="45700">
@@ -3560,12 +3870,16 @@
           <a:lstStyle/>
           <a:p>
             <a:pPr indent="0" lvl="0" marL="0" rtl="0" algn="l">
-              <a:spcBef>
-                <a:spcPts val="0"/>
-              </a:spcBef>
-              <a:spcAft>
-                <a:spcPts val="0"/>
-              </a:spcAft>
+              <a:lnSpc>
+                <a:spcPct val="100000"/>
+              </a:lnSpc>
+              <a:spcBef>
+                <a:spcPts val="0"/>
+              </a:spcBef>
+              <a:spcAft>
+                <a:spcPts val="0"/>
+              </a:spcAft>
+              <a:buSzPts val="1400"/>
               <a:buNone/>
             </a:pPr>
             <a:r>
@@ -3608,6 +3922,16 @@
               </a:path>
             </a:pathLst>
           </a:custGeom>
+          <a:noFill/>
+          <a:ln cap="flat" cmpd="sng" w="12700">
+            <a:solidFill>
+              <a:srgbClr val="000000"/>
+            </a:solidFill>
+            <a:prstDash val="solid"/>
+            <a:round/>
+            <a:headEnd len="sm" w="sm" type="none"/>
+            <a:tailEnd len="sm" w="sm" type="none"/>
+          </a:ln>
         </p:spPr>
       </p:sp>
     </p:spTree>
@@ -3651,6 +3975,10 @@
           <a:prstGeom prst="rect">
             <a:avLst/>
           </a:prstGeom>
+          <a:noFill/>
+          <a:ln>
+            <a:noFill/>
+          </a:ln>
         </p:spPr>
         <p:txBody>
           <a:bodyPr anchorCtr="0" anchor="t" bIns="45700" lIns="91425" spcFirstLastPara="1" rIns="91425" wrap="square" tIns="45700">
@@ -3659,12 +3987,16 @@
           <a:lstStyle/>
           <a:p>
             <a:pPr indent="0" lvl="0" marL="0" rtl="0" algn="l">
-              <a:spcBef>
-                <a:spcPts val="0"/>
-              </a:spcBef>
-              <a:spcAft>
-                <a:spcPts val="0"/>
-              </a:spcAft>
+              <a:lnSpc>
+                <a:spcPct val="100000"/>
+              </a:lnSpc>
+              <a:spcBef>
+                <a:spcPts val="0"/>
+              </a:spcBef>
+              <a:spcAft>
+                <a:spcPts val="0"/>
+              </a:spcAft>
+              <a:buSzPts val="1400"/>
               <a:buNone/>
             </a:pPr>
             <a:r>
@@ -3707,6 +4039,16 @@
               </a:path>
             </a:pathLst>
           </a:custGeom>
+          <a:noFill/>
+          <a:ln cap="flat" cmpd="sng" w="12700">
+            <a:solidFill>
+              <a:srgbClr val="000000"/>
+            </a:solidFill>
+            <a:prstDash val="solid"/>
+            <a:round/>
+            <a:headEnd len="sm" w="sm" type="none"/>
+            <a:tailEnd len="sm" w="sm" type="none"/>
+          </a:ln>
         </p:spPr>
       </p:sp>
     </p:spTree>
@@ -4082,7 +4424,11 @@
               <a:spcAft>
                 <a:spcPts val="0"/>
               </a:spcAft>
+              <a:buClr>
+                <a:srgbClr val="000000"/>
+              </a:buClr>
               <a:buSzPts val="1400"/>
+              <a:buFont typeface="Arial"/>
               <a:buNone/>
               <a:defRPr b="0" i="0" sz="1400" u="none" cap="none" strike="noStrike">
                 <a:solidFill>
@@ -4104,7 +4450,11 @@
               <a:spcAft>
                 <a:spcPts val="0"/>
               </a:spcAft>
+              <a:buClr>
+                <a:srgbClr val="000000"/>
+              </a:buClr>
               <a:buSzPts val="1400"/>
+              <a:buFont typeface="Arial"/>
               <a:buNone/>
               <a:defRPr b="0" i="0" sz="1400" u="none" cap="none" strike="noStrike">
                 <a:solidFill>
@@ -4126,7 +4476,11 @@
               <a:spcAft>
                 <a:spcPts val="0"/>
               </a:spcAft>
+              <a:buClr>
+                <a:srgbClr val="000000"/>
+              </a:buClr>
               <a:buSzPts val="1400"/>
+              <a:buFont typeface="Arial"/>
               <a:buNone/>
               <a:defRPr b="0" i="0" sz="1400" u="none" cap="none" strike="noStrike">
                 <a:solidFill>
@@ -4148,7 +4502,11 @@
               <a:spcAft>
                 <a:spcPts val="0"/>
               </a:spcAft>
+              <a:buClr>
+                <a:srgbClr val="000000"/>
+              </a:buClr>
               <a:buSzPts val="1400"/>
+              <a:buFont typeface="Arial"/>
               <a:buNone/>
               <a:defRPr b="0" i="0" sz="1400" u="none" cap="none" strike="noStrike">
                 <a:solidFill>
@@ -4170,7 +4528,11 @@
               <a:spcAft>
                 <a:spcPts val="0"/>
               </a:spcAft>
+              <a:buClr>
+                <a:srgbClr val="000000"/>
+              </a:buClr>
               <a:buSzPts val="1400"/>
+              <a:buFont typeface="Arial"/>
               <a:buNone/>
               <a:defRPr b="0" i="0" sz="1400" u="none" cap="none" strike="noStrike">
                 <a:solidFill>
@@ -4192,7 +4554,11 @@
               <a:spcAft>
                 <a:spcPts val="0"/>
               </a:spcAft>
+              <a:buClr>
+                <a:srgbClr val="000000"/>
+              </a:buClr>
               <a:buSzPts val="1400"/>
+              <a:buFont typeface="Arial"/>
               <a:buNone/>
               <a:defRPr b="0" i="0" sz="1400" u="none" cap="none" strike="noStrike">
                 <a:solidFill>
@@ -4214,7 +4580,11 @@
               <a:spcAft>
                 <a:spcPts val="0"/>
               </a:spcAft>
+              <a:buClr>
+                <a:srgbClr val="000000"/>
+              </a:buClr>
               <a:buSzPts val="1400"/>
+              <a:buFont typeface="Arial"/>
               <a:buNone/>
               <a:defRPr b="0" i="0" sz="1400" u="none" cap="none" strike="noStrike">
                 <a:solidFill>
@@ -4236,7 +4606,11 @@
               <a:spcAft>
                 <a:spcPts val="0"/>
               </a:spcAft>
+              <a:buClr>
+                <a:srgbClr val="000000"/>
+              </a:buClr>
               <a:buSzPts val="1400"/>
+              <a:buFont typeface="Arial"/>
               <a:buNone/>
               <a:defRPr b="0" i="0" sz="1400" u="none" cap="none" strike="noStrike">
                 <a:solidFill>
@@ -4258,7 +4632,11 @@
               <a:spcAft>
                 <a:spcPts val="0"/>
               </a:spcAft>
+              <a:buClr>
+                <a:srgbClr val="000000"/>
+              </a:buClr>
               <a:buSzPts val="1400"/>
+              <a:buFont typeface="Arial"/>
               <a:buNone/>
               <a:defRPr b="0" i="0" sz="1400" u="none" cap="none" strike="noStrike">
                 <a:solidFill>
@@ -4310,7 +4688,11 @@
               <a:spcAft>
                 <a:spcPts val="0"/>
               </a:spcAft>
+              <a:buClr>
+                <a:srgbClr val="000000"/>
+              </a:buClr>
               <a:buSzPts val="1400"/>
+              <a:buFont typeface="Arial"/>
               <a:buNone/>
               <a:defRPr b="0" i="0" sz="1400" u="none" cap="none" strike="noStrike">
                 <a:solidFill>
@@ -4332,7 +4714,11 @@
               <a:spcAft>
                 <a:spcPts val="0"/>
               </a:spcAft>
+              <a:buClr>
+                <a:srgbClr val="000000"/>
+              </a:buClr>
               <a:buSzPts val="1400"/>
+              <a:buFont typeface="Arial"/>
               <a:buNone/>
               <a:defRPr b="0" i="0" sz="1400" u="none" cap="none" strike="noStrike">
                 <a:solidFill>
@@ -4354,7 +4740,11 @@
               <a:spcAft>
                 <a:spcPts val="0"/>
               </a:spcAft>
+              <a:buClr>
+                <a:srgbClr val="000000"/>
+              </a:buClr>
               <a:buSzPts val="1400"/>
+              <a:buFont typeface="Arial"/>
               <a:buNone/>
               <a:defRPr b="0" i="0" sz="1400" u="none" cap="none" strike="noStrike">
                 <a:solidFill>
@@ -4376,7 +4766,11 @@
               <a:spcAft>
                 <a:spcPts val="0"/>
               </a:spcAft>
+              <a:buClr>
+                <a:srgbClr val="000000"/>
+              </a:buClr>
               <a:buSzPts val="1400"/>
+              <a:buFont typeface="Arial"/>
               <a:buNone/>
               <a:defRPr b="0" i="0" sz="1400" u="none" cap="none" strike="noStrike">
                 <a:solidFill>
@@ -4398,7 +4792,11 @@
               <a:spcAft>
                 <a:spcPts val="0"/>
               </a:spcAft>
+              <a:buClr>
+                <a:srgbClr val="000000"/>
+              </a:buClr>
               <a:buSzPts val="1400"/>
+              <a:buFont typeface="Arial"/>
               <a:buNone/>
               <a:defRPr b="0" i="0" sz="1400" u="none" cap="none" strike="noStrike">
                 <a:solidFill>
@@ -4420,7 +4818,11 @@
               <a:spcAft>
                 <a:spcPts val="0"/>
               </a:spcAft>
+              <a:buClr>
+                <a:srgbClr val="000000"/>
+              </a:buClr>
               <a:buSzPts val="1400"/>
+              <a:buFont typeface="Arial"/>
               <a:buNone/>
               <a:defRPr b="0" i="0" sz="1400" u="none" cap="none" strike="noStrike">
                 <a:solidFill>
@@ -4442,7 +4844,11 @@
               <a:spcAft>
                 <a:spcPts val="0"/>
               </a:spcAft>
+              <a:buClr>
+                <a:srgbClr val="000000"/>
+              </a:buClr>
               <a:buSzPts val="1400"/>
+              <a:buFont typeface="Arial"/>
               <a:buNone/>
               <a:defRPr b="0" i="0" sz="1400" u="none" cap="none" strike="noStrike">
                 <a:solidFill>
@@ -4464,7 +4870,11 @@
               <a:spcAft>
                 <a:spcPts val="0"/>
               </a:spcAft>
+              <a:buClr>
+                <a:srgbClr val="000000"/>
+              </a:buClr>
               <a:buSzPts val="1400"/>
+              <a:buFont typeface="Arial"/>
               <a:buNone/>
               <a:defRPr b="0" i="0" sz="1400" u="none" cap="none" strike="noStrike">
                 <a:solidFill>
@@ -4486,7 +4896,11 @@
               <a:spcAft>
                 <a:spcPts val="0"/>
               </a:spcAft>
+              <a:buClr>
+                <a:srgbClr val="000000"/>
+              </a:buClr>
               <a:buSzPts val="1400"/>
+              <a:buFont typeface="Arial"/>
               <a:buNone/>
               <a:defRPr b="0" i="0" sz="1400" u="none" cap="none" strike="noStrike">
                 <a:solidFill>
@@ -4528,131 +4942,239 @@
             <a:normAutofit/>
           </a:bodyPr>
           <a:lstStyle>
-            <a:lvl1pPr indent="0" lvl="0" marL="0" algn="r">
-              <a:lnSpc>
-                <a:spcPct val="100000"/>
-              </a:lnSpc>
-              <a:spcBef>
-                <a:spcPts val="0"/>
-              </a:spcBef>
-              <a:spcAft>
-                <a:spcPts val="0"/>
-              </a:spcAft>
+            <a:lvl1pPr indent="0" lvl="0" marL="0" marR="0" algn="r">
+              <a:lnSpc>
+                <a:spcPct val="100000"/>
+              </a:lnSpc>
+              <a:spcBef>
+                <a:spcPts val="0"/>
+              </a:spcBef>
+              <a:spcAft>
+                <a:spcPts val="0"/>
+              </a:spcAft>
+              <a:buClr>
+                <a:srgbClr val="000000"/>
+              </a:buClr>
               <a:buSzPts val="1300"/>
-              <a:buNone/>
-              <a:defRPr/>
+              <a:buFont typeface="Arial"/>
+              <a:buNone/>
+              <a:defRPr b="0" i="0" sz="1300" u="none" cap="none" strike="noStrike">
+                <a:solidFill>
+                  <a:schemeClr val="dk1"/>
+                </a:solidFill>
+                <a:latin typeface="Proxima Nova"/>
+                <a:ea typeface="Proxima Nova"/>
+                <a:cs typeface="Proxima Nova"/>
+                <a:sym typeface="Proxima Nova"/>
+              </a:defRPr>
             </a:lvl1pPr>
-            <a:lvl2pPr indent="0" lvl="1" marL="0" algn="r">
-              <a:lnSpc>
-                <a:spcPct val="100000"/>
-              </a:lnSpc>
-              <a:spcBef>
-                <a:spcPts val="0"/>
-              </a:spcBef>
-              <a:spcAft>
-                <a:spcPts val="0"/>
-              </a:spcAft>
+            <a:lvl2pPr indent="0" lvl="1" marL="0" marR="0" algn="r">
+              <a:lnSpc>
+                <a:spcPct val="100000"/>
+              </a:lnSpc>
+              <a:spcBef>
+                <a:spcPts val="0"/>
+              </a:spcBef>
+              <a:spcAft>
+                <a:spcPts val="0"/>
+              </a:spcAft>
+              <a:buClr>
+                <a:srgbClr val="000000"/>
+              </a:buClr>
               <a:buSzPts val="1300"/>
-              <a:buNone/>
-              <a:defRPr/>
+              <a:buFont typeface="Arial"/>
+              <a:buNone/>
+              <a:defRPr b="0" i="0" sz="1300" u="none" cap="none" strike="noStrike">
+                <a:solidFill>
+                  <a:schemeClr val="dk1"/>
+                </a:solidFill>
+                <a:latin typeface="Proxima Nova"/>
+                <a:ea typeface="Proxima Nova"/>
+                <a:cs typeface="Proxima Nova"/>
+                <a:sym typeface="Proxima Nova"/>
+              </a:defRPr>
             </a:lvl2pPr>
-            <a:lvl3pPr indent="0" lvl="2" marL="0" algn="r">
-              <a:lnSpc>
-                <a:spcPct val="100000"/>
-              </a:lnSpc>
-              <a:spcBef>
-                <a:spcPts val="0"/>
-              </a:spcBef>
-              <a:spcAft>
-                <a:spcPts val="0"/>
-              </a:spcAft>
+            <a:lvl3pPr indent="0" lvl="2" marL="0" marR="0" algn="r">
+              <a:lnSpc>
+                <a:spcPct val="100000"/>
+              </a:lnSpc>
+              <a:spcBef>
+                <a:spcPts val="0"/>
+              </a:spcBef>
+              <a:spcAft>
+                <a:spcPts val="0"/>
+              </a:spcAft>
+              <a:buClr>
+                <a:srgbClr val="000000"/>
+              </a:buClr>
               <a:buSzPts val="1300"/>
-              <a:buNone/>
-              <a:defRPr/>
+              <a:buFont typeface="Arial"/>
+              <a:buNone/>
+              <a:defRPr b="0" i="0" sz="1300" u="none" cap="none" strike="noStrike">
+                <a:solidFill>
+                  <a:schemeClr val="dk1"/>
+                </a:solidFill>
+                <a:latin typeface="Proxima Nova"/>
+                <a:ea typeface="Proxima Nova"/>
+                <a:cs typeface="Proxima Nova"/>
+                <a:sym typeface="Proxima Nova"/>
+              </a:defRPr>
             </a:lvl3pPr>
-            <a:lvl4pPr indent="0" lvl="3" marL="0" algn="r">
-              <a:lnSpc>
-                <a:spcPct val="100000"/>
-              </a:lnSpc>
-              <a:spcBef>
-                <a:spcPts val="0"/>
-              </a:spcBef>
-              <a:spcAft>
-                <a:spcPts val="0"/>
-              </a:spcAft>
+            <a:lvl4pPr indent="0" lvl="3" marL="0" marR="0" algn="r">
+              <a:lnSpc>
+                <a:spcPct val="100000"/>
+              </a:lnSpc>
+              <a:spcBef>
+                <a:spcPts val="0"/>
+              </a:spcBef>
+              <a:spcAft>
+                <a:spcPts val="0"/>
+              </a:spcAft>
+              <a:buClr>
+                <a:srgbClr val="000000"/>
+              </a:buClr>
               <a:buSzPts val="1300"/>
-              <a:buNone/>
-              <a:defRPr/>
+              <a:buFont typeface="Arial"/>
+              <a:buNone/>
+              <a:defRPr b="0" i="0" sz="1300" u="none" cap="none" strike="noStrike">
+                <a:solidFill>
+                  <a:schemeClr val="dk1"/>
+                </a:solidFill>
+                <a:latin typeface="Proxima Nova"/>
+                <a:ea typeface="Proxima Nova"/>
+                <a:cs typeface="Proxima Nova"/>
+                <a:sym typeface="Proxima Nova"/>
+              </a:defRPr>
             </a:lvl4pPr>
-            <a:lvl5pPr indent="0" lvl="4" marL="0" algn="r">
-              <a:lnSpc>
-                <a:spcPct val="100000"/>
-              </a:lnSpc>
-              <a:spcBef>
-                <a:spcPts val="0"/>
-              </a:spcBef>
-              <a:spcAft>
-                <a:spcPts val="0"/>
-              </a:spcAft>
+            <a:lvl5pPr indent="0" lvl="4" marL="0" marR="0" algn="r">
+              <a:lnSpc>
+                <a:spcPct val="100000"/>
+              </a:lnSpc>
+              <a:spcBef>
+                <a:spcPts val="0"/>
+              </a:spcBef>
+              <a:spcAft>
+                <a:spcPts val="0"/>
+              </a:spcAft>
+              <a:buClr>
+                <a:srgbClr val="000000"/>
+              </a:buClr>
               <a:buSzPts val="1300"/>
-              <a:buNone/>
-              <a:defRPr/>
+              <a:buFont typeface="Arial"/>
+              <a:buNone/>
+              <a:defRPr b="0" i="0" sz="1300" u="none" cap="none" strike="noStrike">
+                <a:solidFill>
+                  <a:schemeClr val="dk1"/>
+                </a:solidFill>
+                <a:latin typeface="Proxima Nova"/>
+                <a:ea typeface="Proxima Nova"/>
+                <a:cs typeface="Proxima Nova"/>
+                <a:sym typeface="Proxima Nova"/>
+              </a:defRPr>
             </a:lvl5pPr>
-            <a:lvl6pPr indent="0" lvl="5" marL="0" algn="r">
-              <a:lnSpc>
-                <a:spcPct val="100000"/>
-              </a:lnSpc>
-              <a:spcBef>
-                <a:spcPts val="0"/>
-              </a:spcBef>
-              <a:spcAft>
-                <a:spcPts val="0"/>
-              </a:spcAft>
+            <a:lvl6pPr indent="0" lvl="5" marL="0" marR="0" algn="r">
+              <a:lnSpc>
+                <a:spcPct val="100000"/>
+              </a:lnSpc>
+              <a:spcBef>
+                <a:spcPts val="0"/>
+              </a:spcBef>
+              <a:spcAft>
+                <a:spcPts val="0"/>
+              </a:spcAft>
+              <a:buClr>
+                <a:srgbClr val="000000"/>
+              </a:buClr>
               <a:buSzPts val="1300"/>
-              <a:buNone/>
-              <a:defRPr/>
+              <a:buFont typeface="Arial"/>
+              <a:buNone/>
+              <a:defRPr b="0" i="0" sz="1300" u="none" cap="none" strike="noStrike">
+                <a:solidFill>
+                  <a:schemeClr val="dk1"/>
+                </a:solidFill>
+                <a:latin typeface="Proxima Nova"/>
+                <a:ea typeface="Proxima Nova"/>
+                <a:cs typeface="Proxima Nova"/>
+                <a:sym typeface="Proxima Nova"/>
+              </a:defRPr>
             </a:lvl6pPr>
-            <a:lvl7pPr indent="0" lvl="6" marL="0" algn="r">
-              <a:lnSpc>
-                <a:spcPct val="100000"/>
-              </a:lnSpc>
-              <a:spcBef>
-                <a:spcPts val="0"/>
-              </a:spcBef>
-              <a:spcAft>
-                <a:spcPts val="0"/>
-              </a:spcAft>
+            <a:lvl7pPr indent="0" lvl="6" marL="0" marR="0" algn="r">
+              <a:lnSpc>
+                <a:spcPct val="100000"/>
+              </a:lnSpc>
+              <a:spcBef>
+                <a:spcPts val="0"/>
+              </a:spcBef>
+              <a:spcAft>
+                <a:spcPts val="0"/>
+              </a:spcAft>
+              <a:buClr>
+                <a:srgbClr val="000000"/>
+              </a:buClr>
               <a:buSzPts val="1300"/>
-              <a:buNone/>
-              <a:defRPr/>
+              <a:buFont typeface="Arial"/>
+              <a:buNone/>
+              <a:defRPr b="0" i="0" sz="1300" u="none" cap="none" strike="noStrike">
+                <a:solidFill>
+                  <a:schemeClr val="dk1"/>
+                </a:solidFill>
+                <a:latin typeface="Proxima Nova"/>
+                <a:ea typeface="Proxima Nova"/>
+                <a:cs typeface="Proxima Nova"/>
+                <a:sym typeface="Proxima Nova"/>
+              </a:defRPr>
             </a:lvl7pPr>
-            <a:lvl8pPr indent="0" lvl="7" marL="0" algn="r">
-              <a:lnSpc>
-                <a:spcPct val="100000"/>
-              </a:lnSpc>
-              <a:spcBef>
-                <a:spcPts val="0"/>
-              </a:spcBef>
-              <a:spcAft>
-                <a:spcPts val="0"/>
-              </a:spcAft>
+            <a:lvl8pPr indent="0" lvl="7" marL="0" marR="0" algn="r">
+              <a:lnSpc>
+                <a:spcPct val="100000"/>
+              </a:lnSpc>
+              <a:spcBef>
+                <a:spcPts val="0"/>
+              </a:spcBef>
+              <a:spcAft>
+                <a:spcPts val="0"/>
+              </a:spcAft>
+              <a:buClr>
+                <a:srgbClr val="000000"/>
+              </a:buClr>
               <a:buSzPts val="1300"/>
-              <a:buNone/>
-              <a:defRPr/>
+              <a:buFont typeface="Arial"/>
+              <a:buNone/>
+              <a:defRPr b="0" i="0" sz="1300" u="none" cap="none" strike="noStrike">
+                <a:solidFill>
+                  <a:schemeClr val="dk1"/>
+                </a:solidFill>
+                <a:latin typeface="Proxima Nova"/>
+                <a:ea typeface="Proxima Nova"/>
+                <a:cs typeface="Proxima Nova"/>
+                <a:sym typeface="Proxima Nova"/>
+              </a:defRPr>
             </a:lvl8pPr>
-            <a:lvl9pPr indent="0" lvl="8" marL="0" algn="r">
-              <a:lnSpc>
-                <a:spcPct val="100000"/>
-              </a:lnSpc>
-              <a:spcBef>
-                <a:spcPts val="0"/>
-              </a:spcBef>
-              <a:spcAft>
-                <a:spcPts val="0"/>
-              </a:spcAft>
+            <a:lvl9pPr indent="0" lvl="8" marL="0" marR="0" algn="r">
+              <a:lnSpc>
+                <a:spcPct val="100000"/>
+              </a:lnSpc>
+              <a:spcBef>
+                <a:spcPts val="0"/>
+              </a:spcBef>
+              <a:spcAft>
+                <a:spcPts val="0"/>
+              </a:spcAft>
+              <a:buClr>
+                <a:srgbClr val="000000"/>
+              </a:buClr>
               <a:buSzPts val="1300"/>
-              <a:buNone/>
-              <a:defRPr/>
+              <a:buFont typeface="Arial"/>
+              <a:buNone/>
+              <a:defRPr b="0" i="0" sz="1300" u="none" cap="none" strike="noStrike">
+                <a:solidFill>
+                  <a:schemeClr val="dk1"/>
+                </a:solidFill>
+                <a:latin typeface="Proxima Nova"/>
+                <a:ea typeface="Proxima Nova"/>
+                <a:cs typeface="Proxima Nova"/>
+                <a:sym typeface="Proxima Nova"/>
+              </a:defRPr>
             </a:lvl9pPr>
           </a:lstStyle>
           <a:p>
@@ -12853,6 +13375,11 @@
               <a:spcAft>
                 <a:spcPts val="0"/>
               </a:spcAft>
+              <a:buClr>
+                <a:srgbClr val="000000"/>
+              </a:buClr>
+              <a:buSzPts val="4267"/>
+              <a:buFont typeface="Arial"/>
               <a:buNone/>
             </a:pPr>
             <a:r>
@@ -12867,7 +13394,15 @@
               </a:rPr>
               <a:t>Comitê de</a:t>
             </a:r>
-            <a:endParaRPr/>
+            <a:endParaRPr b="0" i="0" sz="1400" u="none" cap="none" strike="noStrike">
+              <a:solidFill>
+                <a:srgbClr val="000000"/>
+              </a:solidFill>
+              <a:latin typeface="Arial"/>
+              <a:ea typeface="Arial"/>
+              <a:cs typeface="Arial"/>
+              <a:sym typeface="Arial"/>
+            </a:endParaRPr>
           </a:p>
           <a:p>
             <a:pPr indent="0" lvl="0" marL="0" marR="0" rtl="0" algn="l">
@@ -12880,6 +13415,11 @@
               <a:spcAft>
                 <a:spcPts val="0"/>
               </a:spcAft>
+              <a:buClr>
+                <a:srgbClr val="000000"/>
+              </a:buClr>
+              <a:buSzPts val="4267"/>
+              <a:buFont typeface="Arial"/>
               <a:buNone/>
             </a:pPr>
             <a:r>
@@ -13069,6 +13609,11 @@
                 <a:spcAft>
                   <a:spcPts val="0"/>
                 </a:spcAft>
+                <a:buClr>
+                  <a:srgbClr val="000000"/>
+                </a:buClr>
+                <a:buSzPts val="1400"/>
+                <a:buFont typeface="Arial"/>
                 <a:buNone/>
               </a:pPr>
               <a:r>
@@ -13271,6 +13816,11 @@
                 <a:spcAft>
                   <a:spcPts val="0"/>
                 </a:spcAft>
+                <a:buClr>
+                  <a:srgbClr val="000000"/>
+                </a:buClr>
+                <a:buSzPts val="1400"/>
+                <a:buFont typeface="Arial"/>
                 <a:buNone/>
               </a:pPr>
               <a:r>
@@ -13473,6 +14023,11 @@
                 <a:spcAft>
                   <a:spcPts val="0"/>
                 </a:spcAft>
+                <a:buClr>
+                  <a:srgbClr val="000000"/>
+                </a:buClr>
+                <a:buSzPts val="1400"/>
+                <a:buFont typeface="Arial"/>
                 <a:buNone/>
               </a:pPr>
               <a:r>
@@ -13675,6 +14230,11 @@
                 <a:spcAft>
                   <a:spcPts val="0"/>
                 </a:spcAft>
+                <a:buClr>
+                  <a:srgbClr val="000000"/>
+                </a:buClr>
+                <a:buSzPts val="1400"/>
+                <a:buFont typeface="Arial"/>
                 <a:buNone/>
               </a:pPr>
               <a:r>
@@ -13877,6 +14437,11 @@
                 <a:spcAft>
                   <a:spcPts val="0"/>
                 </a:spcAft>
+                <a:buClr>
+                  <a:srgbClr val="000000"/>
+                </a:buClr>
+                <a:buSzPts val="1400"/>
+                <a:buFont typeface="Arial"/>
                 <a:buNone/>
               </a:pPr>
               <a:r>
@@ -14079,6 +14644,11 @@
                 <a:spcAft>
                   <a:spcPts val="0"/>
                 </a:spcAft>
+                <a:buClr>
+                  <a:srgbClr val="000000"/>
+                </a:buClr>
+                <a:buSzPts val="1400"/>
+                <a:buFont typeface="Arial"/>
                 <a:buNone/>
               </a:pPr>
               <a:r>
@@ -14201,6 +14771,11 @@
                 <a:spcAft>
                   <a:spcPts val="0"/>
                 </a:spcAft>
+                <a:buClr>
+                  <a:srgbClr val="000000"/>
+                </a:buClr>
+                <a:buSzPts val="1400"/>
+                <a:buFont typeface="Arial"/>
                 <a:buNone/>
               </a:pPr>
               <a:r>
@@ -14377,6 +14952,11 @@
               <a:spcAft>
                 <a:spcPts val="0"/>
               </a:spcAft>
+              <a:buClr>
+                <a:srgbClr val="000000"/>
+              </a:buClr>
+              <a:buSzPts val="3600"/>
+              <a:buFont typeface="Arial"/>
               <a:buNone/>
             </a:pPr>
             <a:r>
@@ -14391,7 +14971,15 @@
               </a:rPr>
               <a:t>Novo Processo de Auditoria de Aplicações</a:t>
             </a:r>
-            <a:endParaRPr/>
+            <a:endParaRPr b="0" i="0" sz="1400" u="none" cap="none" strike="noStrike">
+              <a:solidFill>
+                <a:srgbClr val="000000"/>
+              </a:solidFill>
+              <a:latin typeface="Arial"/>
+              <a:ea typeface="Arial"/>
+              <a:cs typeface="Arial"/>
+              <a:sym typeface="Arial"/>
+            </a:endParaRPr>
           </a:p>
           <a:p>
             <a:pPr indent="0" lvl="0" marL="0" marR="0" rtl="0" algn="l">
@@ -14779,6 +15367,11 @@
               <a:spcAft>
                 <a:spcPts val="0"/>
               </a:spcAft>
+              <a:buClr>
+                <a:srgbClr val="000000"/>
+              </a:buClr>
+              <a:buSzPts val="1400"/>
+              <a:buFont typeface="Arial"/>
               <a:buNone/>
             </a:pPr>
             <a:r>
@@ -14792,51 +15385,6 @@
                 <a:sym typeface="Arial"/>
               </a:rPr>
               <a:t>• Análise de vulnerabilidades e dependências</a:t>
-            </a:r>
-            <a:endParaRPr/>
-          </a:p>
-          <a:p>
-            <a:pPr indent="0" lvl="0" marL="0" marR="0" rtl="0" algn="l">
-              <a:lnSpc>
-                <a:spcPct val="157142"/>
-              </a:lnSpc>
-              <a:spcBef>
-                <a:spcPts val="0"/>
-              </a:spcBef>
-              <a:spcAft>
-                <a:spcPts val="0"/>
-              </a:spcAft>
-              <a:buNone/>
-            </a:pPr>
-            <a:r>
-              <a:rPr b="0" i="0" lang="en-US" sz="1400" u="none" cap="none" strike="noStrike">
-                <a:solidFill>
-                  <a:srgbClr val="000000"/>
-                </a:solidFill>
-                <a:latin typeface="Arial"/>
-                <a:ea typeface="Arial"/>
-                <a:cs typeface="Arial"/>
-                <a:sym typeface="Arial"/>
-              </a:rPr>
-              <a:t>• Secrets expostos e conformidade OWASP</a:t>
-            </a:r>
-            <a:endParaRPr/>
-          </a:p>
-          <a:p>
-            <a:pPr indent="0" lvl="0" marL="0" marR="0" rtl="0" algn="l">
-              <a:lnSpc>
-                <a:spcPct val="157142"/>
-              </a:lnSpc>
-              <a:spcBef>
-                <a:spcPts val="0"/>
-              </a:spcBef>
-              <a:spcAft>
-                <a:spcPts val="0"/>
-              </a:spcAft>
-              <a:buNone/>
-            </a:pPr>
-            <a:r>
-              <a:t/>
             </a:r>
             <a:endParaRPr b="0" i="0" sz="1400" u="none" cap="none" strike="noStrike">
               <a:solidFill>
@@ -14859,6 +15407,82 @@
               <a:spcAft>
                 <a:spcPts val="0"/>
               </a:spcAft>
+              <a:buClr>
+                <a:srgbClr val="000000"/>
+              </a:buClr>
+              <a:buSzPts val="1400"/>
+              <a:buFont typeface="Arial"/>
+              <a:buNone/>
+            </a:pPr>
+            <a:r>
+              <a:rPr b="0" i="0" lang="en-US" sz="1400" u="none" cap="none" strike="noStrike">
+                <a:solidFill>
+                  <a:srgbClr val="000000"/>
+                </a:solidFill>
+                <a:latin typeface="Arial"/>
+                <a:ea typeface="Arial"/>
+                <a:cs typeface="Arial"/>
+                <a:sym typeface="Arial"/>
+              </a:rPr>
+              <a:t>• Secrets expostos e conformidade OWASP</a:t>
+            </a:r>
+            <a:endParaRPr b="0" i="0" sz="1400" u="none" cap="none" strike="noStrike">
+              <a:solidFill>
+                <a:srgbClr val="000000"/>
+              </a:solidFill>
+              <a:latin typeface="Arial"/>
+              <a:ea typeface="Arial"/>
+              <a:cs typeface="Arial"/>
+              <a:sym typeface="Arial"/>
+            </a:endParaRPr>
+          </a:p>
+          <a:p>
+            <a:pPr indent="0" lvl="0" marL="0" marR="0" rtl="0" algn="l">
+              <a:lnSpc>
+                <a:spcPct val="157142"/>
+              </a:lnSpc>
+              <a:spcBef>
+                <a:spcPts val="0"/>
+              </a:spcBef>
+              <a:spcAft>
+                <a:spcPts val="0"/>
+              </a:spcAft>
+              <a:buClr>
+                <a:srgbClr val="000000"/>
+              </a:buClr>
+              <a:buSzPts val="1400"/>
+              <a:buFont typeface="Arial"/>
+              <a:buNone/>
+            </a:pPr>
+            <a:r>
+              <a:t/>
+            </a:r>
+            <a:endParaRPr b="0" i="0" sz="1400" u="none" cap="none" strike="noStrike">
+              <a:solidFill>
+                <a:srgbClr val="000000"/>
+              </a:solidFill>
+              <a:latin typeface="Arial"/>
+              <a:ea typeface="Arial"/>
+              <a:cs typeface="Arial"/>
+              <a:sym typeface="Arial"/>
+            </a:endParaRPr>
+          </a:p>
+          <a:p>
+            <a:pPr indent="0" lvl="0" marL="0" marR="0" rtl="0" algn="l">
+              <a:lnSpc>
+                <a:spcPct val="157142"/>
+              </a:lnSpc>
+              <a:spcBef>
+                <a:spcPts val="0"/>
+              </a:spcBef>
+              <a:spcAft>
+                <a:spcPts val="0"/>
+              </a:spcAft>
+              <a:buClr>
+                <a:srgbClr val="000000"/>
+              </a:buClr>
+              <a:buSzPts val="1400"/>
+              <a:buFont typeface="Arial"/>
               <a:buNone/>
             </a:pPr>
             <a:r>
@@ -14873,7 +15497,15 @@
               </a:rPr>
               <a:t>Qualidade de Código:</a:t>
             </a:r>
-            <a:endParaRPr/>
+            <a:endParaRPr b="0" i="0" sz="1400" u="none" cap="none" strike="noStrike">
+              <a:solidFill>
+                <a:srgbClr val="000000"/>
+              </a:solidFill>
+              <a:latin typeface="Arial"/>
+              <a:ea typeface="Arial"/>
+              <a:cs typeface="Arial"/>
+              <a:sym typeface="Arial"/>
+            </a:endParaRPr>
           </a:p>
           <a:p>
             <a:pPr indent="0" lvl="0" marL="0" marR="0" rtl="0" algn="l">
@@ -14886,6 +15518,11 @@
               <a:spcAft>
                 <a:spcPts val="0"/>
               </a:spcAft>
+              <a:buClr>
+                <a:srgbClr val="000000"/>
+              </a:buClr>
+              <a:buSzPts val="1400"/>
+              <a:buFont typeface="Arial"/>
               <a:buNone/>
             </a:pPr>
             <a:r>
@@ -14900,7 +15537,15 @@
               </a:rPr>
               <a:t>• Cobertura de testes e complexidade ciclomática</a:t>
             </a:r>
-            <a:endParaRPr/>
+            <a:endParaRPr b="0" i="0" sz="1400" u="none" cap="none" strike="noStrike">
+              <a:solidFill>
+                <a:srgbClr val="000000"/>
+              </a:solidFill>
+              <a:latin typeface="Arial"/>
+              <a:ea typeface="Arial"/>
+              <a:cs typeface="Arial"/>
+              <a:sym typeface="Arial"/>
+            </a:endParaRPr>
           </a:p>
           <a:p>
             <a:pPr indent="0" lvl="0" marL="0" marR="0" rtl="0" algn="l">
@@ -14913,6 +15558,11 @@
               <a:spcAft>
                 <a:spcPts val="0"/>
               </a:spcAft>
+              <a:buClr>
+                <a:srgbClr val="000000"/>
+              </a:buClr>
+              <a:buSzPts val="1400"/>
+              <a:buFont typeface="Arial"/>
               <a:buNone/>
             </a:pPr>
             <a:r>
@@ -14927,7 +15577,15 @@
               </a:rPr>
               <a:t>• Code smells e débito técnico mapeado</a:t>
             </a:r>
-            <a:endParaRPr/>
+            <a:endParaRPr b="0" i="0" sz="1400" u="none" cap="none" strike="noStrike">
+              <a:solidFill>
+                <a:srgbClr val="000000"/>
+              </a:solidFill>
+              <a:latin typeface="Arial"/>
+              <a:ea typeface="Arial"/>
+              <a:cs typeface="Arial"/>
+              <a:sym typeface="Arial"/>
+            </a:endParaRPr>
           </a:p>
         </p:txBody>
       </p:sp>
@@ -15138,6 +15796,11 @@
               <a:spcAft>
                 <a:spcPts val="0"/>
               </a:spcAft>
+              <a:buClr>
+                <a:srgbClr val="000000"/>
+              </a:buClr>
+              <a:buSzPts val="1400"/>
+              <a:buFont typeface="Arial"/>
               <a:buNone/>
             </a:pPr>
             <a:r>
@@ -15151,51 +15814,6 @@
                 <a:sym typeface="Arial"/>
               </a:rPr>
               <a:t>• Health checks, resource limits, observabilidade</a:t>
-            </a:r>
-            <a:endParaRPr/>
-          </a:p>
-          <a:p>
-            <a:pPr indent="0" lvl="0" marL="0" marR="0" rtl="0" algn="l">
-              <a:lnSpc>
-                <a:spcPct val="157142"/>
-              </a:lnSpc>
-              <a:spcBef>
-                <a:spcPts val="0"/>
-              </a:spcBef>
-              <a:spcAft>
-                <a:spcPts val="0"/>
-              </a:spcAft>
-              <a:buNone/>
-            </a:pPr>
-            <a:r>
-              <a:rPr b="0" i="0" lang="en-US" sz="1400" u="none" cap="none" strike="noStrike">
-                <a:solidFill>
-                  <a:srgbClr val="000000"/>
-                </a:solidFill>
-                <a:latin typeface="Arial"/>
-                <a:ea typeface="Arial"/>
-                <a:cs typeface="Arial"/>
-                <a:sym typeface="Arial"/>
-              </a:rPr>
-              <a:t>• Disaster recovery e custos de cloud</a:t>
-            </a:r>
-            <a:endParaRPr/>
-          </a:p>
-          <a:p>
-            <a:pPr indent="0" lvl="0" marL="0" marR="0" rtl="0" algn="l">
-              <a:lnSpc>
-                <a:spcPct val="157142"/>
-              </a:lnSpc>
-              <a:spcBef>
-                <a:spcPts val="0"/>
-              </a:spcBef>
-              <a:spcAft>
-                <a:spcPts val="0"/>
-              </a:spcAft>
-              <a:buNone/>
-            </a:pPr>
-            <a:r>
-              <a:t/>
             </a:r>
             <a:endParaRPr b="0" i="0" sz="1400" u="none" cap="none" strike="noStrike">
               <a:solidFill>
@@ -15218,6 +15836,82 @@
               <a:spcAft>
                 <a:spcPts val="0"/>
               </a:spcAft>
+              <a:buClr>
+                <a:srgbClr val="000000"/>
+              </a:buClr>
+              <a:buSzPts val="1400"/>
+              <a:buFont typeface="Arial"/>
+              <a:buNone/>
+            </a:pPr>
+            <a:r>
+              <a:rPr b="0" i="0" lang="en-US" sz="1400" u="none" cap="none" strike="noStrike">
+                <a:solidFill>
+                  <a:srgbClr val="000000"/>
+                </a:solidFill>
+                <a:latin typeface="Arial"/>
+                <a:ea typeface="Arial"/>
+                <a:cs typeface="Arial"/>
+                <a:sym typeface="Arial"/>
+              </a:rPr>
+              <a:t>• Disaster recovery e custos de cloud</a:t>
+            </a:r>
+            <a:endParaRPr b="0" i="0" sz="1400" u="none" cap="none" strike="noStrike">
+              <a:solidFill>
+                <a:srgbClr val="000000"/>
+              </a:solidFill>
+              <a:latin typeface="Arial"/>
+              <a:ea typeface="Arial"/>
+              <a:cs typeface="Arial"/>
+              <a:sym typeface="Arial"/>
+            </a:endParaRPr>
+          </a:p>
+          <a:p>
+            <a:pPr indent="0" lvl="0" marL="0" marR="0" rtl="0" algn="l">
+              <a:lnSpc>
+                <a:spcPct val="157142"/>
+              </a:lnSpc>
+              <a:spcBef>
+                <a:spcPts val="0"/>
+              </a:spcBef>
+              <a:spcAft>
+                <a:spcPts val="0"/>
+              </a:spcAft>
+              <a:buClr>
+                <a:srgbClr val="000000"/>
+              </a:buClr>
+              <a:buSzPts val="1400"/>
+              <a:buFont typeface="Arial"/>
+              <a:buNone/>
+            </a:pPr>
+            <a:r>
+              <a:t/>
+            </a:r>
+            <a:endParaRPr b="0" i="0" sz="1400" u="none" cap="none" strike="noStrike">
+              <a:solidFill>
+                <a:srgbClr val="000000"/>
+              </a:solidFill>
+              <a:latin typeface="Arial"/>
+              <a:ea typeface="Arial"/>
+              <a:cs typeface="Arial"/>
+              <a:sym typeface="Arial"/>
+            </a:endParaRPr>
+          </a:p>
+          <a:p>
+            <a:pPr indent="0" lvl="0" marL="0" marR="0" rtl="0" algn="l">
+              <a:lnSpc>
+                <a:spcPct val="157142"/>
+              </a:lnSpc>
+              <a:spcBef>
+                <a:spcPts val="0"/>
+              </a:spcBef>
+              <a:spcAft>
+                <a:spcPts val="0"/>
+              </a:spcAft>
+              <a:buClr>
+                <a:srgbClr val="000000"/>
+              </a:buClr>
+              <a:buSzPts val="1400"/>
+              <a:buFont typeface="Arial"/>
               <a:buNone/>
             </a:pPr>
             <a:r>
@@ -15232,7 +15926,15 @@
               </a:rPr>
               <a:t>Arquitetura:</a:t>
             </a:r>
-            <a:endParaRPr/>
+            <a:endParaRPr b="0" i="0" sz="1400" u="none" cap="none" strike="noStrike">
+              <a:solidFill>
+                <a:srgbClr val="000000"/>
+              </a:solidFill>
+              <a:latin typeface="Arial"/>
+              <a:ea typeface="Arial"/>
+              <a:cs typeface="Arial"/>
+              <a:sym typeface="Arial"/>
+            </a:endParaRPr>
           </a:p>
           <a:p>
             <a:pPr indent="0" lvl="0" marL="0" marR="0" rtl="0" algn="l">
@@ -15245,6 +15947,11 @@
               <a:spcAft>
                 <a:spcPts val="0"/>
               </a:spcAft>
+              <a:buClr>
+                <a:srgbClr val="000000"/>
+              </a:buClr>
+              <a:buSzPts val="1400"/>
+              <a:buFont typeface="Arial"/>
               <a:buNone/>
             </a:pPr>
             <a:r>
@@ -15259,7 +15966,15 @@
               </a:rPr>
               <a:t>• Aderência aos padrões e acoplamento entre serviços</a:t>
             </a:r>
-            <a:endParaRPr/>
+            <a:endParaRPr b="0" i="0" sz="1400" u="none" cap="none" strike="noStrike">
+              <a:solidFill>
+                <a:srgbClr val="000000"/>
+              </a:solidFill>
+              <a:latin typeface="Arial"/>
+              <a:ea typeface="Arial"/>
+              <a:cs typeface="Arial"/>
+              <a:sym typeface="Arial"/>
+            </a:endParaRPr>
           </a:p>
           <a:p>
             <a:pPr indent="0" lvl="0" marL="0" marR="0" rtl="0" algn="l">
@@ -15272,6 +15987,11 @@
               <a:spcAft>
                 <a:spcPts val="0"/>
               </a:spcAft>
+              <a:buClr>
+                <a:srgbClr val="000000"/>
+              </a:buClr>
+              <a:buSzPts val="1400"/>
+              <a:buFont typeface="Arial"/>
               <a:buNone/>
             </a:pPr>
             <a:r>
@@ -15286,7 +16006,15 @@
               </a:rPr>
               <a:t>• Consistência de APIs e documentação</a:t>
             </a:r>
-            <a:endParaRPr/>
+            <a:endParaRPr b="0" i="0" sz="1400" u="none" cap="none" strike="noStrike">
+              <a:solidFill>
+                <a:srgbClr val="000000"/>
+              </a:solidFill>
+              <a:latin typeface="Arial"/>
+              <a:ea typeface="Arial"/>
+              <a:cs typeface="Arial"/>
+              <a:sym typeface="Arial"/>
+            </a:endParaRPr>
           </a:p>
         </p:txBody>
       </p:sp>
@@ -15404,6 +16132,11 @@
               <a:spcAft>
                 <a:spcPts val="0"/>
               </a:spcAft>
+              <a:buClr>
+                <a:srgbClr val="000000"/>
+              </a:buClr>
+              <a:buSzPts val="2400"/>
+              <a:buFont typeface="Arial"/>
               <a:buNone/>
             </a:pPr>
             <a:r>
@@ -15418,7 +16151,15 @@
               </a:rPr>
               <a:t>Processo de Auditoria — Como Funciona</a:t>
             </a:r>
-            <a:endParaRPr/>
+            <a:endParaRPr b="0" i="0" sz="1400" u="none" cap="none" strike="noStrike">
+              <a:solidFill>
+                <a:srgbClr val="000000"/>
+              </a:solidFill>
+              <a:latin typeface="Arial"/>
+              <a:ea typeface="Arial"/>
+              <a:cs typeface="Arial"/>
+              <a:sym typeface="Arial"/>
+            </a:endParaRPr>
           </a:p>
         </p:txBody>
       </p:sp>
@@ -15457,6 +16198,11 @@
               <a:spcAft>
                 <a:spcPts val="0"/>
               </a:spcAft>
+              <a:buClr>
+                <a:srgbClr val="000000"/>
+              </a:buClr>
+              <a:buSzPts val="1800"/>
+              <a:buFont typeface="Arial"/>
               <a:buNone/>
             </a:pPr>
             <a:r>
@@ -15471,7 +16217,15 @@
               </a:rPr>
               <a:t>Etapas do Ciclo de Auditoria</a:t>
             </a:r>
-            <a:endParaRPr/>
+            <a:endParaRPr b="0" i="0" sz="1400" u="none" cap="none" strike="noStrike">
+              <a:solidFill>
+                <a:srgbClr val="000000"/>
+              </a:solidFill>
+              <a:latin typeface="Arial"/>
+              <a:ea typeface="Arial"/>
+              <a:cs typeface="Arial"/>
+              <a:sym typeface="Arial"/>
+            </a:endParaRPr>
           </a:p>
         </p:txBody>
       </p:sp>
@@ -15510,6 +16264,11 @@
               <a:spcAft>
                 <a:spcPts val="0"/>
               </a:spcAft>
+              <a:buClr>
+                <a:srgbClr val="000000"/>
+              </a:buClr>
+              <a:buSzPts val="1400"/>
+              <a:buFont typeface="Arial"/>
               <a:buNone/>
             </a:pPr>
             <a:r>
@@ -15524,7 +16283,15 @@
               </a:rPr>
               <a:t>1. Definição de Pontos Base</a:t>
             </a:r>
-            <a:endParaRPr/>
+            <a:endParaRPr b="0" i="0" sz="1400" u="none" cap="none" strike="noStrike">
+              <a:solidFill>
+                <a:srgbClr val="000000"/>
+              </a:solidFill>
+              <a:latin typeface="Arial"/>
+              <a:ea typeface="Arial"/>
+              <a:cs typeface="Arial"/>
+              <a:sym typeface="Arial"/>
+            </a:endParaRPr>
           </a:p>
           <a:p>
             <a:pPr indent="0" lvl="0" marL="0" marR="0" rtl="0" algn="l">
@@ -15537,6 +16304,11 @@
               <a:spcAft>
                 <a:spcPts val="0"/>
               </a:spcAft>
+              <a:buClr>
+                <a:srgbClr val="000000"/>
+              </a:buClr>
+              <a:buSzPts val="1400"/>
+              <a:buFont typeface="Arial"/>
               <a:buNone/>
             </a:pPr>
             <a:r>
@@ -15551,7 +16323,15 @@
               </a:rPr>
               <a:t>Checklist padrão com os itens a serem auditados em todas as aplicações</a:t>
             </a:r>
-            <a:endParaRPr/>
+            <a:endParaRPr b="0" i="0" sz="1400" u="none" cap="none" strike="noStrike">
+              <a:solidFill>
+                <a:srgbClr val="000000"/>
+              </a:solidFill>
+              <a:latin typeface="Arial"/>
+              <a:ea typeface="Arial"/>
+              <a:cs typeface="Arial"/>
+              <a:sym typeface="Arial"/>
+            </a:endParaRPr>
           </a:p>
           <a:p>
             <a:pPr indent="0" lvl="0" marL="0" marR="0" rtl="0" algn="l">
@@ -15564,6 +16344,11 @@
               <a:spcAft>
                 <a:spcPts val="0"/>
               </a:spcAft>
+              <a:buClr>
+                <a:srgbClr val="000000"/>
+              </a:buClr>
+              <a:buSzPts val="1400"/>
+              <a:buFont typeface="Arial"/>
               <a:buNone/>
             </a:pPr>
             <a:r>
@@ -15590,6 +16375,11 @@
               <a:spcAft>
                 <a:spcPts val="0"/>
               </a:spcAft>
+              <a:buClr>
+                <a:srgbClr val="000000"/>
+              </a:buClr>
+              <a:buSzPts val="1400"/>
+              <a:buFont typeface="Arial"/>
               <a:buNone/>
             </a:pPr>
             <a:r>
@@ -15604,7 +16394,15 @@
               </a:rPr>
               <a:t>2. Agendas com os Times</a:t>
             </a:r>
-            <a:endParaRPr/>
+            <a:endParaRPr b="0" i="0" sz="1400" u="none" cap="none" strike="noStrike">
+              <a:solidFill>
+                <a:srgbClr val="000000"/>
+              </a:solidFill>
+              <a:latin typeface="Arial"/>
+              <a:ea typeface="Arial"/>
+              <a:cs typeface="Arial"/>
+              <a:sym typeface="Arial"/>
+            </a:endParaRPr>
           </a:p>
           <a:p>
             <a:pPr indent="0" lvl="0" marL="0" marR="0" rtl="0" algn="l">
@@ -15617,6 +16415,11 @@
               <a:spcAft>
                 <a:spcPts val="0"/>
               </a:spcAft>
+              <a:buClr>
+                <a:srgbClr val="000000"/>
+              </a:buClr>
+              <a:buSzPts val="1400"/>
+              <a:buFont typeface="Arial"/>
               <a:buNone/>
             </a:pPr>
             <a:r>
@@ -15631,7 +16434,15 @@
               </a:rPr>
               <a:t>Cronograma alinhado com cada squad, garantindo participação dos responsáveis</a:t>
             </a:r>
-            <a:endParaRPr/>
+            <a:endParaRPr b="0" i="0" sz="1400" u="none" cap="none" strike="noStrike">
+              <a:solidFill>
+                <a:srgbClr val="000000"/>
+              </a:solidFill>
+              <a:latin typeface="Arial"/>
+              <a:ea typeface="Arial"/>
+              <a:cs typeface="Arial"/>
+              <a:sym typeface="Arial"/>
+            </a:endParaRPr>
           </a:p>
           <a:p>
             <a:pPr indent="0" lvl="0" marL="0" marR="0" rtl="0" algn="l">
@@ -15644,6 +16455,11 @@
               <a:spcAft>
                 <a:spcPts val="0"/>
               </a:spcAft>
+              <a:buClr>
+                <a:srgbClr val="000000"/>
+              </a:buClr>
+              <a:buSzPts val="1400"/>
+              <a:buFont typeface="Arial"/>
               <a:buNone/>
             </a:pPr>
             <a:r>
@@ -15670,6 +16486,11 @@
               <a:spcAft>
                 <a:spcPts val="0"/>
               </a:spcAft>
+              <a:buClr>
+                <a:srgbClr val="000000"/>
+              </a:buClr>
+              <a:buSzPts val="1400"/>
+              <a:buFont typeface="Arial"/>
               <a:buNone/>
             </a:pPr>
             <a:r>
@@ -15684,7 +16505,15 @@
               </a:rPr>
               <a:t>3. Adequação Caso a Caso</a:t>
             </a:r>
-            <a:endParaRPr/>
+            <a:endParaRPr b="0" i="0" sz="1400" u="none" cap="none" strike="noStrike">
+              <a:solidFill>
+                <a:srgbClr val="000000"/>
+              </a:solidFill>
+              <a:latin typeface="Arial"/>
+              <a:ea typeface="Arial"/>
+              <a:cs typeface="Arial"/>
+              <a:sym typeface="Arial"/>
+            </a:endParaRPr>
           </a:p>
           <a:p>
             <a:pPr indent="0" lvl="0" marL="0" marR="0" rtl="0" algn="l">
@@ -15697,6 +16526,11 @@
               <a:spcAft>
                 <a:spcPts val="0"/>
               </a:spcAft>
+              <a:buClr>
+                <a:srgbClr val="000000"/>
+              </a:buClr>
+              <a:buSzPts val="1400"/>
+              <a:buFont typeface="Arial"/>
               <a:buNone/>
             </a:pPr>
             <a:r>
@@ -15711,7 +16545,15 @@
               </a:rPr>
               <a:t>Ajuste conforme contexto da aplicação — stack, criticidade e maturidade</a:t>
             </a:r>
-            <a:endParaRPr/>
+            <a:endParaRPr b="0" i="0" sz="1400" u="none" cap="none" strike="noStrike">
+              <a:solidFill>
+                <a:srgbClr val="000000"/>
+              </a:solidFill>
+              <a:latin typeface="Arial"/>
+              <a:ea typeface="Arial"/>
+              <a:cs typeface="Arial"/>
+              <a:sym typeface="Arial"/>
+            </a:endParaRPr>
           </a:p>
         </p:txBody>
       </p:sp>
@@ -15750,6 +16592,11 @@
               <a:spcAft>
                 <a:spcPts val="0"/>
               </a:spcAft>
+              <a:buClr>
+                <a:srgbClr val="000000"/>
+              </a:buClr>
+              <a:buSzPts val="1800"/>
+              <a:buFont typeface="Arial"/>
               <a:buNone/>
             </a:pPr>
             <a:r>
@@ -15764,7 +16611,15 @@
               </a:rPr>
               <a:t>Consolidação e Ação</a:t>
             </a:r>
-            <a:endParaRPr/>
+            <a:endParaRPr b="0" i="0" sz="1400" u="none" cap="none" strike="noStrike">
+              <a:solidFill>
+                <a:srgbClr val="000000"/>
+              </a:solidFill>
+              <a:latin typeface="Arial"/>
+              <a:ea typeface="Arial"/>
+              <a:cs typeface="Arial"/>
+              <a:sym typeface="Arial"/>
+            </a:endParaRPr>
           </a:p>
         </p:txBody>
       </p:sp>
@@ -15803,6 +16658,11 @@
               <a:spcAft>
                 <a:spcPts val="0"/>
               </a:spcAft>
+              <a:buClr>
+                <a:srgbClr val="000000"/>
+              </a:buClr>
+              <a:buSzPts val="1400"/>
+              <a:buFont typeface="Arial"/>
               <a:buNone/>
             </a:pPr>
             <a:r>
@@ -15817,7 +16677,15 @@
               </a:rPr>
               <a:t>4. Agendas de Equalização</a:t>
             </a:r>
-            <a:endParaRPr/>
+            <a:endParaRPr b="0" i="0" sz="1400" u="none" cap="none" strike="noStrike">
+              <a:solidFill>
+                <a:srgbClr val="000000"/>
+              </a:solidFill>
+              <a:latin typeface="Arial"/>
+              <a:ea typeface="Arial"/>
+              <a:cs typeface="Arial"/>
+              <a:sym typeface="Arial"/>
+            </a:endParaRPr>
           </a:p>
           <a:p>
             <a:pPr indent="0" lvl="0" marL="0" marR="0" rtl="0" algn="l">
@@ -15830,6 +16698,11 @@
               <a:spcAft>
                 <a:spcPts val="0"/>
               </a:spcAft>
+              <a:buClr>
+                <a:srgbClr val="000000"/>
+              </a:buClr>
+              <a:buSzPts val="1400"/>
+              <a:buFont typeface="Arial"/>
               <a:buNone/>
             </a:pPr>
             <a:r>
@@ -15844,7 +16717,15 @@
               </a:rPr>
               <a:t>Reuniões pós-auditoria para apresentar achados, discutir prioridades e alinhar expectativas</a:t>
             </a:r>
-            <a:endParaRPr/>
+            <a:endParaRPr b="0" i="0" sz="1400" u="none" cap="none" strike="noStrike">
+              <a:solidFill>
+                <a:srgbClr val="000000"/>
+              </a:solidFill>
+              <a:latin typeface="Arial"/>
+              <a:ea typeface="Arial"/>
+              <a:cs typeface="Arial"/>
+              <a:sym typeface="Arial"/>
+            </a:endParaRPr>
           </a:p>
           <a:p>
             <a:pPr indent="0" lvl="0" marL="0" marR="0" rtl="0" algn="l">
@@ -15857,6 +16738,11 @@
               <a:spcAft>
                 <a:spcPts val="0"/>
               </a:spcAft>
+              <a:buClr>
+                <a:srgbClr val="000000"/>
+              </a:buClr>
+              <a:buSzPts val="1400"/>
+              <a:buFont typeface="Arial"/>
               <a:buNone/>
             </a:pPr>
             <a:r>
@@ -15883,6 +16769,11 @@
               <a:spcAft>
                 <a:spcPts val="0"/>
               </a:spcAft>
+              <a:buClr>
+                <a:srgbClr val="000000"/>
+              </a:buClr>
+              <a:buSzPts val="1400"/>
+              <a:buFont typeface="Arial"/>
               <a:buNone/>
             </a:pPr>
             <a:r>
@@ -15897,7 +16788,15 @@
               </a:rPr>
               <a:t>5. Plano de Ação</a:t>
             </a:r>
-            <a:endParaRPr/>
+            <a:endParaRPr b="0" i="0" sz="1400" u="none" cap="none" strike="noStrike">
+              <a:solidFill>
+                <a:srgbClr val="000000"/>
+              </a:solidFill>
+              <a:latin typeface="Arial"/>
+              <a:ea typeface="Arial"/>
+              <a:cs typeface="Arial"/>
+              <a:sym typeface="Arial"/>
+            </a:endParaRPr>
           </a:p>
           <a:p>
             <a:pPr indent="0" lvl="0" marL="0" marR="0" rtl="0" algn="l">
@@ -15910,6 +16809,11 @@
               <a:spcAft>
                 <a:spcPts val="0"/>
               </a:spcAft>
+              <a:buClr>
+                <a:srgbClr val="000000"/>
+              </a:buClr>
+              <a:buSzPts val="1400"/>
+              <a:buFont typeface="Arial"/>
               <a:buNone/>
             </a:pPr>
             <a:r>
@@ -15924,7 +16828,15 @@
               </a:rPr>
               <a:t>Construção colaborativa de um plano com prazos, responsáveis e acompanhamento — integrado ao backlog do time</a:t>
             </a:r>
-            <a:endParaRPr/>
+            <a:endParaRPr b="0" i="0" sz="1400" u="none" cap="none" strike="noStrike">
+              <a:solidFill>
+                <a:srgbClr val="000000"/>
+              </a:solidFill>
+              <a:latin typeface="Arial"/>
+              <a:ea typeface="Arial"/>
+              <a:cs typeface="Arial"/>
+              <a:sym typeface="Arial"/>
+            </a:endParaRPr>
           </a:p>
         </p:txBody>
       </p:sp>
@@ -16151,6 +17063,11 @@
               <a:spcAft>
                 <a:spcPts val="0"/>
               </a:spcAft>
+              <a:buClr>
+                <a:srgbClr val="000000"/>
+              </a:buClr>
+              <a:buSzPts val="1400"/>
+              <a:buFont typeface="Arial"/>
               <a:buNone/>
             </a:pPr>
             <a:r>
@@ -16177,6 +17094,11 @@
               <a:spcAft>
                 <a:spcPts val="0"/>
               </a:spcAft>
+              <a:buClr>
+                <a:srgbClr val="000000"/>
+              </a:buClr>
+              <a:buSzPts val="1400"/>
+              <a:buFont typeface="Arial"/>
               <a:buNone/>
             </a:pPr>
             <a:r>
@@ -16190,24 +17112,6 @@
                 <a:sym typeface="Arial"/>
               </a:rPr>
               <a:t>• Menor fricção entre equipes: colaboração em features transversais com menos atrito</a:t>
-            </a:r>
-            <a:endParaRPr/>
-          </a:p>
-          <a:p>
-            <a:pPr indent="0" lvl="0" marL="0" marR="0" rtl="0" algn="l">
-              <a:lnSpc>
-                <a:spcPct val="157142"/>
-              </a:lnSpc>
-              <a:spcBef>
-                <a:spcPts val="0"/>
-              </a:spcBef>
-              <a:spcAft>
-                <a:spcPts val="0"/>
-              </a:spcAft>
-              <a:buNone/>
-            </a:pPr>
-            <a:r>
-              <a:t/>
             </a:r>
             <a:endParaRPr b="0" i="0" sz="1400" u="none" cap="none" strike="noStrike">
               <a:solidFill>
@@ -16230,6 +17134,42 @@
               <a:spcAft>
                 <a:spcPts val="0"/>
               </a:spcAft>
+              <a:buClr>
+                <a:srgbClr val="000000"/>
+              </a:buClr>
+              <a:buSzPts val="1400"/>
+              <a:buFont typeface="Arial"/>
+              <a:buNone/>
+            </a:pPr>
+            <a:r>
+              <a:t/>
+            </a:r>
+            <a:endParaRPr b="0" i="0" sz="1400" u="none" cap="none" strike="noStrike">
+              <a:solidFill>
+                <a:srgbClr val="000000"/>
+              </a:solidFill>
+              <a:latin typeface="Arial"/>
+              <a:ea typeface="Arial"/>
+              <a:cs typeface="Arial"/>
+              <a:sym typeface="Arial"/>
+            </a:endParaRPr>
+          </a:p>
+          <a:p>
+            <a:pPr indent="0" lvl="0" marL="0" marR="0" rtl="0" algn="l">
+              <a:lnSpc>
+                <a:spcPct val="157142"/>
+              </a:lnSpc>
+              <a:spcBef>
+                <a:spcPts val="0"/>
+              </a:spcBef>
+              <a:spcAft>
+                <a:spcPts val="0"/>
+              </a:spcAft>
+              <a:buClr>
+                <a:srgbClr val="000000"/>
+              </a:buClr>
+              <a:buSzPts val="1400"/>
+              <a:buFont typeface="Arial"/>
               <a:buNone/>
             </a:pPr>
             <a:r>
@@ -16244,7 +17184,15 @@
               </a:rPr>
               <a:t>• Onboarding acelerado: devs novos encontram padrões conhecidos</a:t>
             </a:r>
-            <a:endParaRPr/>
+            <a:endParaRPr b="0" i="0" sz="1400" u="none" cap="none" strike="noStrike">
+              <a:solidFill>
+                <a:srgbClr val="000000"/>
+              </a:solidFill>
+              <a:latin typeface="Arial"/>
+              <a:ea typeface="Arial"/>
+              <a:cs typeface="Arial"/>
+              <a:sym typeface="Arial"/>
+            </a:endParaRPr>
           </a:p>
         </p:txBody>
       </p:sp>
@@ -16455,6 +17403,11 @@
               <a:spcAft>
                 <a:spcPts val="0"/>
               </a:spcAft>
+              <a:buClr>
+                <a:srgbClr val="000000"/>
+              </a:buClr>
+              <a:buSzPts val="1400"/>
+              <a:buFont typeface="Arial"/>
               <a:buNone/>
             </a:pPr>
             <a:r>
@@ -16481,6 +17434,11 @@
               <a:spcAft>
                 <a:spcPts val="0"/>
               </a:spcAft>
+              <a:buClr>
+                <a:srgbClr val="000000"/>
+              </a:buClr>
+              <a:buSzPts val="1400"/>
+              <a:buFont typeface="Arial"/>
               <a:buNone/>
             </a:pPr>
             <a:r>
@@ -16494,24 +17452,6 @@
                 <a:sym typeface="Arial"/>
               </a:rPr>
               <a:t>• Cultura de melhoria contínua: aprendizados retroalimentam padrões</a:t>
-            </a:r>
-            <a:endParaRPr/>
-          </a:p>
-          <a:p>
-            <a:pPr indent="0" lvl="0" marL="0" marR="0" rtl="0" algn="l">
-              <a:lnSpc>
-                <a:spcPct val="157142"/>
-              </a:lnSpc>
-              <a:spcBef>
-                <a:spcPts val="0"/>
-              </a:spcBef>
-              <a:spcAft>
-                <a:spcPts val="0"/>
-              </a:spcAft>
-              <a:buNone/>
-            </a:pPr>
-            <a:r>
-              <a:t/>
             </a:r>
             <a:endParaRPr b="0" i="0" sz="1400" u="none" cap="none" strike="noStrike">
               <a:solidFill>
@@ -16534,6 +17474,42 @@
               <a:spcAft>
                 <a:spcPts val="0"/>
               </a:spcAft>
+              <a:buClr>
+                <a:srgbClr val="000000"/>
+              </a:buClr>
+              <a:buSzPts val="1400"/>
+              <a:buFont typeface="Arial"/>
+              <a:buNone/>
+            </a:pPr>
+            <a:r>
+              <a:t/>
+            </a:r>
+            <a:endParaRPr b="0" i="0" sz="1400" u="none" cap="none" strike="noStrike">
+              <a:solidFill>
+                <a:srgbClr val="000000"/>
+              </a:solidFill>
+              <a:latin typeface="Arial"/>
+              <a:ea typeface="Arial"/>
+              <a:cs typeface="Arial"/>
+              <a:sym typeface="Arial"/>
+            </a:endParaRPr>
+          </a:p>
+          <a:p>
+            <a:pPr indent="0" lvl="0" marL="0" marR="0" rtl="0" algn="l">
+              <a:lnSpc>
+                <a:spcPct val="157142"/>
+              </a:lnSpc>
+              <a:spcBef>
+                <a:spcPts val="0"/>
+              </a:spcBef>
+              <a:spcAft>
+                <a:spcPts val="0"/>
+              </a:spcAft>
+              <a:buClr>
+                <a:srgbClr val="000000"/>
+              </a:buClr>
+              <a:buSzPts val="1400"/>
+              <a:buFont typeface="Arial"/>
               <a:buNone/>
             </a:pPr>
             <a:r>
@@ -16548,7 +17524,15 @@
               </a:rPr>
               <a:t>• Governança de deploy (GKE, AWS, OCI, Oracle): resource limits, health probes, secrets e DR</a:t>
             </a:r>
-            <a:endParaRPr/>
+            <a:endParaRPr b="0" i="0" sz="1400" u="none" cap="none" strike="noStrike">
+              <a:solidFill>
+                <a:srgbClr val="000000"/>
+              </a:solidFill>
+              <a:latin typeface="Arial"/>
+              <a:ea typeface="Arial"/>
+              <a:cs typeface="Arial"/>
+              <a:sym typeface="Arial"/>
+            </a:endParaRPr>
           </a:p>
         </p:txBody>
       </p:sp>
@@ -16698,6 +17682,11 @@
               <a:spcAft>
                 <a:spcPts val="0"/>
               </a:spcAft>
+              <a:buClr>
+                <a:srgbClr val="000000"/>
+              </a:buClr>
+              <a:buSzPts val="3600"/>
+              <a:buFont typeface="Arial"/>
               <a:buNone/>
             </a:pPr>
             <a:r>
@@ -16712,7 +17701,15 @@
               </a:rPr>
               <a:t>Maior Participação do Time de Arquitetura</a:t>
             </a:r>
-            <a:endParaRPr/>
+            <a:endParaRPr b="0" i="0" sz="1400" u="none" cap="none" strike="noStrike">
+              <a:solidFill>
+                <a:srgbClr val="000000"/>
+              </a:solidFill>
+              <a:latin typeface="Arial"/>
+              <a:ea typeface="Arial"/>
+              <a:cs typeface="Arial"/>
+              <a:sym typeface="Arial"/>
+            </a:endParaRPr>
           </a:p>
           <a:p>
             <a:pPr indent="0" lvl="0" marL="0" marR="0" rtl="0" algn="l">
@@ -17100,6 +18097,11 @@
               <a:spcAft>
                 <a:spcPts val="0"/>
               </a:spcAft>
+              <a:buClr>
+                <a:srgbClr val="000000"/>
+              </a:buClr>
+              <a:buSzPts val="1400"/>
+              <a:buFont typeface="Arial"/>
               <a:buNone/>
             </a:pPr>
             <a:r>
@@ -17114,7 +18116,15 @@
               </a:rPr>
               <a:t>• Code reviews de PRs com impacto arquitetural</a:t>
             </a:r>
-            <a:endParaRPr/>
+            <a:endParaRPr b="0" i="0" sz="1400" u="none" cap="none" strike="noStrike">
+              <a:solidFill>
+                <a:srgbClr val="000000"/>
+              </a:solidFill>
+              <a:latin typeface="Arial"/>
+              <a:ea typeface="Arial"/>
+              <a:cs typeface="Arial"/>
+              <a:sym typeface="Arial"/>
+            </a:endParaRPr>
           </a:p>
           <a:p>
             <a:pPr indent="0" lvl="0" marL="0" marR="0" rtl="0" algn="l">
@@ -17127,6 +18137,11 @@
               <a:spcAft>
                 <a:spcPts val="0"/>
               </a:spcAft>
+              <a:buClr>
+                <a:srgbClr val="000000"/>
+              </a:buClr>
+              <a:buSzPts val="1400"/>
+              <a:buFont typeface="Arial"/>
               <a:buNone/>
             </a:pPr>
             <a:r>
@@ -17141,7 +18156,15 @@
               </a:rPr>
               <a:t>• Apoio em design sessions e troubleshooting</a:t>
             </a:r>
-            <a:endParaRPr/>
+            <a:endParaRPr b="0" i="0" sz="1400" u="none" cap="none" strike="noStrike">
+              <a:solidFill>
+                <a:srgbClr val="000000"/>
+              </a:solidFill>
+              <a:latin typeface="Arial"/>
+              <a:ea typeface="Arial"/>
+              <a:cs typeface="Arial"/>
+              <a:sym typeface="Arial"/>
+            </a:endParaRPr>
           </a:p>
         </p:txBody>
       </p:sp>
@@ -17352,6 +18375,11 @@
               <a:spcAft>
                 <a:spcPts val="0"/>
               </a:spcAft>
+              <a:buClr>
+                <a:srgbClr val="000000"/>
+              </a:buClr>
+              <a:buSzPts val="1400"/>
+              <a:buFont typeface="Arial"/>
               <a:buNone/>
             </a:pPr>
             <a:r>
@@ -17366,7 +18394,15 @@
               </a:rPr>
               <a:t>• Padrões adotados organicamente pelos times</a:t>
             </a:r>
-            <a:endParaRPr/>
+            <a:endParaRPr b="0" i="0" sz="1400" u="none" cap="none" strike="noStrike">
+              <a:solidFill>
+                <a:srgbClr val="000000"/>
+              </a:solidFill>
+              <a:latin typeface="Arial"/>
+              <a:ea typeface="Arial"/>
+              <a:cs typeface="Arial"/>
+              <a:sym typeface="Arial"/>
+            </a:endParaRPr>
           </a:p>
           <a:p>
             <a:pPr indent="0" lvl="0" marL="0" marR="0" rtl="0" algn="l">
@@ -17379,6 +18415,11 @@
               <a:spcAft>
                 <a:spcPts val="0"/>
               </a:spcAft>
+              <a:buClr>
+                <a:srgbClr val="000000"/>
+              </a:buClr>
+              <a:buSzPts val="1400"/>
+              <a:buFont typeface="Arial"/>
               <a:buNone/>
             </a:pPr>
             <a:r>
@@ -17393,7 +18434,15 @@
               </a:rPr>
               <a:t>• Redução de débito técnico recorrente</a:t>
             </a:r>
-            <a:endParaRPr/>
+            <a:endParaRPr b="0" i="0" sz="1400" u="none" cap="none" strike="noStrike">
+              <a:solidFill>
+                <a:srgbClr val="000000"/>
+              </a:solidFill>
+              <a:latin typeface="Arial"/>
+              <a:ea typeface="Arial"/>
+              <a:cs typeface="Arial"/>
+              <a:sym typeface="Arial"/>
+            </a:endParaRPr>
           </a:p>
           <a:p>
             <a:pPr indent="0" lvl="0" marL="0" marR="0" rtl="0" algn="l">
@@ -17406,6 +18455,11 @@
               <a:spcAft>
                 <a:spcPts val="0"/>
               </a:spcAft>
+              <a:buClr>
+                <a:srgbClr val="000000"/>
+              </a:buClr>
+              <a:buSzPts val="1400"/>
+              <a:buFont typeface="Arial"/>
               <a:buNone/>
             </a:pPr>
             <a:r>
@@ -17420,7 +18474,15 @@
               </a:rPr>
               <a:t>• Feedback loop mais curto em decisões de design</a:t>
             </a:r>
-            <a:endParaRPr/>
+            <a:endParaRPr b="0" i="0" sz="1400" u="none" cap="none" strike="noStrike">
+              <a:solidFill>
+                <a:srgbClr val="000000"/>
+              </a:solidFill>
+              <a:latin typeface="Arial"/>
+              <a:ea typeface="Arial"/>
+              <a:cs typeface="Arial"/>
+              <a:sym typeface="Arial"/>
+            </a:endParaRPr>
           </a:p>
           <a:p>
             <a:pPr indent="0" lvl="0" marL="0" marR="0" rtl="0" algn="l">
@@ -17433,6 +18495,11 @@
               <a:spcAft>
                 <a:spcPts val="0"/>
               </a:spcAft>
+              <a:buClr>
+                <a:srgbClr val="000000"/>
+              </a:buClr>
+              <a:buSzPts val="1400"/>
+              <a:buFont typeface="Arial"/>
               <a:buNone/>
             </a:pPr>
             <a:r>
@@ -17447,7 +18514,15 @@
               </a:rPr>
               <a:t>• Cultura de engenharia mais colaborativa</a:t>
             </a:r>
-            <a:endParaRPr/>
+            <a:endParaRPr b="0" i="0" sz="1400" u="none" cap="none" strike="noStrike">
+              <a:solidFill>
+                <a:srgbClr val="000000"/>
+              </a:solidFill>
+              <a:latin typeface="Arial"/>
+              <a:ea typeface="Arial"/>
+              <a:cs typeface="Arial"/>
+              <a:sym typeface="Arial"/>
+            </a:endParaRPr>
           </a:p>
         </p:txBody>
       </p:sp>
@@ -17597,6 +18672,11 @@
               <a:spcAft>
                 <a:spcPts val="0"/>
               </a:spcAft>
+              <a:buClr>
+                <a:srgbClr val="000000"/>
+              </a:buClr>
+              <a:buSzPts val="3600"/>
+              <a:buFont typeface="Arial"/>
               <a:buNone/>
             </a:pPr>
             <a:r>
@@ -17611,7 +18691,15 @@
               </a:rPr>
               <a:t>Gestão de Débitos Técnicos</a:t>
             </a:r>
-            <a:endParaRPr/>
+            <a:endParaRPr b="0" i="0" sz="1400" u="none" cap="none" strike="noStrike">
+              <a:solidFill>
+                <a:srgbClr val="000000"/>
+              </a:solidFill>
+              <a:latin typeface="Arial"/>
+              <a:ea typeface="Arial"/>
+              <a:cs typeface="Arial"/>
+              <a:sym typeface="Arial"/>
+            </a:endParaRPr>
           </a:p>
           <a:p>
             <a:pPr indent="0" lvl="0" marL="0" marR="0" rtl="0" algn="l">
@@ -17999,6 +19087,11 @@
               <a:spcAft>
                 <a:spcPts val="0"/>
               </a:spcAft>
+              <a:buClr>
+                <a:srgbClr val="000000"/>
+              </a:buClr>
+              <a:buSzPts val="1400"/>
+              <a:buFont typeface="Arial"/>
               <a:buNone/>
             </a:pPr>
             <a:r>
@@ -18013,7 +19106,15 @@
               </a:rPr>
               <a:t>• Classificação: Crítico, Alto, Médio, Baixo</a:t>
             </a:r>
-            <a:endParaRPr/>
+            <a:endParaRPr b="0" i="0" sz="1400" u="none" cap="none" strike="noStrike">
+              <a:solidFill>
+                <a:srgbClr val="000000"/>
+              </a:solidFill>
+              <a:latin typeface="Arial"/>
+              <a:ea typeface="Arial"/>
+              <a:cs typeface="Arial"/>
+              <a:sym typeface="Arial"/>
+            </a:endParaRPr>
           </a:p>
           <a:p>
             <a:pPr indent="0" lvl="0" marL="0" marR="0" rtl="0" algn="l">
@@ -18026,6 +19127,11 @@
               <a:spcAft>
                 <a:spcPts val="0"/>
               </a:spcAft>
+              <a:buClr>
+                <a:srgbClr val="000000"/>
+              </a:buClr>
+              <a:buSzPts val="1400"/>
+              <a:buFont typeface="Arial"/>
               <a:buNone/>
             </a:pPr>
             <a:r>
@@ -18040,7 +19146,15 @@
               </a:rPr>
               <a:t>• Revisão trimestral pelo comitê</a:t>
             </a:r>
-            <a:endParaRPr/>
+            <a:endParaRPr b="0" i="0" sz="1400" u="none" cap="none" strike="noStrike">
+              <a:solidFill>
+                <a:srgbClr val="000000"/>
+              </a:solidFill>
+              <a:latin typeface="Arial"/>
+              <a:ea typeface="Arial"/>
+              <a:cs typeface="Arial"/>
+              <a:sym typeface="Arial"/>
+            </a:endParaRPr>
           </a:p>
           <a:p>
             <a:pPr indent="0" lvl="0" marL="0" marR="0" rtl="0" algn="l">
@@ -18053,6 +19167,11 @@
               <a:spcAft>
                 <a:spcPts val="0"/>
               </a:spcAft>
+              <a:buClr>
+                <a:srgbClr val="000000"/>
+              </a:buClr>
+              <a:buSzPts val="1400"/>
+              <a:buFont typeface="Arial"/>
               <a:buNone/>
             </a:pPr>
             <a:r>
@@ -18067,7 +19186,15 @@
               </a:rPr>
               <a:t>• Capacity dedicada por sprint (ex: 20%)</a:t>
             </a:r>
-            <a:endParaRPr/>
+            <a:endParaRPr b="0" i="0" sz="1400" u="none" cap="none" strike="noStrike">
+              <a:solidFill>
+                <a:srgbClr val="000000"/>
+              </a:solidFill>
+              <a:latin typeface="Arial"/>
+              <a:ea typeface="Arial"/>
+              <a:cs typeface="Arial"/>
+              <a:sym typeface="Arial"/>
+            </a:endParaRPr>
           </a:p>
           <a:p>
             <a:pPr indent="0" lvl="0" marL="0" marR="0" rtl="0" algn="l">
@@ -18080,6 +19207,11 @@
               <a:spcAft>
                 <a:spcPts val="0"/>
               </a:spcAft>
+              <a:buClr>
+                <a:srgbClr val="000000"/>
+              </a:buClr>
+              <a:buSzPts val="1400"/>
+              <a:buFont typeface="Arial"/>
               <a:buNone/>
             </a:pPr>
             <a:r>
@@ -18094,7 +19226,15 @@
               </a:rPr>
               <a:t>• Métricas: débitos criados vs. resolvidos</a:t>
             </a:r>
-            <a:endParaRPr/>
+            <a:endParaRPr b="0" i="0" sz="1400" u="none" cap="none" strike="noStrike">
+              <a:solidFill>
+                <a:srgbClr val="000000"/>
+              </a:solidFill>
+              <a:latin typeface="Arial"/>
+              <a:ea typeface="Arial"/>
+              <a:cs typeface="Arial"/>
+              <a:sym typeface="Arial"/>
+            </a:endParaRPr>
           </a:p>
         </p:txBody>
       </p:sp>
@@ -18305,6 +19445,11 @@
               <a:spcAft>
                 <a:spcPts val="0"/>
               </a:spcAft>
+              <a:buClr>
+                <a:srgbClr val="000000"/>
+              </a:buClr>
+              <a:buSzPts val="1400"/>
+              <a:buFont typeface="Arial"/>
               <a:buNone/>
             </a:pPr>
             <a:r>
@@ -18319,7 +19464,15 @@
               </a:rPr>
               <a:t>• Dependências: libs desatualizadas, vulnerabilidades</a:t>
             </a:r>
-            <a:endParaRPr/>
+            <a:endParaRPr b="0" i="0" sz="1400" u="none" cap="none" strike="noStrike">
+              <a:solidFill>
+                <a:srgbClr val="000000"/>
+              </a:solidFill>
+              <a:latin typeface="Arial"/>
+              <a:ea typeface="Arial"/>
+              <a:cs typeface="Arial"/>
+              <a:sym typeface="Arial"/>
+            </a:endParaRPr>
           </a:p>
           <a:p>
             <a:pPr indent="0" lvl="0" marL="0" marR="0" rtl="0" algn="l">
@@ -18332,6 +19485,11 @@
               <a:spcAft>
                 <a:spcPts val="0"/>
               </a:spcAft>
+              <a:buClr>
+                <a:srgbClr val="000000"/>
+              </a:buClr>
+              <a:buSzPts val="1400"/>
+              <a:buFont typeface="Arial"/>
               <a:buNone/>
             </a:pPr>
             <a:r>
@@ -18346,7 +19504,15 @@
               </a:rPr>
               <a:t>• Infraestrutura: configurações legacy, falta de IaC</a:t>
             </a:r>
-            <a:endParaRPr/>
+            <a:endParaRPr b="0" i="0" sz="1400" u="none" cap="none" strike="noStrike">
+              <a:solidFill>
+                <a:srgbClr val="000000"/>
+              </a:solidFill>
+              <a:latin typeface="Arial"/>
+              <a:ea typeface="Arial"/>
+              <a:cs typeface="Arial"/>
+              <a:sym typeface="Arial"/>
+            </a:endParaRPr>
           </a:p>
           <a:p>
             <a:pPr indent="0" lvl="0" marL="0" marR="0" rtl="0" algn="l">
@@ -18359,6 +19525,11 @@
               <a:spcAft>
                 <a:spcPts val="0"/>
               </a:spcAft>
+              <a:buClr>
+                <a:srgbClr val="000000"/>
+              </a:buClr>
+              <a:buSzPts val="1400"/>
+              <a:buFont typeface="Arial"/>
               <a:buNone/>
             </a:pPr>
             <a:r>
@@ -18373,7 +19544,15 @@
               </a:rPr>
               <a:t>• Testes: baixa cobertura, testes frágeis</a:t>
             </a:r>
-            <a:endParaRPr/>
+            <a:endParaRPr b="0" i="0" sz="1400" u="none" cap="none" strike="noStrike">
+              <a:solidFill>
+                <a:srgbClr val="000000"/>
+              </a:solidFill>
+              <a:latin typeface="Arial"/>
+              <a:ea typeface="Arial"/>
+              <a:cs typeface="Arial"/>
+              <a:sym typeface="Arial"/>
+            </a:endParaRPr>
           </a:p>
           <a:p>
             <a:pPr indent="0" lvl="0" marL="0" marR="0" rtl="0" algn="l">
@@ -18386,6 +19565,11 @@
               <a:spcAft>
                 <a:spcPts val="0"/>
               </a:spcAft>
+              <a:buClr>
+                <a:srgbClr val="000000"/>
+              </a:buClr>
+              <a:buSzPts val="1400"/>
+              <a:buFont typeface="Arial"/>
               <a:buNone/>
             </a:pPr>
             <a:r>
@@ -18400,7 +19584,15 @@
               </a:rPr>
               <a:t>• Documentação: APIs sem contrato, fluxos sem registro</a:t>
             </a:r>
-            <a:endParaRPr/>
+            <a:endParaRPr b="0" i="0" sz="1400" u="none" cap="none" strike="noStrike">
+              <a:solidFill>
+                <a:srgbClr val="000000"/>
+              </a:solidFill>
+              <a:latin typeface="Arial"/>
+              <a:ea typeface="Arial"/>
+              <a:cs typeface="Arial"/>
+              <a:sym typeface="Arial"/>
+            </a:endParaRPr>
           </a:p>
         </p:txBody>
       </p:sp>
@@ -18518,6 +19710,11 @@
               <a:spcAft>
                 <a:spcPts val="0"/>
               </a:spcAft>
+              <a:buClr>
+                <a:srgbClr val="000000"/>
+              </a:buClr>
+              <a:buSzPts val="2400"/>
+              <a:buFont typeface="Arial"/>
               <a:buNone/>
             </a:pPr>
             <a:r>
@@ -18532,7 +19729,15 @@
               </a:rPr>
               <a:t>Canal de Comunicação — Comunica</a:t>
             </a:r>
-            <a:endParaRPr/>
+            <a:endParaRPr b="0" i="0" sz="1400" u="none" cap="none" strike="noStrike">
+              <a:solidFill>
+                <a:srgbClr val="000000"/>
+              </a:solidFill>
+              <a:latin typeface="Arial"/>
+              <a:ea typeface="Arial"/>
+              <a:cs typeface="Arial"/>
+              <a:sym typeface="Arial"/>
+            </a:endParaRPr>
           </a:p>
         </p:txBody>
       </p:sp>
@@ -18571,6 +19776,11 @@
               <a:spcAft>
                 <a:spcPts val="0"/>
               </a:spcAft>
+              <a:buClr>
+                <a:srgbClr val="000000"/>
+              </a:buClr>
+              <a:buSzPts val="1800"/>
+              <a:buFont typeface="Arial"/>
               <a:buNone/>
             </a:pPr>
             <a:r>
@@ -18585,7 +19795,15 @@
               </a:rPr>
               <a:t>O que será publicado</a:t>
             </a:r>
-            <a:endParaRPr/>
+            <a:endParaRPr b="0" i="0" sz="1400" u="none" cap="none" strike="noStrike">
+              <a:solidFill>
+                <a:srgbClr val="000000"/>
+              </a:solidFill>
+              <a:latin typeface="Arial"/>
+              <a:ea typeface="Arial"/>
+              <a:cs typeface="Arial"/>
+              <a:sym typeface="Arial"/>
+            </a:endParaRPr>
           </a:p>
         </p:txBody>
       </p:sp>
@@ -18624,6 +19842,11 @@
               <a:spcAft>
                 <a:spcPts val="0"/>
               </a:spcAft>
+              <a:buClr>
+                <a:srgbClr val="000000"/>
+              </a:buClr>
+              <a:buSzPts val="1400"/>
+              <a:buFont typeface="Arial"/>
               <a:buNone/>
             </a:pPr>
             <a:r>
@@ -18638,7 +19861,15 @@
               </a:rPr>
               <a:t>• Decisões arquiteturais aprovadas (ADRs) e suas motivações</a:t>
             </a:r>
-            <a:endParaRPr/>
+            <a:endParaRPr b="0" i="0" sz="1400" u="none" cap="none" strike="noStrike">
+              <a:solidFill>
+                <a:srgbClr val="000000"/>
+              </a:solidFill>
+              <a:latin typeface="Arial"/>
+              <a:ea typeface="Arial"/>
+              <a:cs typeface="Arial"/>
+              <a:sym typeface="Arial"/>
+            </a:endParaRPr>
           </a:p>
           <a:p>
             <a:pPr indent="0" lvl="0" marL="0" marR="0" rtl="0" algn="l">
@@ -18651,6 +19882,11 @@
               <a:spcAft>
                 <a:spcPts val="0"/>
               </a:spcAft>
+              <a:buClr>
+                <a:srgbClr val="000000"/>
+              </a:buClr>
+              <a:buSzPts val="1400"/>
+              <a:buFont typeface="Arial"/>
               <a:buNone/>
             </a:pPr>
             <a:r>
@@ -18677,6 +19913,11 @@
               <a:spcAft>
                 <a:spcPts val="0"/>
               </a:spcAft>
+              <a:buClr>
+                <a:srgbClr val="000000"/>
+              </a:buClr>
+              <a:buSzPts val="1400"/>
+              <a:buFont typeface="Arial"/>
               <a:buNone/>
             </a:pPr>
             <a:r>
@@ -18691,7 +19932,15 @@
               </a:rPr>
               <a:t>• Atualizações do Tech Radar: novas tecnologias e mudanças de status</a:t>
             </a:r>
-            <a:endParaRPr/>
+            <a:endParaRPr b="0" i="0" sz="1400" u="none" cap="none" strike="noStrike">
+              <a:solidFill>
+                <a:srgbClr val="000000"/>
+              </a:solidFill>
+              <a:latin typeface="Arial"/>
+              <a:ea typeface="Arial"/>
+              <a:cs typeface="Arial"/>
+              <a:sym typeface="Arial"/>
+            </a:endParaRPr>
           </a:p>
           <a:p>
             <a:pPr indent="0" lvl="0" marL="0" marR="0" rtl="0" algn="l">
@@ -18704,6 +19953,11 @@
               <a:spcAft>
                 <a:spcPts val="0"/>
               </a:spcAft>
+              <a:buClr>
+                <a:srgbClr val="000000"/>
+              </a:buClr>
+              <a:buSzPts val="1400"/>
+              <a:buFont typeface="Arial"/>
               <a:buNone/>
             </a:pPr>
             <a:r>
@@ -18730,6 +19984,11 @@
               <a:spcAft>
                 <a:spcPts val="0"/>
               </a:spcAft>
+              <a:buClr>
+                <a:srgbClr val="000000"/>
+              </a:buClr>
+              <a:buSzPts val="1400"/>
+              <a:buFont typeface="Arial"/>
               <a:buNone/>
             </a:pPr>
             <a:r>
@@ -18744,7 +20003,15 @@
               </a:rPr>
               <a:t>• Resultados consolidados de auditorias e planos de ação</a:t>
             </a:r>
-            <a:endParaRPr/>
+            <a:endParaRPr b="0" i="0" sz="1400" u="none" cap="none" strike="noStrike">
+              <a:solidFill>
+                <a:srgbClr val="000000"/>
+              </a:solidFill>
+              <a:latin typeface="Arial"/>
+              <a:ea typeface="Arial"/>
+              <a:cs typeface="Arial"/>
+              <a:sym typeface="Arial"/>
+            </a:endParaRPr>
           </a:p>
           <a:p>
             <a:pPr indent="0" lvl="0" marL="0" marR="0" rtl="0" algn="l">
@@ -18757,6 +20024,11 @@
               <a:spcAft>
                 <a:spcPts val="0"/>
               </a:spcAft>
+              <a:buClr>
+                <a:srgbClr val="000000"/>
+              </a:buClr>
+              <a:buSzPts val="1400"/>
+              <a:buFont typeface="Arial"/>
               <a:buNone/>
             </a:pPr>
             <a:r>
@@ -18783,6 +20055,11 @@
               <a:spcAft>
                 <a:spcPts val="0"/>
               </a:spcAft>
+              <a:buClr>
+                <a:srgbClr val="000000"/>
+              </a:buClr>
+              <a:buSzPts val="1400"/>
+              <a:buFont typeface="Arial"/>
               <a:buNone/>
             </a:pPr>
             <a:r>
@@ -18797,7 +20074,15 @@
               </a:rPr>
               <a:t>• Comunicados sobre mudanças em padrões, libs ou guidelines</a:t>
             </a:r>
-            <a:endParaRPr/>
+            <a:endParaRPr b="0" i="0" sz="1400" u="none" cap="none" strike="noStrike">
+              <a:solidFill>
+                <a:srgbClr val="000000"/>
+              </a:solidFill>
+              <a:latin typeface="Arial"/>
+              <a:ea typeface="Arial"/>
+              <a:cs typeface="Arial"/>
+              <a:sym typeface="Arial"/>
+            </a:endParaRPr>
           </a:p>
           <a:p>
             <a:pPr indent="0" lvl="0" marL="0" marR="0" rtl="0" algn="l">
@@ -18810,6 +20095,11 @@
               <a:spcAft>
                 <a:spcPts val="0"/>
               </a:spcAft>
+              <a:buClr>
+                <a:srgbClr val="000000"/>
+              </a:buClr>
+              <a:buSzPts val="1400"/>
+              <a:buFont typeface="Arial"/>
               <a:buNone/>
             </a:pPr>
             <a:r>
@@ -18836,6 +20126,11 @@
               <a:spcAft>
                 <a:spcPts val="0"/>
               </a:spcAft>
+              <a:buClr>
+                <a:srgbClr val="000000"/>
+              </a:buClr>
+              <a:buSzPts val="1400"/>
+              <a:buFont typeface="Arial"/>
               <a:buNone/>
             </a:pPr>
             <a:r>
@@ -18850,7 +20145,15 @@
               </a:rPr>
               <a:t>• Calendário de reuniões do comitê e pautas futuras</a:t>
             </a:r>
-            <a:endParaRPr/>
+            <a:endParaRPr b="0" i="0" sz="1400" u="none" cap="none" strike="noStrike">
+              <a:solidFill>
+                <a:srgbClr val="000000"/>
+              </a:solidFill>
+              <a:latin typeface="Arial"/>
+              <a:ea typeface="Arial"/>
+              <a:cs typeface="Arial"/>
+              <a:sym typeface="Arial"/>
+            </a:endParaRPr>
           </a:p>
         </p:txBody>
       </p:sp>
@@ -18889,6 +20192,11 @@
               <a:spcAft>
                 <a:spcPts val="0"/>
               </a:spcAft>
+              <a:buClr>
+                <a:srgbClr val="000000"/>
+              </a:buClr>
+              <a:buSzPts val="1800"/>
+              <a:buFont typeface="Arial"/>
               <a:buNone/>
             </a:pPr>
             <a:r>
@@ -18903,7 +20211,15 @@
               </a:rPr>
               <a:t>Por que centralizar</a:t>
             </a:r>
-            <a:endParaRPr/>
+            <a:endParaRPr b="0" i="0" sz="1400" u="none" cap="none" strike="noStrike">
+              <a:solidFill>
+                <a:srgbClr val="000000"/>
+              </a:solidFill>
+              <a:latin typeface="Arial"/>
+              <a:ea typeface="Arial"/>
+              <a:cs typeface="Arial"/>
+              <a:sym typeface="Arial"/>
+            </a:endParaRPr>
           </a:p>
         </p:txBody>
       </p:sp>
@@ -18942,6 +20258,11 @@
               <a:spcAft>
                 <a:spcPts val="0"/>
               </a:spcAft>
+              <a:buClr>
+                <a:srgbClr val="000000"/>
+              </a:buClr>
+              <a:buSzPts val="1400"/>
+              <a:buFont typeface="Arial"/>
               <a:buNone/>
             </a:pPr>
             <a:r>
@@ -18956,7 +20277,15 @@
               </a:rPr>
               <a:t>• Fonte única de verdade para decisões técnicas</a:t>
             </a:r>
-            <a:endParaRPr/>
+            <a:endParaRPr b="0" i="0" sz="1400" u="none" cap="none" strike="noStrike">
+              <a:solidFill>
+                <a:srgbClr val="000000"/>
+              </a:solidFill>
+              <a:latin typeface="Arial"/>
+              <a:ea typeface="Arial"/>
+              <a:cs typeface="Arial"/>
+              <a:sym typeface="Arial"/>
+            </a:endParaRPr>
           </a:p>
           <a:p>
             <a:pPr indent="0" lvl="0" marL="0" marR="0" rtl="0" algn="l">
@@ -18969,6 +20298,11 @@
               <a:spcAft>
                 <a:spcPts val="0"/>
               </a:spcAft>
+              <a:buClr>
+                <a:srgbClr val="000000"/>
+              </a:buClr>
+              <a:buSzPts val="1400"/>
+              <a:buFont typeface="Arial"/>
               <a:buNone/>
             </a:pPr>
             <a:r>
@@ -18995,6 +20329,11 @@
               <a:spcAft>
                 <a:spcPts val="0"/>
               </a:spcAft>
+              <a:buClr>
+                <a:srgbClr val="000000"/>
+              </a:buClr>
+              <a:buSzPts val="1400"/>
+              <a:buFont typeface="Arial"/>
               <a:buNone/>
             </a:pPr>
             <a:r>
@@ -19009,7 +20348,15 @@
               </a:rPr>
               <a:t>• Transparência: qualquer dev pode consultar o histórico</a:t>
             </a:r>
-            <a:endParaRPr/>
+            <a:endParaRPr b="0" i="0" sz="1400" u="none" cap="none" strike="noStrike">
+              <a:solidFill>
+                <a:srgbClr val="000000"/>
+              </a:solidFill>
+              <a:latin typeface="Arial"/>
+              <a:ea typeface="Arial"/>
+              <a:cs typeface="Arial"/>
+              <a:sym typeface="Arial"/>
+            </a:endParaRPr>
           </a:p>
           <a:p>
             <a:pPr indent="0" lvl="0" marL="0" marR="0" rtl="0" algn="l">
@@ -19022,6 +20369,11 @@
               <a:spcAft>
                 <a:spcPts val="0"/>
               </a:spcAft>
+              <a:buClr>
+                <a:srgbClr val="000000"/>
+              </a:buClr>
+              <a:buSzPts val="1400"/>
+              <a:buFont typeface="Arial"/>
               <a:buNone/>
             </a:pPr>
             <a:r>
@@ -19048,6 +20400,11 @@
               <a:spcAft>
                 <a:spcPts val="0"/>
               </a:spcAft>
+              <a:buClr>
+                <a:srgbClr val="000000"/>
+              </a:buClr>
+              <a:buSzPts val="1400"/>
+              <a:buFont typeface="Arial"/>
               <a:buNone/>
             </a:pPr>
             <a:r>
@@ -19062,7 +20419,15 @@
               </a:rPr>
               <a:t>• Reduz ruído e retrabalho por falta de informação</a:t>
             </a:r>
-            <a:endParaRPr/>
+            <a:endParaRPr b="0" i="0" sz="1400" u="none" cap="none" strike="noStrike">
+              <a:solidFill>
+                <a:srgbClr val="000000"/>
+              </a:solidFill>
+              <a:latin typeface="Arial"/>
+              <a:ea typeface="Arial"/>
+              <a:cs typeface="Arial"/>
+              <a:sym typeface="Arial"/>
+            </a:endParaRPr>
           </a:p>
           <a:p>
             <a:pPr indent="0" lvl="0" marL="0" marR="0" rtl="0" algn="l">
@@ -19075,6 +20440,11 @@
               <a:spcAft>
                 <a:spcPts val="0"/>
               </a:spcAft>
+              <a:buClr>
+                <a:srgbClr val="000000"/>
+              </a:buClr>
+              <a:buSzPts val="1400"/>
+              <a:buFont typeface="Arial"/>
               <a:buNone/>
             </a:pPr>
             <a:r>
@@ -19101,6 +20471,11 @@
               <a:spcAft>
                 <a:spcPts val="0"/>
               </a:spcAft>
+              <a:buClr>
+                <a:srgbClr val="000000"/>
+              </a:buClr>
+              <a:buSzPts val="1400"/>
+              <a:buFont typeface="Arial"/>
               <a:buNone/>
             </a:pPr>
             <a:r>
@@ -19115,7 +20490,15 @@
               </a:rPr>
               <a:t>• Facilita onboarding: novos devs encontram tudo em um lugar</a:t>
             </a:r>
-            <a:endParaRPr/>
+            <a:endParaRPr b="0" i="0" sz="1400" u="none" cap="none" strike="noStrike">
+              <a:solidFill>
+                <a:srgbClr val="000000"/>
+              </a:solidFill>
+              <a:latin typeface="Arial"/>
+              <a:ea typeface="Arial"/>
+              <a:cs typeface="Arial"/>
+              <a:sym typeface="Arial"/>
+            </a:endParaRPr>
           </a:p>
           <a:p>
             <a:pPr indent="0" lvl="0" marL="0" marR="0" rtl="0" algn="l">
@@ -19128,6 +20511,11 @@
               <a:spcAft>
                 <a:spcPts val="0"/>
               </a:spcAft>
+              <a:buClr>
+                <a:srgbClr val="000000"/>
+              </a:buClr>
+              <a:buSzPts val="1400"/>
+              <a:buFont typeface="Arial"/>
               <a:buNone/>
             </a:pPr>
             <a:r>
@@ -19154,6 +20542,11 @@
               <a:spcAft>
                 <a:spcPts val="0"/>
               </a:spcAft>
+              <a:buClr>
+                <a:srgbClr val="000000"/>
+              </a:buClr>
+              <a:buSzPts val="1400"/>
+              <a:buFont typeface="Arial"/>
               <a:buNone/>
             </a:pPr>
             <a:r>
@@ -19168,7 +20561,15 @@
               </a:rPr>
               <a:t>• Engajamento: times acompanham a evolução da arquitetura</a:t>
             </a:r>
-            <a:endParaRPr/>
+            <a:endParaRPr b="0" i="0" sz="1400" u="none" cap="none" strike="noStrike">
+              <a:solidFill>
+                <a:srgbClr val="000000"/>
+              </a:solidFill>
+              <a:latin typeface="Arial"/>
+              <a:ea typeface="Arial"/>
+              <a:cs typeface="Arial"/>
+              <a:sym typeface="Arial"/>
+            </a:endParaRPr>
           </a:p>
         </p:txBody>
       </p:sp>
@@ -19286,6 +20687,11 @@
               <a:spcAft>
                 <a:spcPts val="0"/>
               </a:spcAft>
+              <a:buClr>
+                <a:srgbClr val="000000"/>
+              </a:buClr>
+              <a:buSzPts val="2400"/>
+              <a:buFont typeface="Arial"/>
               <a:buNone/>
             </a:pPr>
             <a:r>
@@ -19300,7 +20706,15 @@
               </a:rPr>
               <a:t>Próximos Passos</a:t>
             </a:r>
-            <a:endParaRPr/>
+            <a:endParaRPr b="0" i="0" sz="1400" u="none" cap="none" strike="noStrike">
+              <a:solidFill>
+                <a:srgbClr val="000000"/>
+              </a:solidFill>
+              <a:latin typeface="Arial"/>
+              <a:ea typeface="Arial"/>
+              <a:cs typeface="Arial"/>
+              <a:sym typeface="Arial"/>
+            </a:endParaRPr>
           </a:p>
         </p:txBody>
       </p:sp>
@@ -19381,6 +20795,11 @@
               <a:spcAft>
                 <a:spcPts val="0"/>
               </a:spcAft>
+              <a:buClr>
+                <a:srgbClr val="000000"/>
+              </a:buClr>
+              <a:buSzPts val="1400"/>
+              <a:buFont typeface="Arial"/>
               <a:buNone/>
             </a:pPr>
             <a:r>
@@ -19433,6 +20852,11 @@
               <a:spcAft>
                 <a:spcPts val="0"/>
               </a:spcAft>
+              <a:buClr>
+                <a:srgbClr val="000000"/>
+              </a:buClr>
+              <a:buSzPts val="1100"/>
+              <a:buFont typeface="Arial"/>
               <a:buNone/>
             </a:pPr>
             <a:r>
@@ -19447,7 +20871,15 @@
               </a:rPr>
               <a:t>1</a:t>
             </a:r>
-            <a:endParaRPr/>
+            <a:endParaRPr b="0" i="0" sz="1400" u="none" cap="none" strike="noStrike">
+              <a:solidFill>
+                <a:srgbClr val="000000"/>
+              </a:solidFill>
+              <a:latin typeface="Arial"/>
+              <a:ea typeface="Arial"/>
+              <a:cs typeface="Arial"/>
+              <a:sym typeface="Arial"/>
+            </a:endParaRPr>
           </a:p>
         </p:txBody>
       </p:sp>
@@ -19497,6 +20929,11 @@
               <a:spcAft>
                 <a:spcPts val="0"/>
               </a:spcAft>
+              <a:buClr>
+                <a:srgbClr val="000000"/>
+              </a:buClr>
+              <a:buSzPts val="1400"/>
+              <a:buFont typeface="Arial"/>
               <a:buNone/>
             </a:pPr>
             <a:r>
@@ -19549,6 +20986,11 @@
               <a:spcAft>
                 <a:spcPts val="0"/>
               </a:spcAft>
+              <a:buClr>
+                <a:srgbClr val="000000"/>
+              </a:buClr>
+              <a:buSzPts val="1400"/>
+              <a:buFont typeface="Arial"/>
               <a:buNone/>
             </a:pPr>
             <a:r>
@@ -19563,7 +21005,15 @@
               </a:rPr>
               <a:t>Mês 1</a:t>
             </a:r>
-            <a:endParaRPr/>
+            <a:endParaRPr b="0" i="0" sz="1400" u="none" cap="none" strike="noStrike">
+              <a:solidFill>
+                <a:srgbClr val="000000"/>
+              </a:solidFill>
+              <a:latin typeface="Arial"/>
+              <a:ea typeface="Arial"/>
+              <a:cs typeface="Arial"/>
+              <a:sym typeface="Arial"/>
+            </a:endParaRPr>
           </a:p>
         </p:txBody>
       </p:sp>
@@ -19602,6 +21052,11 @@
               <a:spcAft>
                 <a:spcPts val="0"/>
               </a:spcAft>
+              <a:buClr>
+                <a:srgbClr val="000000"/>
+              </a:buClr>
+              <a:buSzPts val="1100"/>
+              <a:buFont typeface="Arial"/>
               <a:buNone/>
             </a:pPr>
             <a:r>
@@ -19616,7 +21071,15 @@
               </a:rPr>
               <a:t>Fundação</a:t>
             </a:r>
-            <a:endParaRPr/>
+            <a:endParaRPr b="0" i="0" sz="1400" u="none" cap="none" strike="noStrike">
+              <a:solidFill>
+                <a:srgbClr val="000000"/>
+              </a:solidFill>
+              <a:latin typeface="Arial"/>
+              <a:ea typeface="Arial"/>
+              <a:cs typeface="Arial"/>
+              <a:sym typeface="Arial"/>
+            </a:endParaRPr>
           </a:p>
         </p:txBody>
       </p:sp>
@@ -19655,6 +21118,11 @@
               <a:spcAft>
                 <a:spcPts val="0"/>
               </a:spcAft>
+              <a:buClr>
+                <a:srgbClr val="000000"/>
+              </a:buClr>
+              <a:buSzPts val="1200"/>
+              <a:buFont typeface="Arial"/>
               <a:buNone/>
             </a:pPr>
             <a:r>
@@ -19669,7 +21137,15 @@
               </a:rPr>
               <a:t>Formalizar comitê e</a:t>
             </a:r>
-            <a:endParaRPr/>
+            <a:endParaRPr b="0" i="0" sz="1400" u="none" cap="none" strike="noStrike">
+              <a:solidFill>
+                <a:srgbClr val="000000"/>
+              </a:solidFill>
+              <a:latin typeface="Arial"/>
+              <a:ea typeface="Arial"/>
+              <a:cs typeface="Arial"/>
+              <a:sym typeface="Arial"/>
+            </a:endParaRPr>
           </a:p>
           <a:p>
             <a:pPr indent="0" lvl="0" marL="0" marR="0" rtl="0" algn="l">
@@ -19682,6 +21158,11 @@
               <a:spcAft>
                 <a:spcPts val="0"/>
               </a:spcAft>
+              <a:buClr>
+                <a:srgbClr val="000000"/>
+              </a:buClr>
+              <a:buSzPts val="1200"/>
+              <a:buFont typeface="Arial"/>
               <a:buNone/>
             </a:pPr>
             <a:r>
@@ -19696,7 +21177,15 @@
               </a:rPr>
               <a:t>definir participantes</a:t>
             </a:r>
-            <a:endParaRPr/>
+            <a:endParaRPr b="0" i="0" sz="1400" u="none" cap="none" strike="noStrike">
+              <a:solidFill>
+                <a:srgbClr val="000000"/>
+              </a:solidFill>
+              <a:latin typeface="Arial"/>
+              <a:ea typeface="Arial"/>
+              <a:cs typeface="Arial"/>
+              <a:sym typeface="Arial"/>
+            </a:endParaRPr>
           </a:p>
           <a:p>
             <a:pPr indent="0" lvl="0" marL="0" marR="0" rtl="0" algn="l">
@@ -19709,6 +21198,11 @@
               <a:spcAft>
                 <a:spcPts val="0"/>
               </a:spcAft>
+              <a:buClr>
+                <a:srgbClr val="000000"/>
+              </a:buClr>
+              <a:buSzPts val="1200"/>
+              <a:buFont typeface="Arial"/>
               <a:buNone/>
             </a:pPr>
             <a:r>
@@ -19735,6 +21229,11 @@
               <a:spcAft>
                 <a:spcPts val="0"/>
               </a:spcAft>
+              <a:buClr>
+                <a:srgbClr val="000000"/>
+              </a:buClr>
+              <a:buSzPts val="1200"/>
+              <a:buFont typeface="Arial"/>
               <a:buNone/>
             </a:pPr>
             <a:r>
@@ -19749,7 +21248,15 @@
               </a:rPr>
               <a:t>Agendar primeira</a:t>
             </a:r>
-            <a:endParaRPr/>
+            <a:endParaRPr b="0" i="0" sz="1400" u="none" cap="none" strike="noStrike">
+              <a:solidFill>
+                <a:srgbClr val="000000"/>
+              </a:solidFill>
+              <a:latin typeface="Arial"/>
+              <a:ea typeface="Arial"/>
+              <a:cs typeface="Arial"/>
+              <a:sym typeface="Arial"/>
+            </a:endParaRPr>
           </a:p>
           <a:p>
             <a:pPr indent="0" lvl="0" marL="0" marR="0" rtl="0" algn="l">
@@ -19762,6 +21269,11 @@
               <a:spcAft>
                 <a:spcPts val="0"/>
               </a:spcAft>
+              <a:buClr>
+                <a:srgbClr val="000000"/>
+              </a:buClr>
+              <a:buSzPts val="1200"/>
+              <a:buFont typeface="Arial"/>
               <a:buNone/>
             </a:pPr>
             <a:r>
@@ -19776,7 +21288,15 @@
               </a:rPr>
               <a:t>reunião do comitê</a:t>
             </a:r>
-            <a:endParaRPr/>
+            <a:endParaRPr b="0" i="0" sz="1400" u="none" cap="none" strike="noStrike">
+              <a:solidFill>
+                <a:srgbClr val="000000"/>
+              </a:solidFill>
+              <a:latin typeface="Arial"/>
+              <a:ea typeface="Arial"/>
+              <a:cs typeface="Arial"/>
+              <a:sym typeface="Arial"/>
+            </a:endParaRPr>
           </a:p>
         </p:txBody>
       </p:sp>
@@ -19824,6 +21344,11 @@
               <a:spcAft>
                 <a:spcPts val="0"/>
               </a:spcAft>
+              <a:buClr>
+                <a:srgbClr val="000000"/>
+              </a:buClr>
+              <a:buSzPts val="1400"/>
+              <a:buFont typeface="Arial"/>
               <a:buNone/>
             </a:pPr>
             <a:r>
@@ -19876,6 +21401,11 @@
               <a:spcAft>
                 <a:spcPts val="0"/>
               </a:spcAft>
+              <a:buClr>
+                <a:srgbClr val="000000"/>
+              </a:buClr>
+              <a:buSzPts val="1100"/>
+              <a:buFont typeface="Arial"/>
               <a:buNone/>
             </a:pPr>
             <a:r>
@@ -19890,7 +21420,15 @@
               </a:rPr>
               <a:t>2</a:t>
             </a:r>
-            <a:endParaRPr/>
+            <a:endParaRPr b="0" i="0" sz="1400" u="none" cap="none" strike="noStrike">
+              <a:solidFill>
+                <a:srgbClr val="000000"/>
+              </a:solidFill>
+              <a:latin typeface="Arial"/>
+              <a:ea typeface="Arial"/>
+              <a:cs typeface="Arial"/>
+              <a:sym typeface="Arial"/>
+            </a:endParaRPr>
           </a:p>
         </p:txBody>
       </p:sp>
@@ -19940,6 +21478,11 @@
               <a:spcAft>
                 <a:spcPts val="0"/>
               </a:spcAft>
+              <a:buClr>
+                <a:srgbClr val="000000"/>
+              </a:buClr>
+              <a:buSzPts val="1400"/>
+              <a:buFont typeface="Arial"/>
               <a:buNone/>
             </a:pPr>
             <a:r>
@@ -19992,6 +21535,11 @@
               <a:spcAft>
                 <a:spcPts val="0"/>
               </a:spcAft>
+              <a:buClr>
+                <a:srgbClr val="000000"/>
+              </a:buClr>
+              <a:buSzPts val="1400"/>
+              <a:buFont typeface="Arial"/>
               <a:buNone/>
             </a:pPr>
             <a:r>
@@ -20006,7 +21554,15 @@
               </a:rPr>
               <a:t>Mês 2-3</a:t>
             </a:r>
-            <a:endParaRPr/>
+            <a:endParaRPr b="0" i="0" sz="1400" u="none" cap="none" strike="noStrike">
+              <a:solidFill>
+                <a:srgbClr val="000000"/>
+              </a:solidFill>
+              <a:latin typeface="Arial"/>
+              <a:ea typeface="Arial"/>
+              <a:cs typeface="Arial"/>
+              <a:sym typeface="Arial"/>
+            </a:endParaRPr>
           </a:p>
         </p:txBody>
       </p:sp>
@@ -20045,6 +21601,11 @@
               <a:spcAft>
                 <a:spcPts val="0"/>
               </a:spcAft>
+              <a:buClr>
+                <a:srgbClr val="000000"/>
+              </a:buClr>
+              <a:buSzPts val="1100"/>
+              <a:buFont typeface="Arial"/>
               <a:buNone/>
             </a:pPr>
             <a:r>
@@ -20059,7 +21620,15 @@
               </a:rPr>
               <a:t>Estruturação</a:t>
             </a:r>
-            <a:endParaRPr/>
+            <a:endParaRPr b="0" i="0" sz="1400" u="none" cap="none" strike="noStrike">
+              <a:solidFill>
+                <a:srgbClr val="000000"/>
+              </a:solidFill>
+              <a:latin typeface="Arial"/>
+              <a:ea typeface="Arial"/>
+              <a:cs typeface="Arial"/>
+              <a:sym typeface="Arial"/>
+            </a:endParaRPr>
           </a:p>
         </p:txBody>
       </p:sp>
@@ -20098,6 +21667,11 @@
               <a:spcAft>
                 <a:spcPts val="0"/>
               </a:spcAft>
+              <a:buClr>
+                <a:srgbClr val="000000"/>
+              </a:buClr>
+              <a:buSzPts val="1200"/>
+              <a:buFont typeface="Arial"/>
               <a:buNone/>
             </a:pPr>
             <a:r>
@@ -20112,7 +21686,15 @@
               </a:rPr>
               <a:t>Publicar Tech Radar v1</a:t>
             </a:r>
-            <a:endParaRPr/>
+            <a:endParaRPr b="0" i="0" sz="1400" u="none" cap="none" strike="noStrike">
+              <a:solidFill>
+                <a:srgbClr val="000000"/>
+              </a:solidFill>
+              <a:latin typeface="Arial"/>
+              <a:ea typeface="Arial"/>
+              <a:cs typeface="Arial"/>
+              <a:sym typeface="Arial"/>
+            </a:endParaRPr>
           </a:p>
           <a:p>
             <a:pPr indent="0" lvl="0" marL="0" marR="0" rtl="0" algn="l">
@@ -20125,6 +21707,11 @@
               <a:spcAft>
                 <a:spcPts val="0"/>
               </a:spcAft>
+              <a:buClr>
+                <a:srgbClr val="000000"/>
+              </a:buClr>
+              <a:buSzPts val="1200"/>
+              <a:buFont typeface="Arial"/>
               <a:buNone/>
             </a:pPr>
             <a:r>
@@ -20151,6 +21738,11 @@
               <a:spcAft>
                 <a:spcPts val="0"/>
               </a:spcAft>
+              <a:buClr>
+                <a:srgbClr val="000000"/>
+              </a:buClr>
+              <a:buSzPts val="1200"/>
+              <a:buFont typeface="Arial"/>
               <a:buNone/>
             </a:pPr>
             <a:r>
@@ -20165,7 +21757,15 @@
               </a:rPr>
               <a:t>Criar repositório</a:t>
             </a:r>
-            <a:endParaRPr/>
+            <a:endParaRPr b="0" i="0" sz="1400" u="none" cap="none" strike="noStrike">
+              <a:solidFill>
+                <a:srgbClr val="000000"/>
+              </a:solidFill>
+              <a:latin typeface="Arial"/>
+              <a:ea typeface="Arial"/>
+              <a:cs typeface="Arial"/>
+              <a:sym typeface="Arial"/>
+            </a:endParaRPr>
           </a:p>
           <a:p>
             <a:pPr indent="0" lvl="0" marL="0" marR="0" rtl="0" algn="l">
@@ -20178,6 +21778,11 @@
               <a:spcAft>
                 <a:spcPts val="0"/>
               </a:spcAft>
+              <a:buClr>
+                <a:srgbClr val="000000"/>
+              </a:buClr>
+              <a:buSzPts val="1200"/>
+              <a:buFont typeface="Arial"/>
               <a:buNone/>
             </a:pPr>
             <a:r>
@@ -20192,7 +21797,15 @@
               </a:rPr>
               <a:t>de ADRs</a:t>
             </a:r>
-            <a:endParaRPr/>
+            <a:endParaRPr b="0" i="0" sz="1400" u="none" cap="none" strike="noStrike">
+              <a:solidFill>
+                <a:srgbClr val="000000"/>
+              </a:solidFill>
+              <a:latin typeface="Arial"/>
+              <a:ea typeface="Arial"/>
+              <a:cs typeface="Arial"/>
+              <a:sym typeface="Arial"/>
+            </a:endParaRPr>
           </a:p>
           <a:p>
             <a:pPr indent="0" lvl="0" marL="0" marR="0" rtl="0" algn="l">
@@ -20205,6 +21818,11 @@
               <a:spcAft>
                 <a:spcPts val="0"/>
               </a:spcAft>
+              <a:buClr>
+                <a:srgbClr val="000000"/>
+              </a:buClr>
+              <a:buSzPts val="1200"/>
+              <a:buFont typeface="Arial"/>
               <a:buNone/>
             </a:pPr>
             <a:r>
@@ -20231,6 +21849,11 @@
               <a:spcAft>
                 <a:spcPts val="0"/>
               </a:spcAft>
+              <a:buClr>
+                <a:srgbClr val="000000"/>
+              </a:buClr>
+              <a:buSzPts val="1200"/>
+              <a:buFont typeface="Arial"/>
               <a:buNone/>
             </a:pPr>
             <a:r>
@@ -20245,7 +21868,15 @@
               </a:rPr>
               <a:t>Definir checklist</a:t>
             </a:r>
-            <a:endParaRPr/>
+            <a:endParaRPr b="0" i="0" sz="1400" u="none" cap="none" strike="noStrike">
+              <a:solidFill>
+                <a:srgbClr val="000000"/>
+              </a:solidFill>
+              <a:latin typeface="Arial"/>
+              <a:ea typeface="Arial"/>
+              <a:cs typeface="Arial"/>
+              <a:sym typeface="Arial"/>
+            </a:endParaRPr>
           </a:p>
           <a:p>
             <a:pPr indent="0" lvl="0" marL="0" marR="0" rtl="0" algn="l">
@@ -20258,6 +21889,11 @@
               <a:spcAft>
                 <a:spcPts val="0"/>
               </a:spcAft>
+              <a:buClr>
+                <a:srgbClr val="000000"/>
+              </a:buClr>
+              <a:buSzPts val="1200"/>
+              <a:buFont typeface="Arial"/>
               <a:buNone/>
             </a:pPr>
             <a:r>
@@ -20272,7 +21908,15 @@
               </a:rPr>
               <a:t>de auditoria</a:t>
             </a:r>
-            <a:endParaRPr/>
+            <a:endParaRPr b="0" i="0" sz="1400" u="none" cap="none" strike="noStrike">
+              <a:solidFill>
+                <a:srgbClr val="000000"/>
+              </a:solidFill>
+              <a:latin typeface="Arial"/>
+              <a:ea typeface="Arial"/>
+              <a:cs typeface="Arial"/>
+              <a:sym typeface="Arial"/>
+            </a:endParaRPr>
           </a:p>
         </p:txBody>
       </p:sp>
@@ -20320,6 +21964,11 @@
               <a:spcAft>
                 <a:spcPts val="0"/>
               </a:spcAft>
+              <a:buClr>
+                <a:srgbClr val="000000"/>
+              </a:buClr>
+              <a:buSzPts val="1400"/>
+              <a:buFont typeface="Arial"/>
               <a:buNone/>
             </a:pPr>
             <a:r>
@@ -20372,6 +22021,11 @@
               <a:spcAft>
                 <a:spcPts val="0"/>
               </a:spcAft>
+              <a:buClr>
+                <a:srgbClr val="000000"/>
+              </a:buClr>
+              <a:buSzPts val="1100"/>
+              <a:buFont typeface="Arial"/>
               <a:buNone/>
             </a:pPr>
             <a:r>
@@ -20386,7 +22040,15 @@
               </a:rPr>
               <a:t>3</a:t>
             </a:r>
-            <a:endParaRPr/>
+            <a:endParaRPr b="0" i="0" sz="1400" u="none" cap="none" strike="noStrike">
+              <a:solidFill>
+                <a:srgbClr val="000000"/>
+              </a:solidFill>
+              <a:latin typeface="Arial"/>
+              <a:ea typeface="Arial"/>
+              <a:cs typeface="Arial"/>
+              <a:sym typeface="Arial"/>
+            </a:endParaRPr>
           </a:p>
         </p:txBody>
       </p:sp>
@@ -20436,6 +22098,11 @@
               <a:spcAft>
                 <a:spcPts val="0"/>
               </a:spcAft>
+              <a:buClr>
+                <a:srgbClr val="000000"/>
+              </a:buClr>
+              <a:buSzPts val="1400"/>
+              <a:buFont typeface="Arial"/>
               <a:buNone/>
             </a:pPr>
             <a:r>
@@ -20488,6 +22155,11 @@
               <a:spcAft>
                 <a:spcPts val="0"/>
               </a:spcAft>
+              <a:buClr>
+                <a:srgbClr val="000000"/>
+              </a:buClr>
+              <a:buSzPts val="1400"/>
+              <a:buFont typeface="Arial"/>
               <a:buNone/>
             </a:pPr>
             <a:r>
@@ -20502,7 +22174,15 @@
               </a:rPr>
               <a:t>Mês 4-6</a:t>
             </a:r>
-            <a:endParaRPr/>
+            <a:endParaRPr b="0" i="0" sz="1400" u="none" cap="none" strike="noStrike">
+              <a:solidFill>
+                <a:srgbClr val="000000"/>
+              </a:solidFill>
+              <a:latin typeface="Arial"/>
+              <a:ea typeface="Arial"/>
+              <a:cs typeface="Arial"/>
+              <a:sym typeface="Arial"/>
+            </a:endParaRPr>
           </a:p>
         </p:txBody>
       </p:sp>
@@ -20541,6 +22221,11 @@
               <a:spcAft>
                 <a:spcPts val="0"/>
               </a:spcAft>
+              <a:buClr>
+                <a:srgbClr val="000000"/>
+              </a:buClr>
+              <a:buSzPts val="1100"/>
+              <a:buFont typeface="Arial"/>
               <a:buNone/>
             </a:pPr>
             <a:r>
@@ -20555,7 +22240,15 @@
               </a:rPr>
               <a:t>Operação</a:t>
             </a:r>
-            <a:endParaRPr/>
+            <a:endParaRPr b="0" i="0" sz="1400" u="none" cap="none" strike="noStrike">
+              <a:solidFill>
+                <a:srgbClr val="000000"/>
+              </a:solidFill>
+              <a:latin typeface="Arial"/>
+              <a:ea typeface="Arial"/>
+              <a:cs typeface="Arial"/>
+              <a:sym typeface="Arial"/>
+            </a:endParaRPr>
           </a:p>
         </p:txBody>
       </p:sp>
@@ -20594,6 +22287,11 @@
               <a:spcAft>
                 <a:spcPts val="0"/>
               </a:spcAft>
+              <a:buClr>
+                <a:srgbClr val="000000"/>
+              </a:buClr>
+              <a:buSzPts val="1200"/>
+              <a:buFont typeface="Arial"/>
               <a:buNone/>
             </a:pPr>
             <a:r>
@@ -20608,7 +22306,15 @@
               </a:rPr>
               <a:t>Primeira rodada de</a:t>
             </a:r>
-            <a:endParaRPr/>
+            <a:endParaRPr b="0" i="0" sz="1400" u="none" cap="none" strike="noStrike">
+              <a:solidFill>
+                <a:srgbClr val="000000"/>
+              </a:solidFill>
+              <a:latin typeface="Arial"/>
+              <a:ea typeface="Arial"/>
+              <a:cs typeface="Arial"/>
+              <a:sym typeface="Arial"/>
+            </a:endParaRPr>
           </a:p>
           <a:p>
             <a:pPr indent="0" lvl="0" marL="0" marR="0" rtl="0" algn="l">
@@ -20621,6 +22327,11 @@
               <a:spcAft>
                 <a:spcPts val="0"/>
               </a:spcAft>
+              <a:buClr>
+                <a:srgbClr val="000000"/>
+              </a:buClr>
+              <a:buSzPts val="1200"/>
+              <a:buFont typeface="Arial"/>
               <a:buNone/>
             </a:pPr>
             <a:r>
@@ -20635,7 +22346,15 @@
               </a:rPr>
               <a:t>auditorias</a:t>
             </a:r>
-            <a:endParaRPr/>
+            <a:endParaRPr b="0" i="0" sz="1400" u="none" cap="none" strike="noStrike">
+              <a:solidFill>
+                <a:srgbClr val="000000"/>
+              </a:solidFill>
+              <a:latin typeface="Arial"/>
+              <a:ea typeface="Arial"/>
+              <a:cs typeface="Arial"/>
+              <a:sym typeface="Arial"/>
+            </a:endParaRPr>
           </a:p>
           <a:p>
             <a:pPr indent="0" lvl="0" marL="0" marR="0" rtl="0" algn="l">
@@ -20648,6 +22367,11 @@
               <a:spcAft>
                 <a:spcPts val="0"/>
               </a:spcAft>
+              <a:buClr>
+                <a:srgbClr val="000000"/>
+              </a:buClr>
+              <a:buSzPts val="1200"/>
+              <a:buFont typeface="Arial"/>
               <a:buNone/>
             </a:pPr>
             <a:r>
@@ -20674,6 +22398,11 @@
               <a:spcAft>
                 <a:spcPts val="0"/>
               </a:spcAft>
+              <a:buClr>
+                <a:srgbClr val="000000"/>
+              </a:buClr>
+              <a:buSzPts val="1200"/>
+              <a:buFont typeface="Arial"/>
               <a:buNone/>
             </a:pPr>
             <a:r>
@@ -20688,7 +22417,15 @@
               </a:rPr>
               <a:t>Primeiros ADRs</a:t>
             </a:r>
-            <a:endParaRPr/>
+            <a:endParaRPr b="0" i="0" sz="1400" u="none" cap="none" strike="noStrike">
+              <a:solidFill>
+                <a:srgbClr val="000000"/>
+              </a:solidFill>
+              <a:latin typeface="Arial"/>
+              <a:ea typeface="Arial"/>
+              <a:cs typeface="Arial"/>
+              <a:sym typeface="Arial"/>
+            </a:endParaRPr>
           </a:p>
           <a:p>
             <a:pPr indent="0" lvl="0" marL="0" marR="0" rtl="0" algn="l">
@@ -20701,6 +22438,11 @@
               <a:spcAft>
                 <a:spcPts val="0"/>
               </a:spcAft>
+              <a:buClr>
+                <a:srgbClr val="000000"/>
+              </a:buClr>
+              <a:buSzPts val="1200"/>
+              <a:buFont typeface="Arial"/>
               <a:buNone/>
             </a:pPr>
             <a:r>
@@ -20715,7 +22457,15 @@
               </a:rPr>
               <a:t>aprovados</a:t>
             </a:r>
-            <a:endParaRPr/>
+            <a:endParaRPr b="0" i="0" sz="1400" u="none" cap="none" strike="noStrike">
+              <a:solidFill>
+                <a:srgbClr val="000000"/>
+              </a:solidFill>
+              <a:latin typeface="Arial"/>
+              <a:ea typeface="Arial"/>
+              <a:cs typeface="Arial"/>
+              <a:sym typeface="Arial"/>
+            </a:endParaRPr>
           </a:p>
           <a:p>
             <a:pPr indent="0" lvl="0" marL="0" marR="0" rtl="0" algn="l">
@@ -20728,6 +22478,11 @@
               <a:spcAft>
                 <a:spcPts val="0"/>
               </a:spcAft>
+              <a:buClr>
+                <a:srgbClr val="000000"/>
+              </a:buClr>
+              <a:buSzPts val="1200"/>
+              <a:buFont typeface="Arial"/>
               <a:buNone/>
             </a:pPr>
             <a:r>
@@ -20754,6 +22509,11 @@
               <a:spcAft>
                 <a:spcPts val="0"/>
               </a:spcAft>
+              <a:buClr>
+                <a:srgbClr val="000000"/>
+              </a:buClr>
+              <a:buSzPts val="1200"/>
+              <a:buFont typeface="Arial"/>
               <a:buNone/>
             </a:pPr>
             <a:r>
@@ -20768,7 +22528,15 @@
               </a:rPr>
               <a:t>Página no Comunica</a:t>
             </a:r>
-            <a:endParaRPr/>
+            <a:endParaRPr b="0" i="0" sz="1400" u="none" cap="none" strike="noStrike">
+              <a:solidFill>
+                <a:srgbClr val="000000"/>
+              </a:solidFill>
+              <a:latin typeface="Arial"/>
+              <a:ea typeface="Arial"/>
+              <a:cs typeface="Arial"/>
+              <a:sym typeface="Arial"/>
+            </a:endParaRPr>
           </a:p>
           <a:p>
             <a:pPr indent="0" lvl="0" marL="0" marR="0" rtl="0" algn="l">
@@ -20781,6 +22549,11 @@
               <a:spcAft>
                 <a:spcPts val="0"/>
               </a:spcAft>
+              <a:buClr>
+                <a:srgbClr val="000000"/>
+              </a:buClr>
+              <a:buSzPts val="1200"/>
+              <a:buFont typeface="Arial"/>
               <a:buNone/>
             </a:pPr>
             <a:r>
@@ -20795,7 +22568,15 @@
               </a:rPr>
               <a:t>ativa</a:t>
             </a:r>
-            <a:endParaRPr/>
+            <a:endParaRPr b="0" i="0" sz="1400" u="none" cap="none" strike="noStrike">
+              <a:solidFill>
+                <a:srgbClr val="000000"/>
+              </a:solidFill>
+              <a:latin typeface="Arial"/>
+              <a:ea typeface="Arial"/>
+              <a:cs typeface="Arial"/>
+              <a:sym typeface="Arial"/>
+            </a:endParaRPr>
           </a:p>
         </p:txBody>
       </p:sp>
@@ -20843,6 +22624,11 @@
               <a:spcAft>
                 <a:spcPts val="0"/>
               </a:spcAft>
+              <a:buClr>
+                <a:srgbClr val="000000"/>
+              </a:buClr>
+              <a:buSzPts val="1400"/>
+              <a:buFont typeface="Arial"/>
               <a:buNone/>
             </a:pPr>
             <a:r>
@@ -20895,6 +22681,11 @@
               <a:spcAft>
                 <a:spcPts val="0"/>
               </a:spcAft>
+              <a:buClr>
+                <a:srgbClr val="000000"/>
+              </a:buClr>
+              <a:buSzPts val="1100"/>
+              <a:buFont typeface="Arial"/>
               <a:buNone/>
             </a:pPr>
             <a:r>
@@ -20909,7 +22700,15 @@
               </a:rPr>
               <a:t>4</a:t>
             </a:r>
-            <a:endParaRPr/>
+            <a:endParaRPr b="0" i="0" sz="1400" u="none" cap="none" strike="noStrike">
+              <a:solidFill>
+                <a:srgbClr val="000000"/>
+              </a:solidFill>
+              <a:latin typeface="Arial"/>
+              <a:ea typeface="Arial"/>
+              <a:cs typeface="Arial"/>
+              <a:sym typeface="Arial"/>
+            </a:endParaRPr>
           </a:p>
         </p:txBody>
       </p:sp>
@@ -20959,6 +22758,11 @@
               <a:spcAft>
                 <a:spcPts val="0"/>
               </a:spcAft>
+              <a:buClr>
+                <a:srgbClr val="000000"/>
+              </a:buClr>
+              <a:buSzPts val="1400"/>
+              <a:buFont typeface="Arial"/>
               <a:buNone/>
             </a:pPr>
             <a:r>
@@ -21011,6 +22815,11 @@
               <a:spcAft>
                 <a:spcPts val="0"/>
               </a:spcAft>
+              <a:buClr>
+                <a:srgbClr val="000000"/>
+              </a:buClr>
+              <a:buSzPts val="1400"/>
+              <a:buFont typeface="Arial"/>
               <a:buNone/>
             </a:pPr>
             <a:r>
@@ -21025,7 +22834,15 @@
               </a:rPr>
               <a:t>Mês 7+</a:t>
             </a:r>
-            <a:endParaRPr/>
+            <a:endParaRPr b="0" i="0" sz="1400" u="none" cap="none" strike="noStrike">
+              <a:solidFill>
+                <a:srgbClr val="000000"/>
+              </a:solidFill>
+              <a:latin typeface="Arial"/>
+              <a:ea typeface="Arial"/>
+              <a:cs typeface="Arial"/>
+              <a:sym typeface="Arial"/>
+            </a:endParaRPr>
           </a:p>
         </p:txBody>
       </p:sp>
@@ -21064,6 +22881,11 @@
               <a:spcAft>
                 <a:spcPts val="0"/>
               </a:spcAft>
+              <a:buClr>
+                <a:srgbClr val="000000"/>
+              </a:buClr>
+              <a:buSzPts val="1100"/>
+              <a:buFont typeface="Arial"/>
               <a:buNone/>
             </a:pPr>
             <a:r>
@@ -21078,7 +22900,15 @@
               </a:rPr>
               <a:t>Maturidade</a:t>
             </a:r>
-            <a:endParaRPr/>
+            <a:endParaRPr b="0" i="0" sz="1400" u="none" cap="none" strike="noStrike">
+              <a:solidFill>
+                <a:srgbClr val="000000"/>
+              </a:solidFill>
+              <a:latin typeface="Arial"/>
+              <a:ea typeface="Arial"/>
+              <a:cs typeface="Arial"/>
+              <a:sym typeface="Arial"/>
+            </a:endParaRPr>
           </a:p>
         </p:txBody>
       </p:sp>
@@ -21117,6 +22947,11 @@
               <a:spcAft>
                 <a:spcPts val="0"/>
               </a:spcAft>
+              <a:buClr>
+                <a:srgbClr val="000000"/>
+              </a:buClr>
+              <a:buSzPts val="1200"/>
+              <a:buFont typeface="Arial"/>
               <a:buNone/>
             </a:pPr>
             <a:r>
@@ -21131,7 +22966,15 @@
               </a:rPr>
               <a:t>Métricas de aderência</a:t>
             </a:r>
-            <a:endParaRPr/>
+            <a:endParaRPr b="0" i="0" sz="1400" u="none" cap="none" strike="noStrike">
+              <a:solidFill>
+                <a:srgbClr val="000000"/>
+              </a:solidFill>
+              <a:latin typeface="Arial"/>
+              <a:ea typeface="Arial"/>
+              <a:cs typeface="Arial"/>
+              <a:sym typeface="Arial"/>
+            </a:endParaRPr>
           </a:p>
           <a:p>
             <a:pPr indent="0" lvl="0" marL="0" marR="0" rtl="0" algn="l">
@@ -21144,6 +22987,11 @@
               <a:spcAft>
                 <a:spcPts val="0"/>
               </a:spcAft>
+              <a:buClr>
+                <a:srgbClr val="000000"/>
+              </a:buClr>
+              <a:buSzPts val="1200"/>
+              <a:buFont typeface="Arial"/>
               <a:buNone/>
             </a:pPr>
             <a:r>
@@ -21170,6 +23018,11 @@
               <a:spcAft>
                 <a:spcPts val="0"/>
               </a:spcAft>
+              <a:buClr>
+                <a:srgbClr val="000000"/>
+              </a:buClr>
+              <a:buSzPts val="1200"/>
+              <a:buFont typeface="Arial"/>
               <a:buNone/>
             </a:pPr>
             <a:r>
@@ -21184,7 +23037,15 @@
               </a:rPr>
               <a:t>Revisão do radar</a:t>
             </a:r>
-            <a:endParaRPr/>
+            <a:endParaRPr b="0" i="0" sz="1400" u="none" cap="none" strike="noStrike">
+              <a:solidFill>
+                <a:srgbClr val="000000"/>
+              </a:solidFill>
+              <a:latin typeface="Arial"/>
+              <a:ea typeface="Arial"/>
+              <a:cs typeface="Arial"/>
+              <a:sym typeface="Arial"/>
+            </a:endParaRPr>
           </a:p>
           <a:p>
             <a:pPr indent="0" lvl="0" marL="0" marR="0" rtl="0" algn="l">
@@ -21197,6 +23058,11 @@
               <a:spcAft>
                 <a:spcPts val="0"/>
               </a:spcAft>
+              <a:buClr>
+                <a:srgbClr val="000000"/>
+              </a:buClr>
+              <a:buSzPts val="1200"/>
+              <a:buFont typeface="Arial"/>
               <a:buNone/>
             </a:pPr>
             <a:r>
@@ -21223,6 +23089,11 @@
               <a:spcAft>
                 <a:spcPts val="0"/>
               </a:spcAft>
+              <a:buClr>
+                <a:srgbClr val="000000"/>
+              </a:buClr>
+              <a:buSzPts val="1200"/>
+              <a:buFont typeface="Arial"/>
               <a:buNone/>
             </a:pPr>
             <a:r>
@@ -21237,7 +23108,15 @@
               </a:rPr>
               <a:t>Retrospectiva e</a:t>
             </a:r>
-            <a:endParaRPr/>
+            <a:endParaRPr b="0" i="0" sz="1400" u="none" cap="none" strike="noStrike">
+              <a:solidFill>
+                <a:srgbClr val="000000"/>
+              </a:solidFill>
+              <a:latin typeface="Arial"/>
+              <a:ea typeface="Arial"/>
+              <a:cs typeface="Arial"/>
+              <a:sym typeface="Arial"/>
+            </a:endParaRPr>
           </a:p>
           <a:p>
             <a:pPr indent="0" lvl="0" marL="0" marR="0" rtl="0" algn="l">
@@ -21250,6 +23129,11 @@
               <a:spcAft>
                 <a:spcPts val="0"/>
               </a:spcAft>
+              <a:buClr>
+                <a:srgbClr val="000000"/>
+              </a:buClr>
+              <a:buSzPts val="1200"/>
+              <a:buFont typeface="Arial"/>
               <a:buNone/>
             </a:pPr>
             <a:r>
@@ -21264,7 +23148,15 @@
               </a:rPr>
               <a:t>ajustes contínuos</a:t>
             </a:r>
-            <a:endParaRPr/>
+            <a:endParaRPr b="0" i="0" sz="1400" u="none" cap="none" strike="noStrike">
+              <a:solidFill>
+                <a:srgbClr val="000000"/>
+              </a:solidFill>
+              <a:latin typeface="Arial"/>
+              <a:ea typeface="Arial"/>
+              <a:cs typeface="Arial"/>
+              <a:sym typeface="Arial"/>
+            </a:endParaRPr>
           </a:p>
         </p:txBody>
       </p:sp>
@@ -21463,6 +23355,11 @@
                 <a:spcAft>
                   <a:spcPts val="0"/>
                 </a:spcAft>
+                <a:buClr>
+                  <a:srgbClr val="000000"/>
+                </a:buClr>
+                <a:buSzPts val="1400"/>
+                <a:buFont typeface="Arial"/>
                 <a:buNone/>
               </a:pPr>
               <a:r>
@@ -21665,6 +23562,11 @@
                 <a:spcAft>
                   <a:spcPts val="0"/>
                 </a:spcAft>
+                <a:buClr>
+                  <a:srgbClr val="000000"/>
+                </a:buClr>
+                <a:buSzPts val="1400"/>
+                <a:buFont typeface="Arial"/>
                 <a:buNone/>
               </a:pPr>
               <a:r>
@@ -21867,6 +23769,11 @@
                 <a:spcAft>
                   <a:spcPts val="0"/>
                 </a:spcAft>
+                <a:buClr>
+                  <a:srgbClr val="000000"/>
+                </a:buClr>
+                <a:buSzPts val="1400"/>
+                <a:buFont typeface="Arial"/>
                 <a:buNone/>
               </a:pPr>
               <a:r>
@@ -22069,6 +23976,11 @@
                 <a:spcAft>
                   <a:spcPts val="0"/>
                 </a:spcAft>
+                <a:buClr>
+                  <a:srgbClr val="000000"/>
+                </a:buClr>
+                <a:buSzPts val="1400"/>
+                <a:buFont typeface="Arial"/>
                 <a:buNone/>
               </a:pPr>
               <a:r>
@@ -22271,6 +24183,11 @@
                 <a:spcAft>
                   <a:spcPts val="0"/>
                 </a:spcAft>
+                <a:buClr>
+                  <a:srgbClr val="000000"/>
+                </a:buClr>
+                <a:buSzPts val="1400"/>
+                <a:buFont typeface="Arial"/>
                 <a:buNone/>
               </a:pPr>
               <a:r>
@@ -22473,6 +24390,11 @@
                 <a:spcAft>
                   <a:spcPts val="0"/>
                 </a:spcAft>
+                <a:buClr>
+                  <a:srgbClr val="000000"/>
+                </a:buClr>
+                <a:buSzPts val="1400"/>
+                <a:buFont typeface="Arial"/>
                 <a:buNone/>
               </a:pPr>
               <a:r>
@@ -22595,6 +24517,11 @@
                 <a:spcAft>
                   <a:spcPts val="0"/>
                 </a:spcAft>
+                <a:buClr>
+                  <a:srgbClr val="000000"/>
+                </a:buClr>
+                <a:buSzPts val="1400"/>
+                <a:buFont typeface="Arial"/>
                 <a:buNone/>
               </a:pPr>
               <a:r>
@@ -22648,6 +24575,11 @@
               <a:spcAft>
                 <a:spcPts val="0"/>
               </a:spcAft>
+              <a:buClr>
+                <a:srgbClr val="000000"/>
+              </a:buClr>
+              <a:buSzPts val="4400"/>
+              <a:buFont typeface="Arial"/>
               <a:buNone/>
             </a:pPr>
             <a:r>
@@ -22662,7 +24594,15 @@
               </a:rPr>
               <a:t>Agenda</a:t>
             </a:r>
-            <a:endParaRPr/>
+            <a:endParaRPr b="0" i="0" sz="1400" u="none" cap="none" strike="noStrike">
+              <a:solidFill>
+                <a:srgbClr val="000000"/>
+              </a:solidFill>
+              <a:latin typeface="Arial"/>
+              <a:ea typeface="Arial"/>
+              <a:cs typeface="Arial"/>
+              <a:sym typeface="Arial"/>
+            </a:endParaRPr>
           </a:p>
         </p:txBody>
       </p:sp>
@@ -22710,6 +24650,11 @@
               <a:spcAft>
                 <a:spcPts val="0"/>
               </a:spcAft>
+              <a:buClr>
+                <a:srgbClr val="000000"/>
+              </a:buClr>
+              <a:buSzPts val="1400"/>
+              <a:buFont typeface="Arial"/>
               <a:buNone/>
             </a:pPr>
             <a:r>
@@ -22762,6 +24707,11 @@
               <a:spcAft>
                 <a:spcPts val="0"/>
               </a:spcAft>
+              <a:buClr>
+                <a:srgbClr val="000000"/>
+              </a:buClr>
+              <a:buSzPts val="1100"/>
+              <a:buFont typeface="Arial"/>
               <a:buNone/>
             </a:pPr>
             <a:r>
@@ -22776,7 +24726,15 @@
               </a:rPr>
               <a:t>1</a:t>
             </a:r>
-            <a:endParaRPr/>
+            <a:endParaRPr b="0" i="0" sz="1400" u="none" cap="none" strike="noStrike">
+              <a:solidFill>
+                <a:srgbClr val="000000"/>
+              </a:solidFill>
+              <a:latin typeface="Arial"/>
+              <a:ea typeface="Arial"/>
+              <a:cs typeface="Arial"/>
+              <a:sym typeface="Arial"/>
+            </a:endParaRPr>
           </a:p>
         </p:txBody>
       </p:sp>
@@ -22815,6 +24773,11 @@
               <a:spcAft>
                 <a:spcPts val="0"/>
               </a:spcAft>
+              <a:buClr>
+                <a:srgbClr val="000000"/>
+              </a:buClr>
+              <a:buSzPts val="1700"/>
+              <a:buFont typeface="Arial"/>
               <a:buNone/>
             </a:pPr>
             <a:r>
@@ -22829,7 +24792,15 @@
               </a:rPr>
               <a:t>Novo Comitê de Arquitetura</a:t>
             </a:r>
-            <a:endParaRPr/>
+            <a:endParaRPr b="0" i="0" sz="1400" u="none" cap="none" strike="noStrike">
+              <a:solidFill>
+                <a:srgbClr val="000000"/>
+              </a:solidFill>
+              <a:latin typeface="Arial"/>
+              <a:ea typeface="Arial"/>
+              <a:cs typeface="Arial"/>
+              <a:sym typeface="Arial"/>
+            </a:endParaRPr>
           </a:p>
         </p:txBody>
       </p:sp>
@@ -22877,6 +24848,11 @@
               <a:spcAft>
                 <a:spcPts val="0"/>
               </a:spcAft>
+              <a:buClr>
+                <a:srgbClr val="000000"/>
+              </a:buClr>
+              <a:buSzPts val="1400"/>
+              <a:buFont typeface="Arial"/>
               <a:buNone/>
             </a:pPr>
             <a:r>
@@ -22929,6 +24905,11 @@
               <a:spcAft>
                 <a:spcPts val="0"/>
               </a:spcAft>
+              <a:buClr>
+                <a:srgbClr val="000000"/>
+              </a:buClr>
+              <a:buSzPts val="1100"/>
+              <a:buFont typeface="Arial"/>
               <a:buNone/>
             </a:pPr>
             <a:r>
@@ -22943,7 +24924,15 @@
               </a:rPr>
               <a:t>2</a:t>
             </a:r>
-            <a:endParaRPr/>
+            <a:endParaRPr b="0" i="0" sz="1400" u="none" cap="none" strike="noStrike">
+              <a:solidFill>
+                <a:srgbClr val="000000"/>
+              </a:solidFill>
+              <a:latin typeface="Arial"/>
+              <a:ea typeface="Arial"/>
+              <a:cs typeface="Arial"/>
+              <a:sym typeface="Arial"/>
+            </a:endParaRPr>
           </a:p>
         </p:txBody>
       </p:sp>
@@ -22982,6 +24971,11 @@
               <a:spcAft>
                 <a:spcPts val="0"/>
               </a:spcAft>
+              <a:buClr>
+                <a:srgbClr val="000000"/>
+              </a:buClr>
+              <a:buSzPts val="1700"/>
+              <a:buFont typeface="Arial"/>
               <a:buNone/>
             </a:pPr>
             <a:r>
@@ -22996,7 +24990,15 @@
               </a:rPr>
               <a:t>Padronização de Stacks</a:t>
             </a:r>
-            <a:endParaRPr/>
+            <a:endParaRPr b="0" i="0" sz="1400" u="none" cap="none" strike="noStrike">
+              <a:solidFill>
+                <a:srgbClr val="000000"/>
+              </a:solidFill>
+              <a:latin typeface="Arial"/>
+              <a:ea typeface="Arial"/>
+              <a:cs typeface="Arial"/>
+              <a:sym typeface="Arial"/>
+            </a:endParaRPr>
           </a:p>
         </p:txBody>
       </p:sp>
@@ -23044,6 +25046,11 @@
               <a:spcAft>
                 <a:spcPts val="0"/>
               </a:spcAft>
+              <a:buClr>
+                <a:srgbClr val="000000"/>
+              </a:buClr>
+              <a:buSzPts val="1400"/>
+              <a:buFont typeface="Arial"/>
               <a:buNone/>
             </a:pPr>
             <a:r>
@@ -23096,6 +25103,11 @@
               <a:spcAft>
                 <a:spcPts val="0"/>
               </a:spcAft>
+              <a:buClr>
+                <a:srgbClr val="000000"/>
+              </a:buClr>
+              <a:buSzPts val="1100"/>
+              <a:buFont typeface="Arial"/>
               <a:buNone/>
             </a:pPr>
             <a:r>
@@ -23110,7 +25122,15 @@
               </a:rPr>
               <a:t>3</a:t>
             </a:r>
-            <a:endParaRPr/>
+            <a:endParaRPr b="0" i="0" sz="1400" u="none" cap="none" strike="noStrike">
+              <a:solidFill>
+                <a:srgbClr val="000000"/>
+              </a:solidFill>
+              <a:latin typeface="Arial"/>
+              <a:ea typeface="Arial"/>
+              <a:cs typeface="Arial"/>
+              <a:sym typeface="Arial"/>
+            </a:endParaRPr>
           </a:p>
         </p:txBody>
       </p:sp>
@@ -23149,6 +25169,11 @@
               <a:spcAft>
                 <a:spcPts val="0"/>
               </a:spcAft>
+              <a:buClr>
+                <a:srgbClr val="000000"/>
+              </a:buClr>
+              <a:buSzPts val="1700"/>
+              <a:buFont typeface="Arial"/>
               <a:buNone/>
             </a:pPr>
             <a:r>
@@ -23163,7 +25188,15 @@
               </a:rPr>
               <a:t>Decisões Arquiteturais (ADR)</a:t>
             </a:r>
-            <a:endParaRPr/>
+            <a:endParaRPr b="0" i="0" sz="1400" u="none" cap="none" strike="noStrike">
+              <a:solidFill>
+                <a:srgbClr val="000000"/>
+              </a:solidFill>
+              <a:latin typeface="Arial"/>
+              <a:ea typeface="Arial"/>
+              <a:cs typeface="Arial"/>
+              <a:sym typeface="Arial"/>
+            </a:endParaRPr>
           </a:p>
         </p:txBody>
       </p:sp>
@@ -23211,6 +25244,11 @@
               <a:spcAft>
                 <a:spcPts val="0"/>
               </a:spcAft>
+              <a:buClr>
+                <a:srgbClr val="000000"/>
+              </a:buClr>
+              <a:buSzPts val="1400"/>
+              <a:buFont typeface="Arial"/>
               <a:buNone/>
             </a:pPr>
             <a:r>
@@ -23263,6 +25301,11 @@
               <a:spcAft>
                 <a:spcPts val="0"/>
               </a:spcAft>
+              <a:buClr>
+                <a:srgbClr val="000000"/>
+              </a:buClr>
+              <a:buSzPts val="1100"/>
+              <a:buFont typeface="Arial"/>
               <a:buNone/>
             </a:pPr>
             <a:r>
@@ -23277,7 +25320,15 @@
               </a:rPr>
               <a:t>4</a:t>
             </a:r>
-            <a:endParaRPr/>
+            <a:endParaRPr b="0" i="0" sz="1400" u="none" cap="none" strike="noStrike">
+              <a:solidFill>
+                <a:srgbClr val="000000"/>
+              </a:solidFill>
+              <a:latin typeface="Arial"/>
+              <a:ea typeface="Arial"/>
+              <a:cs typeface="Arial"/>
+              <a:sym typeface="Arial"/>
+            </a:endParaRPr>
           </a:p>
         </p:txBody>
       </p:sp>
@@ -23316,6 +25367,11 @@
               <a:spcAft>
                 <a:spcPts val="0"/>
               </a:spcAft>
+              <a:buClr>
+                <a:srgbClr val="000000"/>
+              </a:buClr>
+              <a:buSzPts val="1700"/>
+              <a:buFont typeface="Arial"/>
               <a:buNone/>
             </a:pPr>
             <a:r>
@@ -23330,7 +25386,15 @@
               </a:rPr>
               <a:t>Auditoria de Aplicações</a:t>
             </a:r>
-            <a:endParaRPr/>
+            <a:endParaRPr b="0" i="0" sz="1400" u="none" cap="none" strike="noStrike">
+              <a:solidFill>
+                <a:srgbClr val="000000"/>
+              </a:solidFill>
+              <a:latin typeface="Arial"/>
+              <a:ea typeface="Arial"/>
+              <a:cs typeface="Arial"/>
+              <a:sym typeface="Arial"/>
+            </a:endParaRPr>
           </a:p>
         </p:txBody>
       </p:sp>
@@ -23378,6 +25442,11 @@
               <a:spcAft>
                 <a:spcPts val="0"/>
               </a:spcAft>
+              <a:buClr>
+                <a:srgbClr val="000000"/>
+              </a:buClr>
+              <a:buSzPts val="1400"/>
+              <a:buFont typeface="Arial"/>
               <a:buNone/>
             </a:pPr>
             <a:r>
@@ -23430,6 +25499,11 @@
               <a:spcAft>
                 <a:spcPts val="0"/>
               </a:spcAft>
+              <a:buClr>
+                <a:srgbClr val="000000"/>
+              </a:buClr>
+              <a:buSzPts val="1100"/>
+              <a:buFont typeface="Arial"/>
               <a:buNone/>
             </a:pPr>
             <a:r>
@@ -23444,7 +25518,15 @@
               </a:rPr>
               <a:t>5</a:t>
             </a:r>
-            <a:endParaRPr/>
+            <a:endParaRPr b="0" i="0" sz="1400" u="none" cap="none" strike="noStrike">
+              <a:solidFill>
+                <a:srgbClr val="000000"/>
+              </a:solidFill>
+              <a:latin typeface="Arial"/>
+              <a:ea typeface="Arial"/>
+              <a:cs typeface="Arial"/>
+              <a:sym typeface="Arial"/>
+            </a:endParaRPr>
           </a:p>
         </p:txBody>
       </p:sp>
@@ -23483,6 +25565,11 @@
               <a:spcAft>
                 <a:spcPts val="0"/>
               </a:spcAft>
+              <a:buClr>
+                <a:srgbClr val="000000"/>
+              </a:buClr>
+              <a:buSzPts val="1700"/>
+              <a:buFont typeface="Arial"/>
               <a:buNone/>
             </a:pPr>
             <a:r>
@@ -23497,7 +25584,15 @@
               </a:rPr>
               <a:t>Participação do Time</a:t>
             </a:r>
-            <a:endParaRPr/>
+            <a:endParaRPr b="0" i="0" sz="1400" u="none" cap="none" strike="noStrike">
+              <a:solidFill>
+                <a:srgbClr val="000000"/>
+              </a:solidFill>
+              <a:latin typeface="Arial"/>
+              <a:ea typeface="Arial"/>
+              <a:cs typeface="Arial"/>
+              <a:sym typeface="Arial"/>
+            </a:endParaRPr>
           </a:p>
         </p:txBody>
       </p:sp>
@@ -23545,6 +25640,11 @@
               <a:spcAft>
                 <a:spcPts val="0"/>
               </a:spcAft>
+              <a:buClr>
+                <a:srgbClr val="000000"/>
+              </a:buClr>
+              <a:buSzPts val="1400"/>
+              <a:buFont typeface="Arial"/>
               <a:buNone/>
             </a:pPr>
             <a:r>
@@ -23597,6 +25697,11 @@
               <a:spcAft>
                 <a:spcPts val="0"/>
               </a:spcAft>
+              <a:buClr>
+                <a:srgbClr val="000000"/>
+              </a:buClr>
+              <a:buSzPts val="1100"/>
+              <a:buFont typeface="Arial"/>
               <a:buNone/>
             </a:pPr>
             <a:r>
@@ -23611,7 +25716,15 @@
               </a:rPr>
               <a:t>6</a:t>
             </a:r>
-            <a:endParaRPr/>
+            <a:endParaRPr b="0" i="0" sz="1400" u="none" cap="none" strike="noStrike">
+              <a:solidFill>
+                <a:srgbClr val="000000"/>
+              </a:solidFill>
+              <a:latin typeface="Arial"/>
+              <a:ea typeface="Arial"/>
+              <a:cs typeface="Arial"/>
+              <a:sym typeface="Arial"/>
+            </a:endParaRPr>
           </a:p>
         </p:txBody>
       </p:sp>
@@ -23650,6 +25763,11 @@
               <a:spcAft>
                 <a:spcPts val="0"/>
               </a:spcAft>
+              <a:buClr>
+                <a:srgbClr val="000000"/>
+              </a:buClr>
+              <a:buSzPts val="1700"/>
+              <a:buFont typeface="Arial"/>
               <a:buNone/>
             </a:pPr>
             <a:r>
@@ -23664,7 +25782,15 @@
               </a:rPr>
               <a:t>Gestão de Débitos Técnicos</a:t>
             </a:r>
-            <a:endParaRPr/>
+            <a:endParaRPr b="0" i="0" sz="1400" u="none" cap="none" strike="noStrike">
+              <a:solidFill>
+                <a:srgbClr val="000000"/>
+              </a:solidFill>
+              <a:latin typeface="Arial"/>
+              <a:ea typeface="Arial"/>
+              <a:cs typeface="Arial"/>
+              <a:sym typeface="Arial"/>
+            </a:endParaRPr>
           </a:p>
         </p:txBody>
       </p:sp>
@@ -23712,6 +25838,11 @@
               <a:spcAft>
                 <a:spcPts val="0"/>
               </a:spcAft>
+              <a:buClr>
+                <a:srgbClr val="000000"/>
+              </a:buClr>
+              <a:buSzPts val="1400"/>
+              <a:buFont typeface="Arial"/>
               <a:buNone/>
             </a:pPr>
             <a:r>
@@ -23764,6 +25895,11 @@
               <a:spcAft>
                 <a:spcPts val="0"/>
               </a:spcAft>
+              <a:buClr>
+                <a:srgbClr val="000000"/>
+              </a:buClr>
+              <a:buSzPts val="1100"/>
+              <a:buFont typeface="Arial"/>
               <a:buNone/>
             </a:pPr>
             <a:r>
@@ -23778,7 +25914,15 @@
               </a:rPr>
               <a:t>7</a:t>
             </a:r>
-            <a:endParaRPr/>
+            <a:endParaRPr b="0" i="0" sz="1400" u="none" cap="none" strike="noStrike">
+              <a:solidFill>
+                <a:srgbClr val="000000"/>
+              </a:solidFill>
+              <a:latin typeface="Arial"/>
+              <a:ea typeface="Arial"/>
+              <a:cs typeface="Arial"/>
+              <a:sym typeface="Arial"/>
+            </a:endParaRPr>
           </a:p>
         </p:txBody>
       </p:sp>
@@ -23817,6 +25961,11 @@
               <a:spcAft>
                 <a:spcPts val="0"/>
               </a:spcAft>
+              <a:buClr>
+                <a:srgbClr val="000000"/>
+              </a:buClr>
+              <a:buSzPts val="1700"/>
+              <a:buFont typeface="Arial"/>
               <a:buNone/>
             </a:pPr>
             <a:r>
@@ -23831,7 +25980,15 @@
               </a:rPr>
               <a:t>Canal de Comunicação</a:t>
             </a:r>
-            <a:endParaRPr/>
+            <a:endParaRPr b="0" i="0" sz="1400" u="none" cap="none" strike="noStrike">
+              <a:solidFill>
+                <a:srgbClr val="000000"/>
+              </a:solidFill>
+              <a:latin typeface="Arial"/>
+              <a:ea typeface="Arial"/>
+              <a:cs typeface="Arial"/>
+              <a:sym typeface="Arial"/>
+            </a:endParaRPr>
           </a:p>
         </p:txBody>
       </p:sp>
@@ -23914,6 +26071,11 @@
               <a:spcAft>
                 <a:spcPts val="0"/>
               </a:spcAft>
+              <a:buClr>
+                <a:srgbClr val="000000"/>
+              </a:buClr>
+              <a:buSzPts val="4400"/>
+              <a:buFont typeface="Arial"/>
               <a:buNone/>
             </a:pPr>
             <a:r>
@@ -24115,6 +26277,11 @@
                 <a:spcAft>
                   <a:spcPts val="0"/>
                 </a:spcAft>
+                <a:buClr>
+                  <a:srgbClr val="000000"/>
+                </a:buClr>
+                <a:buSzPts val="1400"/>
+                <a:buFont typeface="Arial"/>
                 <a:buNone/>
               </a:pPr>
               <a:r>
@@ -24317,6 +26484,11 @@
                 <a:spcAft>
                   <a:spcPts val="0"/>
                 </a:spcAft>
+                <a:buClr>
+                  <a:srgbClr val="000000"/>
+                </a:buClr>
+                <a:buSzPts val="1400"/>
+                <a:buFont typeface="Arial"/>
                 <a:buNone/>
               </a:pPr>
               <a:r>
@@ -24519,6 +26691,11 @@
                 <a:spcAft>
                   <a:spcPts val="0"/>
                 </a:spcAft>
+                <a:buClr>
+                  <a:srgbClr val="000000"/>
+                </a:buClr>
+                <a:buSzPts val="1400"/>
+                <a:buFont typeface="Arial"/>
                 <a:buNone/>
               </a:pPr>
               <a:r>
@@ -24721,6 +26898,11 @@
                 <a:spcAft>
                   <a:spcPts val="0"/>
                 </a:spcAft>
+                <a:buClr>
+                  <a:srgbClr val="000000"/>
+                </a:buClr>
+                <a:buSzPts val="1400"/>
+                <a:buFont typeface="Arial"/>
                 <a:buNone/>
               </a:pPr>
               <a:r>
@@ -24923,6 +27105,11 @@
                 <a:spcAft>
                   <a:spcPts val="0"/>
                 </a:spcAft>
+                <a:buClr>
+                  <a:srgbClr val="000000"/>
+                </a:buClr>
+                <a:buSzPts val="1400"/>
+                <a:buFont typeface="Arial"/>
                 <a:buNone/>
               </a:pPr>
               <a:r>
@@ -25125,6 +27312,11 @@
                 <a:spcAft>
                   <a:spcPts val="0"/>
                 </a:spcAft>
+                <a:buClr>
+                  <a:srgbClr val="000000"/>
+                </a:buClr>
+                <a:buSzPts val="1400"/>
+                <a:buFont typeface="Arial"/>
                 <a:buNone/>
               </a:pPr>
               <a:r>
@@ -25247,6 +27439,11 @@
                 <a:spcAft>
                   <a:spcPts val="0"/>
                 </a:spcAft>
+                <a:buClr>
+                  <a:srgbClr val="000000"/>
+                </a:buClr>
+                <a:buSzPts val="1400"/>
+                <a:buFont typeface="Arial"/>
                 <a:buNone/>
               </a:pPr>
               <a:r>
@@ -25423,6 +27620,11 @@
               <a:spcAft>
                 <a:spcPts val="0"/>
               </a:spcAft>
+              <a:buClr>
+                <a:srgbClr val="000000"/>
+              </a:buClr>
+              <a:buSzPts val="3600"/>
+              <a:buFont typeface="Arial"/>
               <a:buNone/>
             </a:pPr>
             <a:r>
@@ -25437,7 +27639,15 @@
               </a:rPr>
               <a:t>Novo Comitê de Arquitetura TECHFIN</a:t>
             </a:r>
-            <a:endParaRPr/>
+            <a:endParaRPr b="0" i="0" sz="1400" u="none" cap="none" strike="noStrike">
+              <a:solidFill>
+                <a:srgbClr val="000000"/>
+              </a:solidFill>
+              <a:latin typeface="Arial"/>
+              <a:ea typeface="Arial"/>
+              <a:cs typeface="Arial"/>
+              <a:sym typeface="Arial"/>
+            </a:endParaRPr>
           </a:p>
           <a:p>
             <a:pPr indent="0" lvl="0" marL="0" marR="0" rtl="0" algn="l">
@@ -25825,6 +28035,11 @@
               <a:spcAft>
                 <a:spcPts val="0"/>
               </a:spcAft>
+              <a:buClr>
+                <a:srgbClr val="000000"/>
+              </a:buClr>
+              <a:buSzPts val="1400"/>
+              <a:buFont typeface="Arial"/>
               <a:buNone/>
             </a:pPr>
             <a:r>
@@ -25851,6 +28066,11 @@
               <a:spcAft>
                 <a:spcPts val="0"/>
               </a:spcAft>
+              <a:buClr>
+                <a:srgbClr val="000000"/>
+              </a:buClr>
+              <a:buSzPts val="1400"/>
+              <a:buFont typeface="Arial"/>
               <a:buNone/>
             </a:pPr>
             <a:r>
@@ -25865,7 +28085,15 @@
               </a:rPr>
               <a:t>Dinâmica:</a:t>
             </a:r>
-            <a:endParaRPr/>
+            <a:endParaRPr b="0" i="0" sz="1400" u="none" cap="none" strike="noStrike">
+              <a:solidFill>
+                <a:srgbClr val="000000"/>
+              </a:solidFill>
+              <a:latin typeface="Arial"/>
+              <a:ea typeface="Arial"/>
+              <a:cs typeface="Arial"/>
+              <a:sym typeface="Arial"/>
+            </a:endParaRPr>
           </a:p>
           <a:p>
             <a:pPr indent="0" lvl="0" marL="0" marR="0" rtl="0" algn="l">
@@ -25878,6 +28106,11 @@
               <a:spcAft>
                 <a:spcPts val="0"/>
               </a:spcAft>
+              <a:buClr>
+                <a:srgbClr val="000000"/>
+              </a:buClr>
+              <a:buSzPts val="1400"/>
+              <a:buFont typeface="Arial"/>
               <a:buNone/>
             </a:pPr>
             <a:r>
@@ -25892,7 +28125,15 @@
               </a:rPr>
               <a:t>• Reuniões quinzenais com pauta estruturada</a:t>
             </a:r>
-            <a:endParaRPr/>
+            <a:endParaRPr b="0" i="0" sz="1400" u="none" cap="none" strike="noStrike">
+              <a:solidFill>
+                <a:srgbClr val="000000"/>
+              </a:solidFill>
+              <a:latin typeface="Arial"/>
+              <a:ea typeface="Arial"/>
+              <a:cs typeface="Arial"/>
+              <a:sym typeface="Arial"/>
+            </a:endParaRPr>
           </a:p>
           <a:p>
             <a:pPr indent="0" lvl="0" marL="0" marR="0" rtl="0" algn="l">
@@ -25905,6 +28146,11 @@
               <a:spcAft>
                 <a:spcPts val="0"/>
               </a:spcAft>
+              <a:buClr>
+                <a:srgbClr val="000000"/>
+              </a:buClr>
+              <a:buSzPts val="1400"/>
+              <a:buFont typeface="Arial"/>
               <a:buNone/>
             </a:pPr>
             <a:r>
@@ -25917,9 +28163,33 @@
                 <a:cs typeface="Arial"/>
                 <a:sym typeface="Arial"/>
               </a:rPr>
-              <a:t>• Participação de Tech Leads e Arquitetos</a:t>
+              <a:t>• Participação de Lideran</a:t>
             </a:r>
-            <a:endParaRPr/>
+            <a:r>
+              <a:rPr lang="en-US"/>
+              <a:t>ças </a:t>
+            </a:r>
+            <a:r>
+              <a:rPr b="0" i="0" lang="en-US" sz="1400" u="none" cap="none" strike="noStrike">
+                <a:solidFill>
+                  <a:srgbClr val="000000"/>
+                </a:solidFill>
+                <a:latin typeface="Arial"/>
+                <a:ea typeface="Arial"/>
+                <a:cs typeface="Arial"/>
+                <a:sym typeface="Arial"/>
+              </a:rPr>
+              <a:t>Tech e Arquitetos</a:t>
+            </a:r>
+            <a:endParaRPr b="0" i="0" sz="1400" u="none" cap="none" strike="noStrike">
+              <a:solidFill>
+                <a:srgbClr val="000000"/>
+              </a:solidFill>
+              <a:latin typeface="Arial"/>
+              <a:ea typeface="Arial"/>
+              <a:cs typeface="Arial"/>
+              <a:sym typeface="Arial"/>
+            </a:endParaRPr>
           </a:p>
           <a:p>
             <a:pPr indent="0" lvl="0" marL="0" marR="0" rtl="0" algn="l">
@@ -25932,6 +28202,11 @@
               <a:spcAft>
                 <a:spcPts val="0"/>
               </a:spcAft>
+              <a:buClr>
+                <a:srgbClr val="000000"/>
+              </a:buClr>
+              <a:buSzPts val="1400"/>
+              <a:buFont typeface="Arial"/>
               <a:buNone/>
             </a:pPr>
             <a:r>
@@ -25946,7 +28221,15 @@
               </a:rPr>
               <a:t>• Publicação de atas no Confluence</a:t>
             </a:r>
-            <a:endParaRPr/>
+            <a:endParaRPr b="0" i="0" sz="1400" u="none" cap="none" strike="noStrike">
+              <a:solidFill>
+                <a:srgbClr val="000000"/>
+              </a:solidFill>
+              <a:latin typeface="Arial"/>
+              <a:ea typeface="Arial"/>
+              <a:cs typeface="Arial"/>
+              <a:sym typeface="Arial"/>
+            </a:endParaRPr>
           </a:p>
           <a:p>
             <a:pPr indent="0" lvl="0" marL="0" marR="0" rtl="0" algn="l">
@@ -25959,6 +28242,11 @@
               <a:spcAft>
                 <a:spcPts val="0"/>
               </a:spcAft>
+              <a:buClr>
+                <a:srgbClr val="000000"/>
+              </a:buClr>
+              <a:buSzPts val="1400"/>
+              <a:buFont typeface="Arial"/>
               <a:buNone/>
             </a:pPr>
             <a:r>
@@ -25973,7 +28261,15 @@
               </a:rPr>
               <a:t>• Escalation path para decisões críticas</a:t>
             </a:r>
-            <a:endParaRPr/>
+            <a:endParaRPr b="0" i="0" sz="1400" u="none" cap="none" strike="noStrike">
+              <a:solidFill>
+                <a:srgbClr val="000000"/>
+              </a:solidFill>
+              <a:latin typeface="Arial"/>
+              <a:ea typeface="Arial"/>
+              <a:cs typeface="Arial"/>
+              <a:sym typeface="Arial"/>
+            </a:endParaRPr>
           </a:p>
         </p:txBody>
       </p:sp>
@@ -26161,7 +28457,11 @@
                 <a:cs typeface="Arial"/>
                 <a:sym typeface="Arial"/>
               </a:rPr>
-              <a:t>• Votação de itens e decisões arquiteturais com líderes</a:t>
+              <a:t>• Votação de itens e decisões arquiteturais </a:t>
+            </a:r>
+            <a:r>
+              <a:rPr lang="en-US"/>
+              <a:t>por deliberação</a:t>
             </a:r>
             <a:endParaRPr b="0" i="0" sz="1400" u="none" cap="none" strike="noStrike">
               <a:solidFill>
@@ -26184,6 +28484,11 @@
               <a:spcAft>
                 <a:spcPts val="0"/>
               </a:spcAft>
+              <a:buClr>
+                <a:srgbClr val="000000"/>
+              </a:buClr>
+              <a:buSzPts val="1400"/>
+              <a:buFont typeface="Arial"/>
               <a:buNone/>
             </a:pPr>
             <a:r>
@@ -26198,7 +28503,15 @@
               </a:rPr>
               <a:t>• Ambiente seguro para dúvidas, sugestões e novas ideias</a:t>
             </a:r>
-            <a:endParaRPr/>
+            <a:endParaRPr b="0" i="0" sz="1400" u="none" cap="none" strike="noStrike">
+              <a:solidFill>
+                <a:srgbClr val="000000"/>
+              </a:solidFill>
+              <a:latin typeface="Arial"/>
+              <a:ea typeface="Arial"/>
+              <a:cs typeface="Arial"/>
+              <a:sym typeface="Arial"/>
+            </a:endParaRPr>
           </a:p>
           <a:p>
             <a:pPr indent="0" lvl="0" marL="0" marR="0" rtl="0" algn="l">
@@ -26211,6 +28524,11 @@
               <a:spcAft>
                 <a:spcPts val="0"/>
               </a:spcAft>
+              <a:buClr>
+                <a:srgbClr val="000000"/>
+              </a:buClr>
+              <a:buSzPts val="1400"/>
+              <a:buFont typeface="Arial"/>
               <a:buNone/>
             </a:pPr>
             <a:r>
@@ -26225,7 +28543,15 @@
               </a:rPr>
               <a:t>• Temas podem ser propostos pelos participantes previamente</a:t>
             </a:r>
-            <a:endParaRPr/>
+            <a:endParaRPr b="0" i="0" sz="1400" u="none" cap="none" strike="noStrike">
+              <a:solidFill>
+                <a:srgbClr val="000000"/>
+              </a:solidFill>
+              <a:latin typeface="Arial"/>
+              <a:ea typeface="Arial"/>
+              <a:cs typeface="Arial"/>
+              <a:sym typeface="Arial"/>
+            </a:endParaRPr>
           </a:p>
           <a:p>
             <a:pPr indent="0" lvl="0" marL="0" marR="0" rtl="0" algn="l">
@@ -26238,6 +28564,11 @@
               <a:spcAft>
                 <a:spcPts val="0"/>
               </a:spcAft>
+              <a:buClr>
+                <a:srgbClr val="000000"/>
+              </a:buClr>
+              <a:buSzPts val="1400"/>
+              <a:buFont typeface="Arial"/>
               <a:buNone/>
             </a:pPr>
             <a:r>
@@ -26252,7 +28583,15 @@
               </a:rPr>
               <a:t>• Registro e rastreabilidade de todas as decisões</a:t>
             </a:r>
-            <a:endParaRPr/>
+            <a:endParaRPr b="0" i="0" sz="1400" u="none" cap="none" strike="noStrike">
+              <a:solidFill>
+                <a:srgbClr val="000000"/>
+              </a:solidFill>
+              <a:latin typeface="Arial"/>
+              <a:ea typeface="Arial"/>
+              <a:cs typeface="Arial"/>
+              <a:sym typeface="Arial"/>
+            </a:endParaRPr>
           </a:p>
         </p:txBody>
       </p:sp>
@@ -26479,6 +28818,11 @@
               <a:spcAft>
                 <a:spcPts val="0"/>
               </a:spcAft>
+              <a:buClr>
+                <a:srgbClr val="000000"/>
+              </a:buClr>
+              <a:buSzPts val="1400"/>
+              <a:buFont typeface="Arial"/>
               <a:buNone/>
             </a:pPr>
             <a:r>
@@ -26493,7 +28837,15 @@
               </a:rPr>
               <a:t>• Duração: 1:30h</a:t>
             </a:r>
-            <a:endParaRPr/>
+            <a:endParaRPr b="0" i="0" sz="1400" u="none" cap="none" strike="noStrike">
+              <a:solidFill>
+                <a:srgbClr val="000000"/>
+              </a:solidFill>
+              <a:latin typeface="Arial"/>
+              <a:ea typeface="Arial"/>
+              <a:cs typeface="Arial"/>
+              <a:sym typeface="Arial"/>
+            </a:endParaRPr>
           </a:p>
           <a:p>
             <a:pPr indent="0" lvl="0" marL="0" marR="0" rtl="0" algn="l">
@@ -26506,6 +28858,11 @@
               <a:spcAft>
                 <a:spcPts val="0"/>
               </a:spcAft>
+              <a:buClr>
+                <a:srgbClr val="000000"/>
+              </a:buClr>
+              <a:buSzPts val="1400"/>
+              <a:buFont typeface="Arial"/>
               <a:buNone/>
             </a:pPr>
             <a:r>
@@ -26520,7 +28877,15 @@
               </a:rPr>
               <a:t>• Participantes: Arquitetos + Tech Leads</a:t>
             </a:r>
-            <a:endParaRPr/>
+            <a:endParaRPr b="0" i="0" sz="1400" u="none" cap="none" strike="noStrike">
+              <a:solidFill>
+                <a:srgbClr val="000000"/>
+              </a:solidFill>
+              <a:latin typeface="Arial"/>
+              <a:ea typeface="Arial"/>
+              <a:cs typeface="Arial"/>
+              <a:sym typeface="Arial"/>
+            </a:endParaRPr>
           </a:p>
           <a:p>
             <a:pPr indent="0" lvl="0" marL="0" marR="0" rtl="0" algn="l">
@@ -26533,6 +28898,11 @@
               <a:spcAft>
                 <a:spcPts val="0"/>
               </a:spcAft>
+              <a:buClr>
+                <a:srgbClr val="000000"/>
+              </a:buClr>
+              <a:buSzPts val="1400"/>
+              <a:buFont typeface="Arial"/>
               <a:buNone/>
             </a:pPr>
             <a:r>
@@ -26547,7 +28917,15 @@
               </a:rPr>
               <a:t>• Artefatos: Atas + ADRs</a:t>
             </a:r>
-            <a:endParaRPr/>
+            <a:endParaRPr b="0" i="0" sz="1400" u="none" cap="none" strike="noStrike">
+              <a:solidFill>
+                <a:srgbClr val="000000"/>
+              </a:solidFill>
+              <a:latin typeface="Arial"/>
+              <a:ea typeface="Arial"/>
+              <a:cs typeface="Arial"/>
+              <a:sym typeface="Arial"/>
+            </a:endParaRPr>
           </a:p>
         </p:txBody>
       </p:sp>
@@ -26758,6 +29136,11 @@
               <a:spcAft>
                 <a:spcPts val="0"/>
               </a:spcAft>
+              <a:buClr>
+                <a:srgbClr val="000000"/>
+              </a:buClr>
+              <a:buSzPts val="1400"/>
+              <a:buFont typeface="Arial"/>
               <a:buNone/>
             </a:pPr>
             <a:r>
@@ -26772,7 +29155,15 @@
               </a:rPr>
               <a:t>2. Temas Propostos: Discussão dos temas submetidos previamente</a:t>
             </a:r>
-            <a:endParaRPr/>
+            <a:endParaRPr b="0" i="0" sz="1400" u="none" cap="none" strike="noStrike">
+              <a:solidFill>
+                <a:srgbClr val="000000"/>
+              </a:solidFill>
+              <a:latin typeface="Arial"/>
+              <a:ea typeface="Arial"/>
+              <a:cs typeface="Arial"/>
+              <a:sym typeface="Arial"/>
+            </a:endParaRPr>
           </a:p>
           <a:p>
             <a:pPr indent="0" lvl="0" marL="0" marR="0" rtl="0" algn="l">
@@ -26785,6 +29176,11 @@
               <a:spcAft>
                 <a:spcPts val="0"/>
               </a:spcAft>
+              <a:buClr>
+                <a:srgbClr val="000000"/>
+              </a:buClr>
+              <a:buSzPts val="1400"/>
+              <a:buFont typeface="Arial"/>
               <a:buNone/>
             </a:pPr>
             <a:r>
@@ -26799,7 +29195,15 @@
               </a:rPr>
               <a:t>3. Deliberação: Votação de decisões com líderes técnicos</a:t>
             </a:r>
-            <a:endParaRPr/>
+            <a:endParaRPr b="0" i="0" sz="1400" u="none" cap="none" strike="noStrike">
+              <a:solidFill>
+                <a:srgbClr val="000000"/>
+              </a:solidFill>
+              <a:latin typeface="Arial"/>
+              <a:ea typeface="Arial"/>
+              <a:cs typeface="Arial"/>
+              <a:sym typeface="Arial"/>
+            </a:endParaRPr>
           </a:p>
           <a:p>
             <a:pPr indent="0" lvl="0" marL="0" marR="0" rtl="0" algn="l">
@@ -26812,6 +29216,11 @@
               <a:spcAft>
                 <a:spcPts val="0"/>
               </a:spcAft>
+              <a:buClr>
+                <a:srgbClr val="000000"/>
+              </a:buClr>
+              <a:buSzPts val="1400"/>
+              <a:buFont typeface="Arial"/>
               <a:buNone/>
             </a:pPr>
             <a:r>
@@ -26826,7 +29235,15 @@
               </a:rPr>
               <a:t>4. Encerramento: Registro de decisões e publicação da ata no Confluence</a:t>
             </a:r>
-            <a:endParaRPr/>
+            <a:endParaRPr b="0" i="0" sz="1400" u="none" cap="none" strike="noStrike">
+              <a:solidFill>
+                <a:srgbClr val="000000"/>
+              </a:solidFill>
+              <a:latin typeface="Arial"/>
+              <a:ea typeface="Arial"/>
+              <a:cs typeface="Arial"/>
+              <a:sym typeface="Arial"/>
+            </a:endParaRPr>
           </a:p>
         </p:txBody>
       </p:sp>
@@ -26976,6 +29393,11 @@
               <a:spcAft>
                 <a:spcPts val="0"/>
               </a:spcAft>
+              <a:buClr>
+                <a:srgbClr val="000000"/>
+              </a:buClr>
+              <a:buSzPts val="3600"/>
+              <a:buFont typeface="Arial"/>
               <a:buNone/>
             </a:pPr>
             <a:r>
@@ -26990,7 +29412,15 @@
               </a:rPr>
               <a:t>Padronização de Stacks de Desenvolvimento</a:t>
             </a:r>
-            <a:endParaRPr/>
+            <a:endParaRPr b="0" i="0" sz="1400" u="none" cap="none" strike="noStrike">
+              <a:solidFill>
+                <a:srgbClr val="000000"/>
+              </a:solidFill>
+              <a:latin typeface="Arial"/>
+              <a:ea typeface="Arial"/>
+              <a:cs typeface="Arial"/>
+              <a:sym typeface="Arial"/>
+            </a:endParaRPr>
           </a:p>
           <a:p>
             <a:pPr indent="0" lvl="0" marL="0" marR="0" rtl="0" algn="l">
@@ -27195,7 +29625,7 @@
         </p:blipFill>
         <p:spPr>
           <a:xfrm>
-            <a:off x="1" y="4787611"/>
+            <a:off x="1" y="4820582"/>
             <a:ext cx="1651231" cy="2070389"/>
           </a:xfrm>
           <a:prstGeom prst="rect">
@@ -27242,7 +29672,7 @@
         </p:nvSpPr>
         <p:spPr>
           <a:xfrm>
-            <a:off x="1026007" y="1371600"/>
+            <a:off x="1026007" y="1008917"/>
             <a:ext cx="4572000" cy="457200"/>
           </a:xfrm>
           <a:prstGeom prst="rect">
@@ -27311,8 +29741,8 @@
         </p:nvSpPr>
         <p:spPr>
           <a:xfrm>
-            <a:off x="1025999" y="2011680"/>
-            <a:ext cx="4468800" cy="3657600"/>
+            <a:off x="1026000" y="1648992"/>
+            <a:ext cx="5139600" cy="4176000"/>
           </a:xfrm>
           <a:prstGeom prst="rect">
             <a:avLst/>
@@ -27378,6 +29808,11 @@
               <a:spcAft>
                 <a:spcPts val="0"/>
               </a:spcAft>
+              <a:buClr>
+                <a:srgbClr val="000000"/>
+              </a:buClr>
+              <a:buSzPts val="1400"/>
+              <a:buFont typeface="Arial"/>
               <a:buNone/>
             </a:pPr>
             <a:r>
@@ -27391,78 +29826,6 @@
                 <a:sym typeface="Arial"/>
               </a:rPr>
               <a:t>• Decisões de stack isoladas por squad</a:t>
-            </a:r>
-            <a:endParaRPr/>
-          </a:p>
-          <a:p>
-            <a:pPr indent="0" lvl="0" marL="0" marR="0" rtl="0" algn="l">
-              <a:lnSpc>
-                <a:spcPct val="157142"/>
-              </a:lnSpc>
-              <a:spcBef>
-                <a:spcPts val="0"/>
-              </a:spcBef>
-              <a:spcAft>
-                <a:spcPts val="0"/>
-              </a:spcAft>
-              <a:buNone/>
-            </a:pPr>
-            <a:r>
-              <a:rPr b="0" i="0" lang="en-US" sz="1400" u="none" cap="none" strike="noStrike">
-                <a:solidFill>
-                  <a:srgbClr val="000000"/>
-                </a:solidFill>
-                <a:latin typeface="Arial"/>
-                <a:ea typeface="Arial"/>
-                <a:cs typeface="Arial"/>
-                <a:sym typeface="Arial"/>
-              </a:rPr>
-              <a:t>• Dificuldade de mobilidade entre times</a:t>
-            </a:r>
-            <a:endParaRPr/>
-          </a:p>
-          <a:p>
-            <a:pPr indent="0" lvl="0" marL="0" marR="0" rtl="0" algn="l">
-              <a:lnSpc>
-                <a:spcPct val="157142"/>
-              </a:lnSpc>
-              <a:spcBef>
-                <a:spcPts val="0"/>
-              </a:spcBef>
-              <a:spcAft>
-                <a:spcPts val="0"/>
-              </a:spcAft>
-              <a:buNone/>
-            </a:pPr>
-            <a:r>
-              <a:rPr b="0" i="0" lang="en-US" sz="1400" u="none" cap="none" strike="noStrike">
-                <a:solidFill>
-                  <a:srgbClr val="000000"/>
-                </a:solidFill>
-                <a:latin typeface="Arial"/>
-                <a:ea typeface="Arial"/>
-                <a:cs typeface="Arial"/>
-                <a:sym typeface="Arial"/>
-              </a:rPr>
-              <a:t>• Retrabalho em CI/CD e infraestrutura</a:t>
-            </a:r>
-            <a:endParaRPr/>
-          </a:p>
-          <a:p>
-            <a:pPr indent="0" lvl="0" marL="0" marR="0" rtl="0" algn="l">
-              <a:lnSpc>
-                <a:spcPct val="157142"/>
-              </a:lnSpc>
-              <a:spcBef>
-                <a:spcPts val="0"/>
-              </a:spcBef>
-              <a:spcAft>
-                <a:spcPts val="0"/>
-              </a:spcAft>
-              <a:buNone/>
-            </a:pPr>
-            <a:r>
-              <a:t/>
             </a:r>
             <a:endParaRPr b="0" i="0" sz="1400" u="none" cap="none" strike="noStrike">
               <a:solidFill>
@@ -27485,6 +29848,122 @@
               <a:spcAft>
                 <a:spcPts val="0"/>
               </a:spcAft>
+              <a:buClr>
+                <a:srgbClr val="000000"/>
+              </a:buClr>
+              <a:buSzPts val="1400"/>
+              <a:buFont typeface="Arial"/>
+              <a:buNone/>
+            </a:pPr>
+            <a:r>
+              <a:rPr b="0" i="0" lang="en-US" sz="1400" u="none" cap="none" strike="noStrike">
+                <a:solidFill>
+                  <a:srgbClr val="000000"/>
+                </a:solidFill>
+                <a:latin typeface="Arial"/>
+                <a:ea typeface="Arial"/>
+                <a:cs typeface="Arial"/>
+                <a:sym typeface="Arial"/>
+              </a:rPr>
+              <a:t>• Dificuldade de mobilidade entre times</a:t>
+            </a:r>
+            <a:endParaRPr b="0" i="0" sz="1400" u="none" cap="none" strike="noStrike">
+              <a:solidFill>
+                <a:srgbClr val="000000"/>
+              </a:solidFill>
+              <a:latin typeface="Arial"/>
+              <a:ea typeface="Arial"/>
+              <a:cs typeface="Arial"/>
+              <a:sym typeface="Arial"/>
+            </a:endParaRPr>
+          </a:p>
+          <a:p>
+            <a:pPr indent="0" lvl="0" marL="0" marR="0" rtl="0" algn="l">
+              <a:lnSpc>
+                <a:spcPct val="157142"/>
+              </a:lnSpc>
+              <a:spcBef>
+                <a:spcPts val="0"/>
+              </a:spcBef>
+              <a:spcAft>
+                <a:spcPts val="0"/>
+              </a:spcAft>
+              <a:buClr>
+                <a:srgbClr val="000000"/>
+              </a:buClr>
+              <a:buSzPts val="1400"/>
+              <a:buFont typeface="Arial"/>
+              <a:buNone/>
+            </a:pPr>
+            <a:r>
+              <a:rPr b="0" i="0" lang="en-US" sz="1400" u="none" cap="none" strike="noStrike">
+                <a:solidFill>
+                  <a:srgbClr val="000000"/>
+                </a:solidFill>
+                <a:latin typeface="Arial"/>
+                <a:ea typeface="Arial"/>
+                <a:cs typeface="Arial"/>
+                <a:sym typeface="Arial"/>
+              </a:rPr>
+              <a:t>• Retrabalho em CI/CD e infraestrutura</a:t>
+            </a:r>
+            <a:endParaRPr b="0" i="0" sz="1400" u="none" cap="none" strike="noStrike">
+              <a:solidFill>
+                <a:srgbClr val="000000"/>
+              </a:solidFill>
+              <a:latin typeface="Arial"/>
+              <a:ea typeface="Arial"/>
+              <a:cs typeface="Arial"/>
+              <a:sym typeface="Arial"/>
+            </a:endParaRPr>
+          </a:p>
+          <a:p>
+            <a:pPr indent="0" lvl="0" marL="0" marR="0" rtl="0" algn="l">
+              <a:lnSpc>
+                <a:spcPct val="157142"/>
+              </a:lnSpc>
+              <a:spcBef>
+                <a:spcPts val="0"/>
+              </a:spcBef>
+              <a:spcAft>
+                <a:spcPts val="0"/>
+              </a:spcAft>
+              <a:buClr>
+                <a:srgbClr val="000000"/>
+              </a:buClr>
+              <a:buSzPts val="1400"/>
+              <a:buFont typeface="Arial"/>
+              <a:buNone/>
+            </a:pPr>
+            <a:r>
+              <a:t/>
+            </a:r>
+            <a:endParaRPr b="0" i="0" sz="1400" u="none" cap="none" strike="noStrike">
+              <a:solidFill>
+                <a:srgbClr val="000000"/>
+              </a:solidFill>
+              <a:latin typeface="Arial"/>
+              <a:ea typeface="Arial"/>
+              <a:cs typeface="Arial"/>
+              <a:sym typeface="Arial"/>
+            </a:endParaRPr>
+          </a:p>
+          <a:p>
+            <a:pPr indent="0" lvl="0" marL="0" marR="0" rtl="0" algn="l">
+              <a:lnSpc>
+                <a:spcPct val="157142"/>
+              </a:lnSpc>
+              <a:spcBef>
+                <a:spcPts val="0"/>
+              </a:spcBef>
+              <a:spcAft>
+                <a:spcPts val="0"/>
+              </a:spcAft>
+              <a:buClr>
+                <a:srgbClr val="000000"/>
+              </a:buClr>
+              <a:buSzPts val="1400"/>
+              <a:buFont typeface="Arial"/>
               <a:buNone/>
             </a:pPr>
             <a:r>
@@ -27499,7 +29978,15 @@
               </a:rPr>
               <a:t>Proposta:</a:t>
             </a:r>
-            <a:endParaRPr/>
+            <a:endParaRPr b="0" i="0" sz="1400" u="none" cap="none" strike="noStrike">
+              <a:solidFill>
+                <a:srgbClr val="000000"/>
+              </a:solidFill>
+              <a:latin typeface="Arial"/>
+              <a:ea typeface="Arial"/>
+              <a:cs typeface="Arial"/>
+              <a:sym typeface="Arial"/>
+            </a:endParaRPr>
           </a:p>
           <a:p>
             <a:pPr indent="0" lvl="0" marL="0" marR="0" rtl="0" algn="l">
@@ -27512,6 +29999,11 @@
               <a:spcAft>
                 <a:spcPts val="0"/>
               </a:spcAft>
+              <a:buClr>
+                <a:srgbClr val="000000"/>
+              </a:buClr>
+              <a:buSzPts val="1400"/>
+              <a:buFont typeface="Arial"/>
               <a:buNone/>
             </a:pPr>
             <a:r>
@@ -27526,7 +30018,15 @@
               </a:rPr>
               <a:t>• Tech Radar: Adopt, Trial, Assess, Hold</a:t>
             </a:r>
-            <a:endParaRPr/>
+            <a:endParaRPr b="0" i="0" sz="1400" u="none" cap="none" strike="noStrike">
+              <a:solidFill>
+                <a:srgbClr val="000000"/>
+              </a:solidFill>
+              <a:latin typeface="Arial"/>
+              <a:ea typeface="Arial"/>
+              <a:cs typeface="Arial"/>
+              <a:sym typeface="Arial"/>
+            </a:endParaRPr>
           </a:p>
           <a:p>
             <a:pPr indent="0" lvl="0" marL="0" marR="0" rtl="0" algn="l">
@@ -27539,6 +30039,11 @@
               <a:spcAft>
                 <a:spcPts val="0"/>
               </a:spcAft>
+              <a:buClr>
+                <a:srgbClr val="000000"/>
+              </a:buClr>
+              <a:buSzPts val="1400"/>
+              <a:buFont typeface="Arial"/>
               <a:buNone/>
             </a:pPr>
             <a:r>
@@ -27553,7 +30058,15 @@
               </a:rPr>
               <a:t>• Processo de proposição de novas tecnologias</a:t>
             </a:r>
-            <a:endParaRPr/>
+            <a:endParaRPr b="0" i="0" sz="1400" u="none" cap="none" strike="noStrike">
+              <a:solidFill>
+                <a:srgbClr val="000000"/>
+              </a:solidFill>
+              <a:latin typeface="Arial"/>
+              <a:ea typeface="Arial"/>
+              <a:cs typeface="Arial"/>
+              <a:sym typeface="Arial"/>
+            </a:endParaRPr>
           </a:p>
           <a:p>
             <a:pPr indent="0" lvl="0" marL="0" marR="0" rtl="0" algn="l">
@@ -27566,6 +30079,11 @@
               <a:spcAft>
                 <a:spcPts val="0"/>
               </a:spcAft>
+              <a:buClr>
+                <a:srgbClr val="000000"/>
+              </a:buClr>
+              <a:buSzPts val="1400"/>
+              <a:buFont typeface="Arial"/>
               <a:buNone/>
             </a:pPr>
             <a:r>
@@ -27580,7 +30098,15 @@
               </a:rPr>
               <a:t>• Revisão semestral do radar</a:t>
             </a:r>
-            <a:endParaRPr/>
+            <a:endParaRPr b="0" i="0" sz="1400" u="none" cap="none" strike="noStrike">
+              <a:solidFill>
+                <a:srgbClr val="000000"/>
+              </a:solidFill>
+              <a:latin typeface="Arial"/>
+              <a:ea typeface="Arial"/>
+              <a:cs typeface="Arial"/>
+              <a:sym typeface="Arial"/>
+            </a:endParaRPr>
           </a:p>
           <a:p>
             <a:pPr indent="0" lvl="0" marL="0" marR="0" rtl="0" algn="l">
@@ -27593,6 +30119,11 @@
               <a:spcAft>
                 <a:spcPts val="0"/>
               </a:spcAft>
+              <a:buClr>
+                <a:srgbClr val="000000"/>
+              </a:buClr>
+              <a:buSzPts val="1400"/>
+              <a:buFont typeface="Arial"/>
               <a:buNone/>
             </a:pPr>
             <a:r>
@@ -27606,6 +30137,108 @@
                 <a:sym typeface="Arial"/>
               </a:rPr>
               <a:t>• Templates de projeto por stack aprovada</a:t>
+            </a:r>
+            <a:endParaRPr b="0" i="0" sz="1400" u="none" cap="none" strike="noStrike">
+              <a:solidFill>
+                <a:srgbClr val="000000"/>
+              </a:solidFill>
+              <a:latin typeface="Arial"/>
+              <a:ea typeface="Arial"/>
+              <a:cs typeface="Arial"/>
+              <a:sym typeface="Arial"/>
+            </a:endParaRPr>
+          </a:p>
+          <a:p>
+            <a:pPr indent="0" lvl="0" marL="0" rtl="0" algn="l">
+              <a:lnSpc>
+                <a:spcPct val="157142"/>
+              </a:lnSpc>
+              <a:spcBef>
+                <a:spcPts val="0"/>
+              </a:spcBef>
+              <a:spcAft>
+                <a:spcPts val="0"/>
+              </a:spcAft>
+              <a:buClr>
+                <a:srgbClr val="000000"/>
+              </a:buClr>
+              <a:buSzPts val="1400"/>
+              <a:buFont typeface="Arial"/>
+              <a:buNone/>
+            </a:pPr>
+            <a:r>
+              <a:rPr lang="en-US"/>
+              <a:t>• Ferramentas novas aprovadas pelo time de arquitetura</a:t>
+            </a:r>
+            <a:endParaRPr/>
+          </a:p>
+          <a:p>
+            <a:pPr indent="0" lvl="0" marL="0" rtl="0" algn="l">
+              <a:lnSpc>
+                <a:spcPct val="157142"/>
+              </a:lnSpc>
+              <a:spcBef>
+                <a:spcPts val="0"/>
+              </a:spcBef>
+              <a:spcAft>
+                <a:spcPts val="0"/>
+              </a:spcAft>
+              <a:buClr>
+                <a:srgbClr val="000000"/>
+              </a:buClr>
+              <a:buSzPts val="1400"/>
+              <a:buFont typeface="Arial"/>
+              <a:buNone/>
+            </a:pPr>
+            <a:r>
+              <a:rPr lang="en-US"/>
+              <a:t>• Novas demandas passam pelo time de arquitetura</a:t>
+            </a:r>
+            <a:endParaRPr/>
+          </a:p>
+          <a:p>
+            <a:pPr indent="0" lvl="0" marL="0" rtl="0" algn="l">
+              <a:lnSpc>
+                <a:spcPct val="157142"/>
+              </a:lnSpc>
+              <a:spcBef>
+                <a:spcPts val="0"/>
+              </a:spcBef>
+              <a:spcAft>
+                <a:spcPts val="0"/>
+              </a:spcAft>
+              <a:buClr>
+                <a:srgbClr val="000000"/>
+              </a:buClr>
+              <a:buSzPts val="1400"/>
+              <a:buFont typeface="Arial"/>
+              <a:buNone/>
+            </a:pPr>
+            <a:r>
+              <a:t/>
+            </a:r>
+            <a:endParaRPr/>
+          </a:p>
+          <a:p>
+            <a:pPr indent="0" lvl="0" marL="0" marR="0" rtl="0" algn="l">
+              <a:lnSpc>
+                <a:spcPct val="157142"/>
+              </a:lnSpc>
+              <a:spcBef>
+                <a:spcPts val="0"/>
+              </a:spcBef>
+              <a:spcAft>
+                <a:spcPts val="0"/>
+              </a:spcAft>
+              <a:buClr>
+                <a:srgbClr val="000000"/>
+              </a:buClr>
+              <a:buSzPts val="1400"/>
+              <a:buFont typeface="Arial"/>
+              <a:buNone/>
+            </a:pPr>
+            <a:r>
+              <a:t/>
             </a:r>
             <a:endParaRPr/>
           </a:p>
@@ -27619,8 +30252,8 @@
         </p:nvSpPr>
         <p:spPr>
           <a:xfrm>
-            <a:off x="1026011" y="320040"/>
-            <a:ext cx="9850500" cy="640080"/>
+            <a:off x="1026011" y="232117"/>
+            <a:ext cx="9850500" cy="640200"/>
           </a:xfrm>
           <a:prstGeom prst="rect">
             <a:avLst/>
@@ -27685,7 +30318,7 @@
         </p:nvSpPr>
         <p:spPr>
           <a:xfrm>
-            <a:off x="6757874" y="1371600"/>
+            <a:off x="6757874" y="1096840"/>
             <a:ext cx="4615800" cy="457200"/>
           </a:xfrm>
           <a:prstGeom prst="rect">
@@ -27751,7 +30384,7 @@
         </p:nvSpPr>
         <p:spPr>
           <a:xfrm>
-            <a:off x="6757879" y="2011680"/>
+            <a:off x="6757879" y="1736920"/>
             <a:ext cx="4118700" cy="3657600"/>
           </a:xfrm>
           <a:prstGeom prst="rect">
@@ -27818,6 +30451,11 @@
               <a:spcAft>
                 <a:spcPts val="0"/>
               </a:spcAft>
+              <a:buClr>
+                <a:srgbClr val="000000"/>
+              </a:buClr>
+              <a:buSzPts val="1400"/>
+              <a:buFont typeface="Arial"/>
               <a:buNone/>
             </a:pPr>
             <a:r>
@@ -27832,7 +30470,15 @@
               </a:rPr>
               <a:t>• Onboarding acelerado de novos devs</a:t>
             </a:r>
-            <a:endParaRPr/>
+            <a:endParaRPr b="0" i="0" sz="1400" u="none" cap="none" strike="noStrike">
+              <a:solidFill>
+                <a:srgbClr val="000000"/>
+              </a:solidFill>
+              <a:latin typeface="Arial"/>
+              <a:ea typeface="Arial"/>
+              <a:cs typeface="Arial"/>
+              <a:sym typeface="Arial"/>
+            </a:endParaRPr>
           </a:p>
           <a:p>
             <a:pPr indent="0" lvl="0" marL="0" marR="0" rtl="0" algn="l">
@@ -27845,6 +30491,11 @@
               <a:spcAft>
                 <a:spcPts val="0"/>
               </a:spcAft>
+              <a:buClr>
+                <a:srgbClr val="000000"/>
+              </a:buClr>
+              <a:buSzPts val="1400"/>
+              <a:buFont typeface="Arial"/>
               <a:buNone/>
             </a:pPr>
             <a:r>
@@ -27859,7 +30510,15 @@
               </a:rPr>
               <a:t>• Reutilização de componentes e libs</a:t>
             </a:r>
-            <a:endParaRPr/>
+            <a:endParaRPr b="0" i="0" sz="1400" u="none" cap="none" strike="noStrike">
+              <a:solidFill>
+                <a:srgbClr val="000000"/>
+              </a:solidFill>
+              <a:latin typeface="Arial"/>
+              <a:ea typeface="Arial"/>
+              <a:cs typeface="Arial"/>
+              <a:sym typeface="Arial"/>
+            </a:endParaRPr>
           </a:p>
           <a:p>
             <a:pPr indent="0" lvl="0" marL="0" marR="0" rtl="0" algn="l">
@@ -27872,6 +30531,11 @@
               <a:spcAft>
                 <a:spcPts val="0"/>
               </a:spcAft>
+              <a:buClr>
+                <a:srgbClr val="000000"/>
+              </a:buClr>
+              <a:buSzPts val="1400"/>
+              <a:buFont typeface="Arial"/>
               <a:buNone/>
             </a:pPr>
             <a:r>
@@ -27886,7 +30550,15 @@
               </a:rPr>
               <a:t>• Menor superfície de vulnerabilidades</a:t>
             </a:r>
-            <a:endParaRPr/>
+            <a:endParaRPr b="0" i="0" sz="1400" u="none" cap="none" strike="noStrike">
+              <a:solidFill>
+                <a:srgbClr val="000000"/>
+              </a:solidFill>
+              <a:latin typeface="Arial"/>
+              <a:ea typeface="Arial"/>
+              <a:cs typeface="Arial"/>
+              <a:sym typeface="Arial"/>
+            </a:endParaRPr>
           </a:p>
         </p:txBody>
       </p:sp>
@@ -28036,6 +30708,11 @@
               <a:spcAft>
                 <a:spcPts val="0"/>
               </a:spcAft>
+              <a:buClr>
+                <a:srgbClr val="000000"/>
+              </a:buClr>
+              <a:buSzPts val="3600"/>
+              <a:buFont typeface="Arial"/>
               <a:buNone/>
             </a:pPr>
             <a:r>
@@ -28050,7 +30727,15 @@
               </a:rPr>
               <a:t>Padronização de Decisões Arquiteturais (ADR)</a:t>
             </a:r>
-            <a:endParaRPr/>
+            <a:endParaRPr b="0" i="0" sz="1400" u="none" cap="none" strike="noStrike">
+              <a:solidFill>
+                <a:srgbClr val="000000"/>
+              </a:solidFill>
+              <a:latin typeface="Arial"/>
+              <a:ea typeface="Arial"/>
+              <a:cs typeface="Arial"/>
+              <a:sym typeface="Arial"/>
+            </a:endParaRPr>
           </a:p>
           <a:p>
             <a:pPr indent="0" lvl="0" marL="0" marR="0" rtl="0" algn="l">
@@ -28438,6 +31123,11 @@
               <a:spcAft>
                 <a:spcPts val="0"/>
               </a:spcAft>
+              <a:buClr>
+                <a:srgbClr val="000000"/>
+              </a:buClr>
+              <a:buSzPts val="1400"/>
+              <a:buFont typeface="Arial"/>
               <a:buNone/>
             </a:pPr>
             <a:r>
@@ -28452,7 +31142,15 @@
               </a:rPr>
               <a:t>• Status: Proposto → Aprovado → Superseded</a:t>
             </a:r>
-            <a:endParaRPr/>
+            <a:endParaRPr b="0" i="0" sz="1400" u="none" cap="none" strike="noStrike">
+              <a:solidFill>
+                <a:srgbClr val="000000"/>
+              </a:solidFill>
+              <a:latin typeface="Arial"/>
+              <a:ea typeface="Arial"/>
+              <a:cs typeface="Arial"/>
+              <a:sym typeface="Arial"/>
+            </a:endParaRPr>
           </a:p>
           <a:p>
             <a:pPr indent="0" lvl="0" marL="0" marR="0" rtl="0" algn="l">
@@ -28465,6 +31163,11 @@
               <a:spcAft>
                 <a:spcPts val="0"/>
               </a:spcAft>
+              <a:buClr>
+                <a:srgbClr val="000000"/>
+              </a:buClr>
+              <a:buSzPts val="1400"/>
+              <a:buFont typeface="Arial"/>
               <a:buNone/>
             </a:pPr>
             <a:r>
@@ -28479,7 +31182,15 @@
               </a:rPr>
               <a:t>• Contexto: problema ou necessidade</a:t>
             </a:r>
-            <a:endParaRPr/>
+            <a:endParaRPr b="0" i="0" sz="1400" u="none" cap="none" strike="noStrike">
+              <a:solidFill>
+                <a:srgbClr val="000000"/>
+              </a:solidFill>
+              <a:latin typeface="Arial"/>
+              <a:ea typeface="Arial"/>
+              <a:cs typeface="Arial"/>
+              <a:sym typeface="Arial"/>
+            </a:endParaRPr>
           </a:p>
           <a:p>
             <a:pPr indent="0" lvl="0" marL="0" marR="0" rtl="0" algn="l">
@@ -28492,6 +31203,11 @@
               <a:spcAft>
                 <a:spcPts val="0"/>
               </a:spcAft>
+              <a:buClr>
+                <a:srgbClr val="000000"/>
+              </a:buClr>
+              <a:buSzPts val="1400"/>
+              <a:buFont typeface="Arial"/>
               <a:buNone/>
             </a:pPr>
             <a:r>
@@ -28506,7 +31222,15 @@
               </a:rPr>
               <a:t>• Decisão: solução escolhida</a:t>
             </a:r>
-            <a:endParaRPr/>
+            <a:endParaRPr b="0" i="0" sz="1400" u="none" cap="none" strike="noStrike">
+              <a:solidFill>
+                <a:srgbClr val="000000"/>
+              </a:solidFill>
+              <a:latin typeface="Arial"/>
+              <a:ea typeface="Arial"/>
+              <a:cs typeface="Arial"/>
+              <a:sym typeface="Arial"/>
+            </a:endParaRPr>
           </a:p>
           <a:p>
             <a:pPr indent="0" lvl="0" marL="0" marR="0" rtl="0" algn="l">
@@ -28519,6 +31243,11 @@
               <a:spcAft>
                 <a:spcPts val="0"/>
               </a:spcAft>
+              <a:buClr>
+                <a:srgbClr val="000000"/>
+              </a:buClr>
+              <a:buSzPts val="1400"/>
+              <a:buFont typeface="Arial"/>
               <a:buNone/>
             </a:pPr>
             <a:r>
@@ -28533,7 +31262,15 @@
               </a:rPr>
               <a:t>• Alternativas consideradas</a:t>
             </a:r>
-            <a:endParaRPr/>
+            <a:endParaRPr b="0" i="0" sz="1400" u="none" cap="none" strike="noStrike">
+              <a:solidFill>
+                <a:srgbClr val="000000"/>
+              </a:solidFill>
+              <a:latin typeface="Arial"/>
+              <a:ea typeface="Arial"/>
+              <a:cs typeface="Arial"/>
+              <a:sym typeface="Arial"/>
+            </a:endParaRPr>
           </a:p>
           <a:p>
             <a:pPr indent="0" lvl="0" marL="0" marR="0" rtl="0" algn="l">
@@ -28546,6 +31283,11 @@
               <a:spcAft>
                 <a:spcPts val="0"/>
               </a:spcAft>
+              <a:buClr>
+                <a:srgbClr val="000000"/>
+              </a:buClr>
+              <a:buSzPts val="1400"/>
+              <a:buFont typeface="Arial"/>
               <a:buNone/>
             </a:pPr>
             <a:r>
@@ -28558,7 +31300,51 @@
                 <a:cs typeface="Arial"/>
                 <a:sym typeface="Arial"/>
               </a:rPr>
-              <a:t>• Consequências: trade-offs aceitos</a:t>
+              <a:t>• </a:t>
+            </a:r>
+            <a:r>
+              <a:rPr b="0" i="0" lang="en-US" sz="1400" u="none" cap="none" strike="noStrike">
+                <a:solidFill>
+                  <a:srgbClr val="000000"/>
+                </a:solidFill>
+                <a:latin typeface="Arial"/>
+                <a:ea typeface="Arial"/>
+                <a:cs typeface="Arial"/>
+                <a:sym typeface="Arial"/>
+              </a:rPr>
+              <a:t>Consequências: trade-offs aceitos</a:t>
+            </a:r>
+            <a:endParaRPr b="0" i="0" sz="1400" u="none" cap="none" strike="noStrike">
+              <a:solidFill>
+                <a:srgbClr val="000000"/>
+              </a:solidFill>
+              <a:latin typeface="Arial"/>
+              <a:ea typeface="Arial"/>
+              <a:cs typeface="Arial"/>
+              <a:sym typeface="Arial"/>
+            </a:endParaRPr>
+          </a:p>
+          <a:p>
+            <a:pPr indent="0" lvl="0" marL="0" rtl="0" algn="l">
+              <a:lnSpc>
+                <a:spcPct val="157142"/>
+              </a:lnSpc>
+              <a:spcBef>
+                <a:spcPts val="0"/>
+              </a:spcBef>
+              <a:spcAft>
+                <a:spcPts val="0"/>
+              </a:spcAft>
+              <a:buClr>
+                <a:srgbClr val="000000"/>
+              </a:buClr>
+              <a:buSzPts val="1400"/>
+              <a:buFont typeface="Arial"/>
+              <a:buNone/>
+            </a:pPr>
+            <a:r>
+              <a:rPr lang="en-US"/>
+              <a:t>• Publicação Geral de ADRs</a:t>
             </a:r>
             <a:endParaRPr/>
           </a:p>
@@ -28771,6 +31557,11 @@
               <a:spcAft>
                 <a:spcPts val="0"/>
               </a:spcAft>
+              <a:buClr>
+                <a:srgbClr val="000000"/>
+              </a:buClr>
+              <a:buSzPts val="1400"/>
+              <a:buFont typeface="Arial"/>
               <a:buNone/>
             </a:pPr>
             <a:r>
@@ -28785,7 +31576,15 @@
               </a:rPr>
               <a:t>2. Revisão pelo time de arquitetura</a:t>
             </a:r>
-            <a:endParaRPr/>
+            <a:endParaRPr b="0" i="0" sz="1400" u="none" cap="none" strike="noStrike">
+              <a:solidFill>
+                <a:srgbClr val="000000"/>
+              </a:solidFill>
+              <a:latin typeface="Arial"/>
+              <a:ea typeface="Arial"/>
+              <a:cs typeface="Arial"/>
+              <a:sym typeface="Arial"/>
+            </a:endParaRPr>
           </a:p>
           <a:p>
             <a:pPr indent="0" lvl="0" marL="0" marR="0" rtl="0" algn="l">
@@ -28798,6 +31597,11 @@
               <a:spcAft>
                 <a:spcPts val="0"/>
               </a:spcAft>
+              <a:buClr>
+                <a:srgbClr val="000000"/>
+              </a:buClr>
+              <a:buSzPts val="1400"/>
+              <a:buFont typeface="Arial"/>
               <a:buNone/>
             </a:pPr>
             <a:r>
@@ -28812,7 +31616,15 @@
               </a:rPr>
               <a:t>3. Discussão no comitê (se necessário)</a:t>
             </a:r>
-            <a:endParaRPr/>
+            <a:endParaRPr b="0" i="0" sz="1400" u="none" cap="none" strike="noStrike">
+              <a:solidFill>
+                <a:srgbClr val="000000"/>
+              </a:solidFill>
+              <a:latin typeface="Arial"/>
+              <a:ea typeface="Arial"/>
+              <a:cs typeface="Arial"/>
+              <a:sym typeface="Arial"/>
+            </a:endParaRPr>
           </a:p>
           <a:p>
             <a:pPr indent="0" lvl="0" marL="0" marR="0" rtl="0" algn="l">
@@ -28825,6 +31637,11 @@
               <a:spcAft>
                 <a:spcPts val="0"/>
               </a:spcAft>
+              <a:buClr>
+                <a:srgbClr val="000000"/>
+              </a:buClr>
+              <a:buSzPts val="1400"/>
+              <a:buFont typeface="Arial"/>
               <a:buNone/>
             </a:pPr>
             <a:r>
@@ -28839,7 +31656,15 @@
               </a:rPr>
               <a:t>4. Aprovação e merge no repositório</a:t>
             </a:r>
-            <a:endParaRPr/>
+            <a:endParaRPr b="0" i="0" sz="1400" u="none" cap="none" strike="noStrike">
+              <a:solidFill>
+                <a:srgbClr val="000000"/>
+              </a:solidFill>
+              <a:latin typeface="Arial"/>
+              <a:ea typeface="Arial"/>
+              <a:cs typeface="Arial"/>
+              <a:sym typeface="Arial"/>
+            </a:endParaRPr>
           </a:p>
           <a:p>
             <a:pPr indent="0" lvl="0" marL="0" marR="0" rtl="0" algn="l">
@@ -28852,6 +31677,11 @@
               <a:spcAft>
                 <a:spcPts val="0"/>
               </a:spcAft>
+              <a:buClr>
+                <a:srgbClr val="000000"/>
+              </a:buClr>
+              <a:buSzPts val="1400"/>
+              <a:buFont typeface="Arial"/>
               <a:buNone/>
             </a:pPr>
             <a:r>
@@ -28865,6 +31695,38 @@
                 <a:sym typeface="Arial"/>
               </a:rPr>
               <a:t>5. Comunicação aos times impactados</a:t>
+            </a:r>
+            <a:endParaRPr b="0" i="0" sz="1400" u="none" cap="none" strike="noStrike">
+              <a:solidFill>
+                <a:srgbClr val="000000"/>
+              </a:solidFill>
+              <a:latin typeface="Arial"/>
+              <a:ea typeface="Arial"/>
+              <a:cs typeface="Arial"/>
+              <a:sym typeface="Arial"/>
+            </a:endParaRPr>
+          </a:p>
+          <a:p>
+            <a:pPr indent="0" lvl="0" marL="0" marR="0" rtl="0" algn="l">
+              <a:lnSpc>
+                <a:spcPct val="157142"/>
+              </a:lnSpc>
+              <a:spcBef>
+                <a:spcPts val="0"/>
+              </a:spcBef>
+              <a:spcAft>
+                <a:spcPts val="0"/>
+              </a:spcAft>
+              <a:buClr>
+                <a:srgbClr val="000000"/>
+              </a:buClr>
+              <a:buSzPts val="1400"/>
+              <a:buFont typeface="Arial"/>
+              <a:buNone/>
+            </a:pPr>
+            <a:r>
+              <a:rPr lang="en-US"/>
+              <a:t>6. Publicação Geral de ADRs</a:t>
             </a:r>
             <a:endParaRPr/>
           </a:p>
